--- a/lecons/F2/15_F2_M2_FS05_Informal_Sector_Activities_in_African_Cities.pptx
+++ b/lecons/F2/15_F2_M2_FS05_Informal_Sector_Activities_in_African_Cities.pptx
@@ -55,9 +55,19 @@
     <p:sldId id="303" r:id="rId49"/>
     <p:sldId id="304" r:id="rId50"/>
     <p:sldId id="305" r:id="rId51"/>
+    <p:sldId id="306" r:id="rId52"/>
+    <p:sldId id="307" r:id="rId53"/>
+    <p:sldId id="308" r:id="rId54"/>
+    <p:sldId id="309" r:id="rId55"/>
+    <p:sldId id="310" r:id="rId56"/>
+    <p:sldId id="311" r:id="rId57"/>
+    <p:sldId id="312" r:id="rId58"/>
+    <p:sldId id="313" r:id="rId59"/>
+    <p:sldId id="314" r:id="rId60"/>
+    <p:sldId id="315" r:id="rId61"/>
   </p:sldIdLst>
   <p:notesMasterIdLst>
-    <p:notesMasterId r:id="rId52"/>
+    <p:notesMasterId r:id="rId62"/>
   </p:notesMasterIdLst>
   <p:sldSz cx="12192000" cy="6858000"/>
   <p:notesSz cx="6858000" cy="12192000"/>
@@ -727,7 +737,7 @@
           <a:p>
             <a:r>
               <a:rPr lang="en-US" dirty="0"/>
-              <a:t>Good. Moussa works in the informal sector without protection.</a:t>
+              <a:t>Good. Moussa wonders whether his informal job is good for him, because it gives money but no protection.</a:t>
             </a:r>
             <a:endParaRPr lang="en-US" dirty="0"/>
           </a:p>
@@ -903,7 +913,7 @@
           <a:p>
             <a:r>
               <a:rPr lang="en-US" dirty="0"/>
-              <a:t>Good. Moto-taxi driver.</a:t>
+              <a:t>Good. He is a moto-taxi driver.</a:t>
             </a:r>
             <a:endParaRPr lang="en-US" dirty="0"/>
           </a:p>
@@ -1079,7 +1089,7 @@
           <a:p>
             <a:r>
               <a:rPr lang="en-US" dirty="0"/>
-              <a:t>Good. He earns money every day; he has no insurance or pension.</a:t>
+              <a:t>Good. He earns money every day; he has no insurance.</a:t>
             </a:r>
             <a:endParaRPr lang="en-US" dirty="0"/>
           </a:p>
@@ -1431,7 +1441,7 @@
           <a:p>
             <a:r>
               <a:rPr lang="en-US" dirty="0"/>
-              <a:t>Here is the question for Activity 1: Name four types of informal activities. Take one minute to think and write your answer in your rough notebook.</a:t>
+              <a:t>Here is the question for Activity 1: To which type of informal activity do moto-taxis belong? Take one minute to think and write your answer in your rough notebook.</a:t>
             </a:r>
             <a:endParaRPr lang="en-US" dirty="0"/>
           </a:p>
@@ -1607,7 +1617,7 @@
           <a:p>
             <a:r>
               <a:rPr lang="en-US" dirty="0"/>
-              <a:t>Let us check the answer together. Transport (moto-taxi), street trade, crafts (tailoring) and repairs (also food selling).</a:t>
+              <a:t>Let us check the answer together. Transport.</a:t>
             </a:r>
             <a:endParaRPr lang="en-US" dirty="0"/>
           </a:p>
@@ -1783,7 +1793,7 @@
           <a:p>
             <a:r>
               <a:rPr lang="en-US" dirty="0"/>
-              <a:t>Here is the question for Activity 2: Which type of informal activity is this? Take one minute to think and write your answer in your rough notebook.</a:t>
+              <a:t>Here is the question for Activity 2: To which type of informal activity does this tailor belong? Take one minute to think and write your answer in your rough notebook.</a:t>
             </a:r>
             <a:endParaRPr lang="en-US" dirty="0"/>
           </a:p>
@@ -1871,7 +1881,7 @@
           <a:p>
             <a:r>
               <a:rPr lang="en-US" dirty="0"/>
-              <a:t>Let us check the answer together. A craft (tailoring).</a:t>
+              <a:t>Let us check the answer together. Crafts (small workshops).</a:t>
             </a:r>
             <a:endParaRPr lang="en-US" dirty="0"/>
           </a:p>
@@ -2047,7 +2057,7 @@
           <a:p>
             <a:r>
               <a:rPr lang="en-US" dirty="0"/>
-              <a:t>Here is the question for Activity 3: Give three characteristics of informal activities. Take one minute to think and write your answer in your rough notebook.</a:t>
+              <a:t>Here is the question for Activity 3: How much money does this seller need to start his business? Take one minute to think and write your answer in your rough notebook.</a:t>
             </a:r>
             <a:endParaRPr lang="en-US" dirty="0"/>
           </a:p>
@@ -2135,7 +2145,7 @@
           <a:p>
             <a:r>
               <a:rPr lang="en-US" dirty="0"/>
-              <a:t>Let us check the answer together. Small capital, no registration or taxes, and family or self-employment.</a:t>
+              <a:t>Let us check the answer together. Very little: informal activities need small capital and little training.</a:t>
             </a:r>
             <a:endParaRPr lang="en-US" dirty="0"/>
           </a:p>
@@ -2311,7 +2321,7 @@
           <a:p>
             <a:r>
               <a:rPr lang="en-US" dirty="0"/>
-              <a:t>Here is the question for Activity 4: Why is the informal sector important? Take one minute to think and write your answer in your rough notebook.</a:t>
+              <a:t>Here is the question for Activity 4: Why do so many families depend on small trades? Take one minute to think and write your answer in your rough notebook.</a:t>
             </a:r>
             <a:endParaRPr lang="en-US" dirty="0"/>
           </a:p>
@@ -2399,7 +2409,7 @@
           <a:p>
             <a:r>
               <a:rPr lang="en-US" dirty="0"/>
-              <a:t>Let us check the answer together. It gives jobs and income to many people and provides cheap goods and services.</a:t>
+              <a:t>Let us check the answer together. They give jobs and daily income to people who cannot find other work.</a:t>
             </a:r>
             <a:endParaRPr lang="en-US" dirty="0"/>
           </a:p>
@@ -2487,7 +2497,7 @@
           <a:p>
             <a:r>
               <a:rPr lang="en-US" dirty="0"/>
-              <a:t>Our topic is Space Occupation, and the sub-topic is Towns and Country Sides of Africa. The key notions we shall use today are: informal sector, small trade, self-employment, tax. At the end, you should be able to do this: learners are able to describe the informal sector and judge its advantages and limits.</a:t>
+              <a:t>Our topic is Space Occupation, and the sub-topic is Towns and Country Sides of Africa. The key notions we shall use today are: informal sector, small trade, self-employment, tax. At the end, you should be able to do this: learners are able to describe the informal sector and judge its importance and its limits.</a:t>
             </a:r>
             <a:endParaRPr lang="en-US" dirty="0"/>
           </a:p>
@@ -2663,7 +2673,7 @@
           <a:p>
             <a:r>
               <a:rPr lang="en-US" dirty="0"/>
-              <a:t>Here is the question for Activity 5: Give two limitations of the informal sector. Take one minute to think and write your answer in your rough notebook.</a:t>
+              <a:t>Here is the question for Activity 5: What does the informal worker lack compared with the formal worker? Take one minute to think and write your answer in your rough notebook.</a:t>
             </a:r>
             <a:endParaRPr lang="en-US" dirty="0"/>
           </a:p>
@@ -2751,7 +2761,7 @@
           <a:p>
             <a:r>
               <a:rPr lang="en-US" dirty="0"/>
-              <a:t>Let us check the answer together. No social security or pension, and low, irregular income (also no taxes for the state).</a:t>
+              <a:t>Let us check the answer together. A contract, a regular salary, insurance and a pension (CNPS).</a:t>
             </a:r>
             <a:endParaRPr lang="en-US" dirty="0"/>
           </a:p>
@@ -2927,7 +2937,7 @@
           <a:p>
             <a:r>
               <a:rPr lang="en-US" dirty="0"/>
-              <a:t>Let us copy the definitions. The key terms of this lesson are defined as follows. On this slide we have Informal sector. Write each point on a new line, with the key term first, and explain it in your own words when we revise.</a:t>
+              <a:t>Let us copy the definitions. The key terms of this lesson are defined as follows. On this slide we have Informal sector and Small trade. Write each point on a new line, with the key term first, and explain it in your own words when we revise. When you finish, we go to the next slide.</a:t>
             </a:r>
             <a:endParaRPr lang="en-US" dirty="0"/>
           </a:p>
@@ -3015,7 +3025,7 @@
           <a:p>
             <a:r>
               <a:rPr lang="en-US" dirty="0"/>
-              <a:t>Let us copy Types and Characteristics. Informal activities have the following types and characteristics. On this slide we have Types and Characteristics. Write each point on a new line, with the key term first, and explain it in your own words when we revise.</a:t>
+              <a:t>We continue with the definitions. On this slide we have Self-employment. Write each point on a new line, with the key term first, and explain it in your own words when we revise.</a:t>
             </a:r>
             <a:endParaRPr lang="en-US" dirty="0"/>
           </a:p>
@@ -3103,7 +3113,7 @@
           <a:p>
             <a:r>
               <a:rPr lang="en-US" dirty="0"/>
-              <a:t>Let us copy Importance. The informal sector is important for the following reasons. On this slide we have Jobs and income and Cheap goods and services. Write each point on a new line, with the key term first, and explain it in your own words when we revise.</a:t>
+              <a:t>Let us copy Types of Informal Activities. The main types of informal activities are the following. Copy the point on Small trade on the left, then draw the diagram on the right: a street seller. Give it a title and label it clearly.</a:t>
             </a:r>
             <a:endParaRPr lang="en-US" dirty="0"/>
           </a:p>
@@ -3191,7 +3201,7 @@
           <a:p>
             <a:r>
               <a:rPr lang="en-US" dirty="0"/>
-              <a:t>Let us copy Limitations. The informal sector has the following limitations. On this slide we have For workers and For the state and towns. Write each point on a new line, with the key term first, and explain it in your own words when we revise.</a:t>
+              <a:t>Copy the point on Transport on the left, then draw the diagram on the right: moto-taxis. Give it a title and label it clearly.</a:t>
             </a:r>
             <a:endParaRPr lang="en-US" dirty="0"/>
           </a:p>
@@ -3279,7 +3289,7 @@
           <a:p>
             <a:r>
               <a:rPr lang="en-US" dirty="0"/>
-              <a:t>Now draw this illustration in your notebook: formal and informal sectors. Give it a title and label it clearly.</a:t>
+              <a:t>Copy the point on Crafts on the left, then draw the diagram on the right: a tailor. Give it a title and label it clearly.</a:t>
             </a:r>
             <a:endParaRPr lang="en-US" dirty="0"/>
           </a:p>
@@ -3367,7 +3377,7 @@
           <a:p>
             <a:r>
               <a:rPr lang="en-US" dirty="0"/>
-              <a:t>Now let us check what you have understood. Question 1: Give two characteristics of informal activities. Answer in your exercise book.</a:t>
+              <a:t>We continue with Types of Informal Activities. On this slide we have Repairs and Food services. Write each point on a new line, with the key term first, and explain it in your own words when we revise.</a:t>
             </a:r>
             <a:endParaRPr lang="en-US" dirty="0"/>
           </a:p>
@@ -3543,7 +3553,7 @@
           <a:p>
             <a:r>
               <a:rPr lang="en-US" dirty="0"/>
-              <a:t>The expected answer is: little capital and no registration. If you got it right, well done.</a:t>
+              <a:t>Let us copy General Characteristics. Informal activities have the following characteristics. On this slide we have Small capital and No registration. Write each point on a new line, with the key term first, and explain it in your own words when we revise. When you finish, we go to the next slide.</a:t>
             </a:r>
             <a:endParaRPr lang="en-US" dirty="0"/>
           </a:p>
@@ -3631,7 +3641,7 @@
           <a:p>
             <a:r>
               <a:rPr lang="en-US" dirty="0"/>
-              <a:t>Now let us check what you have understood. Question 2: Give one importance and one limitation. Answer in your exercise book.</a:t>
+              <a:t>We continue with General Characteristics. On this slide we have Little training and Family or self-employment. Write each point on a new line, with the key term first, and explain it in your own words when we revise. When you finish, we go to the next slide.</a:t>
             </a:r>
             <a:endParaRPr lang="en-US" dirty="0"/>
           </a:p>
@@ -3719,7 +3729,7 @@
           <a:p>
             <a:r>
               <a:rPr lang="en-US" dirty="0"/>
-              <a:t>The expected answer is: it gives jobs; workers have no pension. If you got it right, well done.</a:t>
+              <a:t>We continue with General Characteristics. On this slide we have Irregular income and place. Write each point on a new line, with the key term first, and explain it in your own words when we revise.</a:t>
             </a:r>
             <a:endParaRPr lang="en-US" dirty="0"/>
           </a:p>
@@ -3807,7 +3817,7 @@
           <a:p>
             <a:r>
               <a:rPr lang="en-US" dirty="0"/>
-              <a:t>For those who need more practice, fill in the blanks in your exercise book. The answers are: number 1, registered; number 2, informal; number 3, pension (or insurance).</a:t>
+              <a:t>Let us copy Importance of the Informal Sector. The informal sector is important for the following reasons. Copy the point on Jobs on the left, then draw the diagram on the right: a busy market. Give it a title and label it clearly.</a:t>
             </a:r>
             <a:endParaRPr lang="en-US" dirty="0"/>
           </a:p>
@@ -3895,7 +3905,7 @@
           <a:p>
             <a:r>
               <a:rPr lang="en-US" dirty="0"/>
-              <a:t>For your homework: Interview one informal worker: his job, his income and his main problem. We shall correct it at the beginning of our next lesson.</a:t>
+              <a:t>We continue with Importance of the Informal Sector. On this slide we have Income, Cheap goods and services and Training. Write each point on a new line, with the key term first, and explain it in your own words when we revise. When you finish, we go to the next slide.</a:t>
             </a:r>
             <a:endParaRPr lang="en-US" dirty="0"/>
           </a:p>
@@ -3983,7 +3993,7 @@
           <a:p>
             <a:r>
               <a:rPr lang="en-US" dirty="0"/>
-              <a:t>Our next lesson will be on Practical Work 4: Location of the Regional and Divisional Headquarters of Cameroon. Thank you for your attention, and see you next time.</a:t>
+              <a:t>We continue with Importance of the Informal Sector. On this slide we have Links with the countryside. Write each point on a new line, with the key term first, and explain it in your own words when we revise.</a:t>
             </a:r>
             <a:endParaRPr lang="en-US" dirty="0"/>
           </a:p>
@@ -4071,7 +4081,7 @@
           <a:p>
             <a:r>
               <a:rPr lang="en-US" dirty="0"/>
-              <a:t>Let us play the bilingual game. I say a word in English, and you give me the French word. Then we do the reverse.</a:t>
+              <a:t>Let us copy Limitations of the Informal Sector. The informal sector has the following limitations. Copy the point on No social protection on the left, then draw the diagram on the right: formal and informal sectors. Give it a title and label it clearly.</a:t>
             </a:r>
             <a:endParaRPr lang="en-US" dirty="0"/>
           </a:p>
@@ -4159,7 +4169,7 @@
           <a:p>
             <a:r>
               <a:rPr lang="en-US" dirty="0"/>
-              <a:t>I record this information in the official logbook of the class after the lesson.</a:t>
+              <a:t>We continue with Limitations of the Informal Sector. On this slide we have Low and irregular income, Loss of taxes and Disorder and pollution. Write each point on a new line, with the key term first, and explain it in your own words when we revise. When you finish, we go to the next slide.</a:t>
             </a:r>
             <a:endParaRPr lang="en-US" dirty="0"/>
           </a:p>
@@ -4247,7 +4257,7 @@
           <a:p>
             <a:r>
               <a:rPr lang="en-US" dirty="0"/>
-              <a:t>I complete the second page of the logbook: the matter taught, the evaluation, the homework and the attendance.</a:t>
+              <a:t>We continue with Limitations of the Informal Sector. On this slide we have Accidents and poor quality. Write each point on a new line, with the key term first, and explain it in your own words when we revise.</a:t>
             </a:r>
             <a:endParaRPr lang="en-US" dirty="0"/>
           </a:p>
@@ -4335,7 +4345,7 @@
           <a:p>
             <a:r>
               <a:rPr lang="en-US" dirty="0"/>
-              <a:t>This slide is for me, the teacher: it gives the timing of the lesson and what to do if the projector is not available.</a:t>
+              <a:t>Now let us check what you have understood. Question 1: Give two characteristics of informal activities. Answer in your exercise book.</a:t>
             </a:r>
             <a:endParaRPr lang="en-US" dirty="0"/>
           </a:p>
@@ -4511,7 +4521,7 @@
           <a:p>
             <a:r>
               <a:rPr lang="en-US" dirty="0"/>
-              <a:t>These are the references and picture credits used to prepare this lesson.</a:t>
+              <a:t>The expected answer is: little capital and no registration. If you got it right, well done.</a:t>
             </a:r>
             <a:endParaRPr lang="en-US" dirty="0"/>
           </a:p>
@@ -4535,6 +4545,798 @@
             <a:fld id="{F7021451-1387-4CA6-816F-3879F97B5CBC}" type="slidenum">
               <a:rPr lang="en-US"/>
               <a:t>50</a:t>
+            </a:fld>
+            <a:endParaRPr lang="en-US"/>
+          </a:p>
+        </p:txBody>
+      </p:sp>
+    </p:spTree>
+    <p:extLst>
+      <p:ext uri="{BB962C8B-B14F-4D97-AF65-F5344CB8AC3E}">
+        <p14:creationId xmlns:p14="http://schemas.microsoft.com/office/powerpoint/2010/main" val="1024086991"/>
+      </p:ext>
+    </p:extLst>
+  </p:cSld>
+  <p:clrMapOvr>
+    <a:masterClrMapping/>
+  </p:clrMapOvr>
+</p:notes>
+</file>
+
+<file path=ppt/notesSlides/notesSlide51.xml><?xml version="1.0" encoding="utf-8"?>
+<p:notes xmlns:a="http://schemas.openxmlformats.org/drawingml/2006/main" xmlns:r="http://schemas.openxmlformats.org/officeDocument/2006/relationships" xmlns:p="http://schemas.openxmlformats.org/presentationml/2006/main">
+  <p:cSld>
+    <p:spTree>
+      <p:nvGrpSpPr>
+        <p:cNvPr id="1" name=""/>
+        <p:cNvGrpSpPr/>
+        <p:nvPr/>
+      </p:nvGrpSpPr>
+      <p:grpSpPr>
+        <a:xfrm>
+          <a:off x="0" y="0"/>
+          <a:ext cx="0" cy="0"/>
+          <a:chOff x="0" y="0"/>
+          <a:chExt cx="0" cy="0"/>
+        </a:xfrm>
+      </p:grpSpPr>
+      <p:sp>
+        <p:nvSpPr>
+          <p:cNvPr id="2" name="Slide Image Placeholder 1"/>
+          <p:cNvSpPr>
+            <a:spLocks noGrp="1" noRot="1" noChangeAspect="1"/>
+          </p:cNvSpPr>
+          <p:nvPr>
+            <p:ph type="sldImg"/>
+          </p:nvPr>
+        </p:nvSpPr>
+        <p:spPr/>
+      </p:sp>
+      <p:sp>
+        <p:nvSpPr>
+          <p:cNvPr id="3" name="Notes Placeholder 2"/>
+          <p:cNvSpPr>
+            <a:spLocks noGrp="1"/>
+          </p:cNvSpPr>
+          <p:nvPr>
+            <p:ph type="body" idx="1"/>
+          </p:nvPr>
+        </p:nvSpPr>
+        <p:spPr/>
+        <p:txBody>
+          <a:bodyPr/>
+          <a:lstStyle/>
+          <a:p>
+            <a:r>
+              <a:rPr lang="en-US" dirty="0"/>
+              <a:t>Now let us check what you have understood. Question 2: Give one importance and one limitation. Answer in your exercise book.</a:t>
+            </a:r>
+            <a:endParaRPr lang="en-US" dirty="0"/>
+          </a:p>
+        </p:txBody>
+      </p:sp>
+      <p:sp>
+        <p:nvSpPr>
+          <p:cNvPr id="4" name="Slide Number Placeholder 3"/>
+          <p:cNvSpPr>
+            <a:spLocks noGrp="1"/>
+          </p:cNvSpPr>
+          <p:nvPr>
+            <p:ph type="sldNum" sz="quarter" idx="10"/>
+          </p:nvPr>
+        </p:nvSpPr>
+        <p:spPr/>
+        <p:txBody>
+          <a:bodyPr/>
+          <a:lstStyle/>
+          <a:p>
+            <a:fld id="{F7021451-1387-4CA6-816F-3879F97B5CBC}" type="slidenum">
+              <a:rPr lang="en-US"/>
+              <a:t>51</a:t>
+            </a:fld>
+            <a:endParaRPr lang="en-US"/>
+          </a:p>
+        </p:txBody>
+      </p:sp>
+    </p:spTree>
+    <p:extLst>
+      <p:ext uri="{BB962C8B-B14F-4D97-AF65-F5344CB8AC3E}">
+        <p14:creationId xmlns:p14="http://schemas.microsoft.com/office/powerpoint/2010/main" val="1024086991"/>
+      </p:ext>
+    </p:extLst>
+  </p:cSld>
+  <p:clrMapOvr>
+    <a:masterClrMapping/>
+  </p:clrMapOvr>
+</p:notes>
+</file>
+
+<file path=ppt/notesSlides/notesSlide52.xml><?xml version="1.0" encoding="utf-8"?>
+<p:notes xmlns:a="http://schemas.openxmlformats.org/drawingml/2006/main" xmlns:r="http://schemas.openxmlformats.org/officeDocument/2006/relationships" xmlns:p="http://schemas.openxmlformats.org/presentationml/2006/main">
+  <p:cSld>
+    <p:spTree>
+      <p:nvGrpSpPr>
+        <p:cNvPr id="1" name=""/>
+        <p:cNvGrpSpPr/>
+        <p:nvPr/>
+      </p:nvGrpSpPr>
+      <p:grpSpPr>
+        <a:xfrm>
+          <a:off x="0" y="0"/>
+          <a:ext cx="0" cy="0"/>
+          <a:chOff x="0" y="0"/>
+          <a:chExt cx="0" cy="0"/>
+        </a:xfrm>
+      </p:grpSpPr>
+      <p:sp>
+        <p:nvSpPr>
+          <p:cNvPr id="2" name="Slide Image Placeholder 1"/>
+          <p:cNvSpPr>
+            <a:spLocks noGrp="1" noRot="1" noChangeAspect="1"/>
+          </p:cNvSpPr>
+          <p:nvPr>
+            <p:ph type="sldImg"/>
+          </p:nvPr>
+        </p:nvSpPr>
+        <p:spPr/>
+      </p:sp>
+      <p:sp>
+        <p:nvSpPr>
+          <p:cNvPr id="3" name="Notes Placeholder 2"/>
+          <p:cNvSpPr>
+            <a:spLocks noGrp="1"/>
+          </p:cNvSpPr>
+          <p:nvPr>
+            <p:ph type="body" idx="1"/>
+          </p:nvPr>
+        </p:nvSpPr>
+        <p:spPr/>
+        <p:txBody>
+          <a:bodyPr/>
+          <a:lstStyle/>
+          <a:p>
+            <a:r>
+              <a:rPr lang="en-US" dirty="0"/>
+              <a:t>The expected answer is: it gives jobs; workers have no pension. If you got it right, well done.</a:t>
+            </a:r>
+            <a:endParaRPr lang="en-US" dirty="0"/>
+          </a:p>
+        </p:txBody>
+      </p:sp>
+      <p:sp>
+        <p:nvSpPr>
+          <p:cNvPr id="4" name="Slide Number Placeholder 3"/>
+          <p:cNvSpPr>
+            <a:spLocks noGrp="1"/>
+          </p:cNvSpPr>
+          <p:nvPr>
+            <p:ph type="sldNum" sz="quarter" idx="10"/>
+          </p:nvPr>
+        </p:nvSpPr>
+        <p:spPr/>
+        <p:txBody>
+          <a:bodyPr/>
+          <a:lstStyle/>
+          <a:p>
+            <a:fld id="{F7021451-1387-4CA6-816F-3879F97B5CBC}" type="slidenum">
+              <a:rPr lang="en-US"/>
+              <a:t>52</a:t>
+            </a:fld>
+            <a:endParaRPr lang="en-US"/>
+          </a:p>
+        </p:txBody>
+      </p:sp>
+    </p:spTree>
+    <p:extLst>
+      <p:ext uri="{BB962C8B-B14F-4D97-AF65-F5344CB8AC3E}">
+        <p14:creationId xmlns:p14="http://schemas.microsoft.com/office/powerpoint/2010/main" val="1024086991"/>
+      </p:ext>
+    </p:extLst>
+  </p:cSld>
+  <p:clrMapOvr>
+    <a:masterClrMapping/>
+  </p:clrMapOvr>
+</p:notes>
+</file>
+
+<file path=ppt/notesSlides/notesSlide53.xml><?xml version="1.0" encoding="utf-8"?>
+<p:notes xmlns:a="http://schemas.openxmlformats.org/drawingml/2006/main" xmlns:r="http://schemas.openxmlformats.org/officeDocument/2006/relationships" xmlns:p="http://schemas.openxmlformats.org/presentationml/2006/main">
+  <p:cSld>
+    <p:spTree>
+      <p:nvGrpSpPr>
+        <p:cNvPr id="1" name=""/>
+        <p:cNvGrpSpPr/>
+        <p:nvPr/>
+      </p:nvGrpSpPr>
+      <p:grpSpPr>
+        <a:xfrm>
+          <a:off x="0" y="0"/>
+          <a:ext cx="0" cy="0"/>
+          <a:chOff x="0" y="0"/>
+          <a:chExt cx="0" cy="0"/>
+        </a:xfrm>
+      </p:grpSpPr>
+      <p:sp>
+        <p:nvSpPr>
+          <p:cNvPr id="2" name="Slide Image Placeholder 1"/>
+          <p:cNvSpPr>
+            <a:spLocks noGrp="1" noRot="1" noChangeAspect="1"/>
+          </p:cNvSpPr>
+          <p:nvPr>
+            <p:ph type="sldImg"/>
+          </p:nvPr>
+        </p:nvSpPr>
+        <p:spPr/>
+      </p:sp>
+      <p:sp>
+        <p:nvSpPr>
+          <p:cNvPr id="3" name="Notes Placeholder 2"/>
+          <p:cNvSpPr>
+            <a:spLocks noGrp="1"/>
+          </p:cNvSpPr>
+          <p:nvPr>
+            <p:ph type="body" idx="1"/>
+          </p:nvPr>
+        </p:nvSpPr>
+        <p:spPr/>
+        <p:txBody>
+          <a:bodyPr/>
+          <a:lstStyle/>
+          <a:p>
+            <a:r>
+              <a:rPr lang="en-US" dirty="0"/>
+              <a:t>For those who need more practice, fill in the blanks in your exercise book. The answers are: number 1, registered; number 2, informal; number 3, pension (or insurance).</a:t>
+            </a:r>
+            <a:endParaRPr lang="en-US" dirty="0"/>
+          </a:p>
+        </p:txBody>
+      </p:sp>
+      <p:sp>
+        <p:nvSpPr>
+          <p:cNvPr id="4" name="Slide Number Placeholder 3"/>
+          <p:cNvSpPr>
+            <a:spLocks noGrp="1"/>
+          </p:cNvSpPr>
+          <p:nvPr>
+            <p:ph type="sldNum" sz="quarter" idx="10"/>
+          </p:nvPr>
+        </p:nvSpPr>
+        <p:spPr/>
+        <p:txBody>
+          <a:bodyPr/>
+          <a:lstStyle/>
+          <a:p>
+            <a:fld id="{F7021451-1387-4CA6-816F-3879F97B5CBC}" type="slidenum">
+              <a:rPr lang="en-US"/>
+              <a:t>53</a:t>
+            </a:fld>
+            <a:endParaRPr lang="en-US"/>
+          </a:p>
+        </p:txBody>
+      </p:sp>
+    </p:spTree>
+    <p:extLst>
+      <p:ext uri="{BB962C8B-B14F-4D97-AF65-F5344CB8AC3E}">
+        <p14:creationId xmlns:p14="http://schemas.microsoft.com/office/powerpoint/2010/main" val="1024086991"/>
+      </p:ext>
+    </p:extLst>
+  </p:cSld>
+  <p:clrMapOvr>
+    <a:masterClrMapping/>
+  </p:clrMapOvr>
+</p:notes>
+</file>
+
+<file path=ppt/notesSlides/notesSlide54.xml><?xml version="1.0" encoding="utf-8"?>
+<p:notes xmlns:a="http://schemas.openxmlformats.org/drawingml/2006/main" xmlns:r="http://schemas.openxmlformats.org/officeDocument/2006/relationships" xmlns:p="http://schemas.openxmlformats.org/presentationml/2006/main">
+  <p:cSld>
+    <p:spTree>
+      <p:nvGrpSpPr>
+        <p:cNvPr id="1" name=""/>
+        <p:cNvGrpSpPr/>
+        <p:nvPr/>
+      </p:nvGrpSpPr>
+      <p:grpSpPr>
+        <a:xfrm>
+          <a:off x="0" y="0"/>
+          <a:ext cx="0" cy="0"/>
+          <a:chOff x="0" y="0"/>
+          <a:chExt cx="0" cy="0"/>
+        </a:xfrm>
+      </p:grpSpPr>
+      <p:sp>
+        <p:nvSpPr>
+          <p:cNvPr id="2" name="Slide Image Placeholder 1"/>
+          <p:cNvSpPr>
+            <a:spLocks noGrp="1" noRot="1" noChangeAspect="1"/>
+          </p:cNvSpPr>
+          <p:nvPr>
+            <p:ph type="sldImg"/>
+          </p:nvPr>
+        </p:nvSpPr>
+        <p:spPr/>
+      </p:sp>
+      <p:sp>
+        <p:nvSpPr>
+          <p:cNvPr id="3" name="Notes Placeholder 2"/>
+          <p:cNvSpPr>
+            <a:spLocks noGrp="1"/>
+          </p:cNvSpPr>
+          <p:nvPr>
+            <p:ph type="body" idx="1"/>
+          </p:nvPr>
+        </p:nvSpPr>
+        <p:spPr/>
+        <p:txBody>
+          <a:bodyPr/>
+          <a:lstStyle/>
+          <a:p>
+            <a:r>
+              <a:rPr lang="en-US" dirty="0"/>
+              <a:t>For your homework: Interview one informal worker: his or her job, income and main problem. We shall correct it at the beginning of our next lesson.</a:t>
+            </a:r>
+            <a:endParaRPr lang="en-US" dirty="0"/>
+          </a:p>
+        </p:txBody>
+      </p:sp>
+      <p:sp>
+        <p:nvSpPr>
+          <p:cNvPr id="4" name="Slide Number Placeholder 3"/>
+          <p:cNvSpPr>
+            <a:spLocks noGrp="1"/>
+          </p:cNvSpPr>
+          <p:nvPr>
+            <p:ph type="sldNum" sz="quarter" idx="10"/>
+          </p:nvPr>
+        </p:nvSpPr>
+        <p:spPr/>
+        <p:txBody>
+          <a:bodyPr/>
+          <a:lstStyle/>
+          <a:p>
+            <a:fld id="{F7021451-1387-4CA6-816F-3879F97B5CBC}" type="slidenum">
+              <a:rPr lang="en-US"/>
+              <a:t>54</a:t>
+            </a:fld>
+            <a:endParaRPr lang="en-US"/>
+          </a:p>
+        </p:txBody>
+      </p:sp>
+    </p:spTree>
+    <p:extLst>
+      <p:ext uri="{BB962C8B-B14F-4D97-AF65-F5344CB8AC3E}">
+        <p14:creationId xmlns:p14="http://schemas.microsoft.com/office/powerpoint/2010/main" val="1024086991"/>
+      </p:ext>
+    </p:extLst>
+  </p:cSld>
+  <p:clrMapOvr>
+    <a:masterClrMapping/>
+  </p:clrMapOvr>
+</p:notes>
+</file>
+
+<file path=ppt/notesSlides/notesSlide55.xml><?xml version="1.0" encoding="utf-8"?>
+<p:notes xmlns:a="http://schemas.openxmlformats.org/drawingml/2006/main" xmlns:r="http://schemas.openxmlformats.org/officeDocument/2006/relationships" xmlns:p="http://schemas.openxmlformats.org/presentationml/2006/main">
+  <p:cSld>
+    <p:spTree>
+      <p:nvGrpSpPr>
+        <p:cNvPr id="1" name=""/>
+        <p:cNvGrpSpPr/>
+        <p:nvPr/>
+      </p:nvGrpSpPr>
+      <p:grpSpPr>
+        <a:xfrm>
+          <a:off x="0" y="0"/>
+          <a:ext cx="0" cy="0"/>
+          <a:chOff x="0" y="0"/>
+          <a:chExt cx="0" cy="0"/>
+        </a:xfrm>
+      </p:grpSpPr>
+      <p:sp>
+        <p:nvSpPr>
+          <p:cNvPr id="2" name="Slide Image Placeholder 1"/>
+          <p:cNvSpPr>
+            <a:spLocks noGrp="1" noRot="1" noChangeAspect="1"/>
+          </p:cNvSpPr>
+          <p:nvPr>
+            <p:ph type="sldImg"/>
+          </p:nvPr>
+        </p:nvSpPr>
+        <p:spPr/>
+      </p:sp>
+      <p:sp>
+        <p:nvSpPr>
+          <p:cNvPr id="3" name="Notes Placeholder 2"/>
+          <p:cNvSpPr>
+            <a:spLocks noGrp="1"/>
+          </p:cNvSpPr>
+          <p:nvPr>
+            <p:ph type="body" idx="1"/>
+          </p:nvPr>
+        </p:nvSpPr>
+        <p:spPr/>
+        <p:txBody>
+          <a:bodyPr/>
+          <a:lstStyle/>
+          <a:p>
+            <a:r>
+              <a:rPr lang="en-US" dirty="0"/>
+              <a:t>Our next lesson will be on Practical Work 4: Location of the Regional and Divisional Headquarters of Cameroon. Thank you for your attention, and see you next time.</a:t>
+            </a:r>
+            <a:endParaRPr lang="en-US" dirty="0"/>
+          </a:p>
+        </p:txBody>
+      </p:sp>
+      <p:sp>
+        <p:nvSpPr>
+          <p:cNvPr id="4" name="Slide Number Placeholder 3"/>
+          <p:cNvSpPr>
+            <a:spLocks noGrp="1"/>
+          </p:cNvSpPr>
+          <p:nvPr>
+            <p:ph type="sldNum" sz="quarter" idx="10"/>
+          </p:nvPr>
+        </p:nvSpPr>
+        <p:spPr/>
+        <p:txBody>
+          <a:bodyPr/>
+          <a:lstStyle/>
+          <a:p>
+            <a:fld id="{F7021451-1387-4CA6-816F-3879F97B5CBC}" type="slidenum">
+              <a:rPr lang="en-US"/>
+              <a:t>55</a:t>
+            </a:fld>
+            <a:endParaRPr lang="en-US"/>
+          </a:p>
+        </p:txBody>
+      </p:sp>
+    </p:spTree>
+    <p:extLst>
+      <p:ext uri="{BB962C8B-B14F-4D97-AF65-F5344CB8AC3E}">
+        <p14:creationId xmlns:p14="http://schemas.microsoft.com/office/powerpoint/2010/main" val="1024086991"/>
+      </p:ext>
+    </p:extLst>
+  </p:cSld>
+  <p:clrMapOvr>
+    <a:masterClrMapping/>
+  </p:clrMapOvr>
+</p:notes>
+</file>
+
+<file path=ppt/notesSlides/notesSlide56.xml><?xml version="1.0" encoding="utf-8"?>
+<p:notes xmlns:a="http://schemas.openxmlformats.org/drawingml/2006/main" xmlns:r="http://schemas.openxmlformats.org/officeDocument/2006/relationships" xmlns:p="http://schemas.openxmlformats.org/presentationml/2006/main">
+  <p:cSld>
+    <p:spTree>
+      <p:nvGrpSpPr>
+        <p:cNvPr id="1" name=""/>
+        <p:cNvGrpSpPr/>
+        <p:nvPr/>
+      </p:nvGrpSpPr>
+      <p:grpSpPr>
+        <a:xfrm>
+          <a:off x="0" y="0"/>
+          <a:ext cx="0" cy="0"/>
+          <a:chOff x="0" y="0"/>
+          <a:chExt cx="0" cy="0"/>
+        </a:xfrm>
+      </p:grpSpPr>
+      <p:sp>
+        <p:nvSpPr>
+          <p:cNvPr id="2" name="Slide Image Placeholder 1"/>
+          <p:cNvSpPr>
+            <a:spLocks noGrp="1" noRot="1" noChangeAspect="1"/>
+          </p:cNvSpPr>
+          <p:nvPr>
+            <p:ph type="sldImg"/>
+          </p:nvPr>
+        </p:nvSpPr>
+        <p:spPr/>
+      </p:sp>
+      <p:sp>
+        <p:nvSpPr>
+          <p:cNvPr id="3" name="Notes Placeholder 2"/>
+          <p:cNvSpPr>
+            <a:spLocks noGrp="1"/>
+          </p:cNvSpPr>
+          <p:nvPr>
+            <p:ph type="body" idx="1"/>
+          </p:nvPr>
+        </p:nvSpPr>
+        <p:spPr/>
+        <p:txBody>
+          <a:bodyPr/>
+          <a:lstStyle/>
+          <a:p>
+            <a:r>
+              <a:rPr lang="en-US" dirty="0"/>
+              <a:t>Let us play the bilingual game. I say a word in English, and you give me the French word. Then we do the reverse.</a:t>
+            </a:r>
+            <a:endParaRPr lang="en-US" dirty="0"/>
+          </a:p>
+        </p:txBody>
+      </p:sp>
+      <p:sp>
+        <p:nvSpPr>
+          <p:cNvPr id="4" name="Slide Number Placeholder 3"/>
+          <p:cNvSpPr>
+            <a:spLocks noGrp="1"/>
+          </p:cNvSpPr>
+          <p:nvPr>
+            <p:ph type="sldNum" sz="quarter" idx="10"/>
+          </p:nvPr>
+        </p:nvSpPr>
+        <p:spPr/>
+        <p:txBody>
+          <a:bodyPr/>
+          <a:lstStyle/>
+          <a:p>
+            <a:fld id="{F7021451-1387-4CA6-816F-3879F97B5CBC}" type="slidenum">
+              <a:rPr lang="en-US"/>
+              <a:t>56</a:t>
+            </a:fld>
+            <a:endParaRPr lang="en-US"/>
+          </a:p>
+        </p:txBody>
+      </p:sp>
+    </p:spTree>
+    <p:extLst>
+      <p:ext uri="{BB962C8B-B14F-4D97-AF65-F5344CB8AC3E}">
+        <p14:creationId xmlns:p14="http://schemas.microsoft.com/office/powerpoint/2010/main" val="1024086991"/>
+      </p:ext>
+    </p:extLst>
+  </p:cSld>
+  <p:clrMapOvr>
+    <a:masterClrMapping/>
+  </p:clrMapOvr>
+</p:notes>
+</file>
+
+<file path=ppt/notesSlides/notesSlide57.xml><?xml version="1.0" encoding="utf-8"?>
+<p:notes xmlns:a="http://schemas.openxmlformats.org/drawingml/2006/main" xmlns:r="http://schemas.openxmlformats.org/officeDocument/2006/relationships" xmlns:p="http://schemas.openxmlformats.org/presentationml/2006/main">
+  <p:cSld>
+    <p:spTree>
+      <p:nvGrpSpPr>
+        <p:cNvPr id="1" name=""/>
+        <p:cNvGrpSpPr/>
+        <p:nvPr/>
+      </p:nvGrpSpPr>
+      <p:grpSpPr>
+        <a:xfrm>
+          <a:off x="0" y="0"/>
+          <a:ext cx="0" cy="0"/>
+          <a:chOff x="0" y="0"/>
+          <a:chExt cx="0" cy="0"/>
+        </a:xfrm>
+      </p:grpSpPr>
+      <p:sp>
+        <p:nvSpPr>
+          <p:cNvPr id="2" name="Slide Image Placeholder 1"/>
+          <p:cNvSpPr>
+            <a:spLocks noGrp="1" noRot="1" noChangeAspect="1"/>
+          </p:cNvSpPr>
+          <p:nvPr>
+            <p:ph type="sldImg"/>
+          </p:nvPr>
+        </p:nvSpPr>
+        <p:spPr/>
+      </p:sp>
+      <p:sp>
+        <p:nvSpPr>
+          <p:cNvPr id="3" name="Notes Placeholder 2"/>
+          <p:cNvSpPr>
+            <a:spLocks noGrp="1"/>
+          </p:cNvSpPr>
+          <p:nvPr>
+            <p:ph type="body" idx="1"/>
+          </p:nvPr>
+        </p:nvSpPr>
+        <p:spPr/>
+        <p:txBody>
+          <a:bodyPr/>
+          <a:lstStyle/>
+          <a:p>
+            <a:r>
+              <a:rPr lang="en-US" dirty="0"/>
+              <a:t>I record this information in the official logbook of the class after the lesson.</a:t>
+            </a:r>
+            <a:endParaRPr lang="en-US" dirty="0"/>
+          </a:p>
+        </p:txBody>
+      </p:sp>
+      <p:sp>
+        <p:nvSpPr>
+          <p:cNvPr id="4" name="Slide Number Placeholder 3"/>
+          <p:cNvSpPr>
+            <a:spLocks noGrp="1"/>
+          </p:cNvSpPr>
+          <p:nvPr>
+            <p:ph type="sldNum" sz="quarter" idx="10"/>
+          </p:nvPr>
+        </p:nvSpPr>
+        <p:spPr/>
+        <p:txBody>
+          <a:bodyPr/>
+          <a:lstStyle/>
+          <a:p>
+            <a:fld id="{F7021451-1387-4CA6-816F-3879F97B5CBC}" type="slidenum">
+              <a:rPr lang="en-US"/>
+              <a:t>57</a:t>
+            </a:fld>
+            <a:endParaRPr lang="en-US"/>
+          </a:p>
+        </p:txBody>
+      </p:sp>
+    </p:spTree>
+    <p:extLst>
+      <p:ext uri="{BB962C8B-B14F-4D97-AF65-F5344CB8AC3E}">
+        <p14:creationId xmlns:p14="http://schemas.microsoft.com/office/powerpoint/2010/main" val="1024086991"/>
+      </p:ext>
+    </p:extLst>
+  </p:cSld>
+  <p:clrMapOvr>
+    <a:masterClrMapping/>
+  </p:clrMapOvr>
+</p:notes>
+</file>
+
+<file path=ppt/notesSlides/notesSlide58.xml><?xml version="1.0" encoding="utf-8"?>
+<p:notes xmlns:a="http://schemas.openxmlformats.org/drawingml/2006/main" xmlns:r="http://schemas.openxmlformats.org/officeDocument/2006/relationships" xmlns:p="http://schemas.openxmlformats.org/presentationml/2006/main">
+  <p:cSld>
+    <p:spTree>
+      <p:nvGrpSpPr>
+        <p:cNvPr id="1" name=""/>
+        <p:cNvGrpSpPr/>
+        <p:nvPr/>
+      </p:nvGrpSpPr>
+      <p:grpSpPr>
+        <a:xfrm>
+          <a:off x="0" y="0"/>
+          <a:ext cx="0" cy="0"/>
+          <a:chOff x="0" y="0"/>
+          <a:chExt cx="0" cy="0"/>
+        </a:xfrm>
+      </p:grpSpPr>
+      <p:sp>
+        <p:nvSpPr>
+          <p:cNvPr id="2" name="Slide Image Placeholder 1"/>
+          <p:cNvSpPr>
+            <a:spLocks noGrp="1" noRot="1" noChangeAspect="1"/>
+          </p:cNvSpPr>
+          <p:nvPr>
+            <p:ph type="sldImg"/>
+          </p:nvPr>
+        </p:nvSpPr>
+        <p:spPr/>
+      </p:sp>
+      <p:sp>
+        <p:nvSpPr>
+          <p:cNvPr id="3" name="Notes Placeholder 2"/>
+          <p:cNvSpPr>
+            <a:spLocks noGrp="1"/>
+          </p:cNvSpPr>
+          <p:nvPr>
+            <p:ph type="body" idx="1"/>
+          </p:nvPr>
+        </p:nvSpPr>
+        <p:spPr/>
+        <p:txBody>
+          <a:bodyPr/>
+          <a:lstStyle/>
+          <a:p>
+            <a:r>
+              <a:rPr lang="en-US" dirty="0"/>
+              <a:t>I complete the second page of the logbook: the matter taught, the evaluation, the homework and the attendance.</a:t>
+            </a:r>
+            <a:endParaRPr lang="en-US" dirty="0"/>
+          </a:p>
+        </p:txBody>
+      </p:sp>
+      <p:sp>
+        <p:nvSpPr>
+          <p:cNvPr id="4" name="Slide Number Placeholder 3"/>
+          <p:cNvSpPr>
+            <a:spLocks noGrp="1"/>
+          </p:cNvSpPr>
+          <p:nvPr>
+            <p:ph type="sldNum" sz="quarter" idx="10"/>
+          </p:nvPr>
+        </p:nvSpPr>
+        <p:spPr/>
+        <p:txBody>
+          <a:bodyPr/>
+          <a:lstStyle/>
+          <a:p>
+            <a:fld id="{F7021451-1387-4CA6-816F-3879F97B5CBC}" type="slidenum">
+              <a:rPr lang="en-US"/>
+              <a:t>58</a:t>
+            </a:fld>
+            <a:endParaRPr lang="en-US"/>
+          </a:p>
+        </p:txBody>
+      </p:sp>
+    </p:spTree>
+    <p:extLst>
+      <p:ext uri="{BB962C8B-B14F-4D97-AF65-F5344CB8AC3E}">
+        <p14:creationId xmlns:p14="http://schemas.microsoft.com/office/powerpoint/2010/main" val="1024086991"/>
+      </p:ext>
+    </p:extLst>
+  </p:cSld>
+  <p:clrMapOvr>
+    <a:masterClrMapping/>
+  </p:clrMapOvr>
+</p:notes>
+</file>
+
+<file path=ppt/notesSlides/notesSlide59.xml><?xml version="1.0" encoding="utf-8"?>
+<p:notes xmlns:a="http://schemas.openxmlformats.org/drawingml/2006/main" xmlns:r="http://schemas.openxmlformats.org/officeDocument/2006/relationships" xmlns:p="http://schemas.openxmlformats.org/presentationml/2006/main">
+  <p:cSld>
+    <p:spTree>
+      <p:nvGrpSpPr>
+        <p:cNvPr id="1" name=""/>
+        <p:cNvGrpSpPr/>
+        <p:nvPr/>
+      </p:nvGrpSpPr>
+      <p:grpSpPr>
+        <a:xfrm>
+          <a:off x="0" y="0"/>
+          <a:ext cx="0" cy="0"/>
+          <a:chOff x="0" y="0"/>
+          <a:chExt cx="0" cy="0"/>
+        </a:xfrm>
+      </p:grpSpPr>
+      <p:sp>
+        <p:nvSpPr>
+          <p:cNvPr id="2" name="Slide Image Placeholder 1"/>
+          <p:cNvSpPr>
+            <a:spLocks noGrp="1" noRot="1" noChangeAspect="1"/>
+          </p:cNvSpPr>
+          <p:nvPr>
+            <p:ph type="sldImg"/>
+          </p:nvPr>
+        </p:nvSpPr>
+        <p:spPr/>
+      </p:sp>
+      <p:sp>
+        <p:nvSpPr>
+          <p:cNvPr id="3" name="Notes Placeholder 2"/>
+          <p:cNvSpPr>
+            <a:spLocks noGrp="1"/>
+          </p:cNvSpPr>
+          <p:nvPr>
+            <p:ph type="body" idx="1"/>
+          </p:nvPr>
+        </p:nvSpPr>
+        <p:spPr/>
+        <p:txBody>
+          <a:bodyPr/>
+          <a:lstStyle/>
+          <a:p>
+            <a:r>
+              <a:rPr lang="en-US" dirty="0"/>
+              <a:t>This slide is for me, the teacher: it gives the timing of the lesson and what to do if the projector is not available.</a:t>
+            </a:r>
+            <a:endParaRPr lang="en-US" dirty="0"/>
+          </a:p>
+        </p:txBody>
+      </p:sp>
+      <p:sp>
+        <p:nvSpPr>
+          <p:cNvPr id="4" name="Slide Number Placeholder 3"/>
+          <p:cNvSpPr>
+            <a:spLocks noGrp="1"/>
+          </p:cNvSpPr>
+          <p:nvPr>
+            <p:ph type="sldNum" sz="quarter" idx="10"/>
+          </p:nvPr>
+        </p:nvSpPr>
+        <p:spPr/>
+        <p:txBody>
+          <a:bodyPr/>
+          <a:lstStyle/>
+          <a:p>
+            <a:fld id="{F7021451-1387-4CA6-816F-3879F97B5CBC}" type="slidenum">
+              <a:rPr lang="en-US"/>
+              <a:t>59</a:t>
             </a:fld>
             <a:endParaRPr lang="en-US"/>
           </a:p>
@@ -4641,6 +5443,94 @@
 </p:notes>
 </file>
 
+<file path=ppt/notesSlides/notesSlide60.xml><?xml version="1.0" encoding="utf-8"?>
+<p:notes xmlns:a="http://schemas.openxmlformats.org/drawingml/2006/main" xmlns:r="http://schemas.openxmlformats.org/officeDocument/2006/relationships" xmlns:p="http://schemas.openxmlformats.org/presentationml/2006/main">
+  <p:cSld>
+    <p:spTree>
+      <p:nvGrpSpPr>
+        <p:cNvPr id="1" name=""/>
+        <p:cNvGrpSpPr/>
+        <p:nvPr/>
+      </p:nvGrpSpPr>
+      <p:grpSpPr>
+        <a:xfrm>
+          <a:off x="0" y="0"/>
+          <a:ext cx="0" cy="0"/>
+          <a:chOff x="0" y="0"/>
+          <a:chExt cx="0" cy="0"/>
+        </a:xfrm>
+      </p:grpSpPr>
+      <p:sp>
+        <p:nvSpPr>
+          <p:cNvPr id="2" name="Slide Image Placeholder 1"/>
+          <p:cNvSpPr>
+            <a:spLocks noGrp="1" noRot="1" noChangeAspect="1"/>
+          </p:cNvSpPr>
+          <p:nvPr>
+            <p:ph type="sldImg"/>
+          </p:nvPr>
+        </p:nvSpPr>
+        <p:spPr/>
+      </p:sp>
+      <p:sp>
+        <p:nvSpPr>
+          <p:cNvPr id="3" name="Notes Placeholder 2"/>
+          <p:cNvSpPr>
+            <a:spLocks noGrp="1"/>
+          </p:cNvSpPr>
+          <p:nvPr>
+            <p:ph type="body" idx="1"/>
+          </p:nvPr>
+        </p:nvSpPr>
+        <p:spPr/>
+        <p:txBody>
+          <a:bodyPr/>
+          <a:lstStyle/>
+          <a:p>
+            <a:r>
+              <a:rPr lang="en-US" dirty="0"/>
+              <a:t>These are the references and picture credits used to prepare this lesson.</a:t>
+            </a:r>
+            <a:endParaRPr lang="en-US" dirty="0"/>
+          </a:p>
+        </p:txBody>
+      </p:sp>
+      <p:sp>
+        <p:nvSpPr>
+          <p:cNvPr id="4" name="Slide Number Placeholder 3"/>
+          <p:cNvSpPr>
+            <a:spLocks noGrp="1"/>
+          </p:cNvSpPr>
+          <p:nvPr>
+            <p:ph type="sldNum" sz="quarter" idx="10"/>
+          </p:nvPr>
+        </p:nvSpPr>
+        <p:spPr/>
+        <p:txBody>
+          <a:bodyPr/>
+          <a:lstStyle/>
+          <a:p>
+            <a:fld id="{F7021451-1387-4CA6-816F-3879F97B5CBC}" type="slidenum">
+              <a:rPr lang="en-US"/>
+              <a:t>60</a:t>
+            </a:fld>
+            <a:endParaRPr lang="en-US"/>
+          </a:p>
+        </p:txBody>
+      </p:sp>
+    </p:spTree>
+    <p:extLst>
+      <p:ext uri="{BB962C8B-B14F-4D97-AF65-F5344CB8AC3E}">
+        <p14:creationId xmlns:p14="http://schemas.microsoft.com/office/powerpoint/2010/main" val="1024086991"/>
+      </p:ext>
+    </p:extLst>
+  </p:cSld>
+  <p:clrMapOvr>
+    <a:masterClrMapping/>
+  </p:clrMapOvr>
+</p:notes>
+</file>
+
 <file path=ppt/notesSlides/notesSlide7.xml><?xml version="1.0" encoding="utf-8"?>
 <p:notes xmlns:a="http://schemas.openxmlformats.org/drawingml/2006/main" xmlns:r="http://schemas.openxmlformats.org/officeDocument/2006/relationships" xmlns:p="http://schemas.openxmlformats.org/presentationml/2006/main">
   <p:cSld>
@@ -4687,7 +5577,7 @@
           <a:p>
             <a:r>
               <a:rPr lang="en-US" dirty="0"/>
-              <a:t>By the end of this lesson, you should be able to do three things. Number 1: identify types of informal activities. Number 2: give their general characteristics. Number 3: explain their importance and limitations.</a:t>
+              <a:t>By the end of this lesson, you should be able to do three things. Number 1: identify the types of informal activities. Number 2: give their general characteristics. Number 3: explain their importance and limitations.</a:t>
             </a:r>
             <a:endParaRPr lang="en-US" dirty="0"/>
           </a:p>
@@ -4863,7 +5753,7 @@
           <a:p>
             <a:r>
               <a:rPr lang="en-US" dirty="0"/>
-              <a:t>Listen carefully to this situation from real life. After failing to find a job in an office, Moussa buys a motorbike and becomes a moto-taxi driver in Garoua. He earns money every day but has no insurance and no pension. Think about it, because I am going to ask you some questions.</a:t>
+              <a:t>Listen carefully to this situation from real life. After failing to find an office job, Moussa buys a motorbike and becomes a moto-taxi driver in Garoua. He earns money every day, but after an accident he has no insurance to pay the hospital. He asks: "Is my small job a good solution or a trap?" Think about it, because I am going to ask you some questions.</a:t>
             </a:r>
             <a:endParaRPr lang="en-US" dirty="0"/>
           </a:p>
@@ -6546,7 +7436,7 @@
                 <a:ea typeface="Times New Roman" pitchFamily="34" charset="-122"/>
                 <a:cs typeface="Times New Roman" pitchFamily="34" charset="-120"/>
               </a:rPr>
-              <a:t>Moussa works in the informal sector without protection.</a:t>
+              <a:t>Moussa wonders whether his informal job is good for him, because it gives money but no protection.</a:t>
             </a:r>
             <a:endParaRPr lang="en-US" sz="4000" dirty="0"/>
           </a:p>
@@ -6984,7 +7874,7 @@
                 <a:ea typeface="Times New Roman" pitchFamily="34" charset="-122"/>
                 <a:cs typeface="Times New Roman" pitchFamily="34" charset="-120"/>
               </a:rPr>
-              <a:t>Moto-taxi driver.</a:t>
+              <a:t>He is a moto-taxi driver.</a:t>
             </a:r>
             <a:endParaRPr lang="en-US" sz="4000" dirty="0"/>
           </a:p>
@@ -7422,7 +8312,7 @@
                 <a:ea typeface="Times New Roman" pitchFamily="34" charset="-122"/>
                 <a:cs typeface="Times New Roman" pitchFamily="34" charset="-120"/>
               </a:rPr>
-              <a:t>He earns money every day; he has no insurance or pension.</a:t>
+              <a:t>He earns money every day; he has no insurance.</a:t>
             </a:r>
             <a:endParaRPr lang="en-US" sz="4000" dirty="0"/>
           </a:p>
@@ -8293,7 +9183,7 @@
                 <a:ea typeface="Times New Roman" pitchFamily="34" charset="-122"/>
                 <a:cs typeface="Times New Roman" pitchFamily="34" charset="-120"/>
               </a:rPr>
-              <a:t>Name four types of informal activities.</a:t>
+              <a:t>To which type of informal activity do moto-taxis belong?</a:t>
             </a:r>
             <a:endParaRPr lang="en-US" sz="4000" dirty="0"/>
           </a:p>
@@ -9107,7 +9997,7 @@
                 <a:ea typeface="Times New Roman" pitchFamily="34" charset="-122"/>
                 <a:cs typeface="Times New Roman" pitchFamily="34" charset="-120"/>
               </a:rPr>
-              <a:t>Transport (moto-taxi), street trade, crafts (tailoring) and repairs (also food selling).</a:t>
+              <a:t>Transport.</a:t>
             </a:r>
             <a:endParaRPr lang="en-US" sz="4000" dirty="0"/>
           </a:p>
@@ -9540,7 +10430,7 @@
                 <a:ea typeface="Times New Roman" pitchFamily="34" charset="-122"/>
                 <a:cs typeface="Times New Roman" pitchFamily="34" charset="-120"/>
               </a:rPr>
-              <a:t>Which type of informal activity is this?</a:t>
+              <a:t>To which type of informal activity does this tailor belong?</a:t>
             </a:r>
             <a:endParaRPr lang="en-US" sz="4000" dirty="0"/>
           </a:p>
@@ -9759,7 +10649,7 @@
                 <a:ea typeface="Times New Roman" pitchFamily="34" charset="-122"/>
                 <a:cs typeface="Times New Roman" pitchFamily="34" charset="-120"/>
               </a:rPr>
-              <a:t>A craft (tailoring).</a:t>
+              <a:t>Crafts (small workshops).</a:t>
             </a:r>
             <a:endParaRPr lang="en-US" sz="4000" dirty="0"/>
           </a:p>
@@ -10192,7 +11082,7 @@
                 <a:ea typeface="Times New Roman" pitchFamily="34" charset="-122"/>
                 <a:cs typeface="Times New Roman" pitchFamily="34" charset="-120"/>
               </a:rPr>
-              <a:t>Give three characteristics of informal activities.</a:t>
+              <a:t>How much money does this seller need to start his business?</a:t>
             </a:r>
             <a:endParaRPr lang="en-US" sz="4000" dirty="0"/>
           </a:p>
@@ -10411,7 +11301,7 @@
                 <a:ea typeface="Times New Roman" pitchFamily="34" charset="-122"/>
                 <a:cs typeface="Times New Roman" pitchFamily="34" charset="-120"/>
               </a:rPr>
-              <a:t>Small capital, no registration or taxes, and family or self-employment.</a:t>
+              <a:t>Very little: informal activities need small capital and little training.</a:t>
             </a:r>
             <a:endParaRPr lang="en-US" sz="4000" dirty="0"/>
           </a:p>
@@ -10844,7 +11734,7 @@
                 <a:ea typeface="Times New Roman" pitchFamily="34" charset="-122"/>
                 <a:cs typeface="Times New Roman" pitchFamily="34" charset="-120"/>
               </a:rPr>
-              <a:t>Why is the informal sector important?</a:t>
+              <a:t>Why do so many families depend on small trades?</a:t>
             </a:r>
             <a:endParaRPr lang="en-US" sz="4000" dirty="0"/>
           </a:p>
@@ -11063,7 +11953,7 @@
                 <a:ea typeface="Times New Roman" pitchFamily="34" charset="-122"/>
                 <a:cs typeface="Times New Roman" pitchFamily="34" charset="-120"/>
               </a:rPr>
-              <a:t>It gives jobs and income to many people and provides cheap goods and services.</a:t>
+              <a:t>They give jobs and daily income to people who cannot find other work.</a:t>
             </a:r>
             <a:endParaRPr lang="en-US" sz="4000" dirty="0"/>
           </a:p>
@@ -12022,7 +12912,7 @@
                           <a:ea typeface="Calibri" pitchFamily="34" charset="-122"/>
                           <a:cs typeface="Calibri" pitchFamily="34" charset="-120"/>
                         </a:rPr>
-                        <a:t>Learners are able to describe the informal sector and judge its advantages and limits.</a:t>
+                        <a:t>Learners are able to describe the informal sector and judge its importance and its limits.</a:t>
                       </a:r>
                       <a:endParaRPr lang="en-US" sz="1700" dirty="0">
                         <a:latin typeface="Calibri" charset="0"/>
@@ -12505,7 +13395,7 @@
                 <a:ea typeface="Times New Roman" pitchFamily="34" charset="-122"/>
                 <a:cs typeface="Times New Roman" pitchFamily="34" charset="-120"/>
               </a:rPr>
-              <a:t>Give two limitations of the informal sector.</a:t>
+              <a:t>What does the informal worker lack compared with the formal worker?</a:t>
             </a:r>
             <a:endParaRPr lang="en-US" sz="4000" dirty="0"/>
           </a:p>
@@ -12724,7 +13614,7 @@
                 <a:ea typeface="Times New Roman" pitchFamily="34" charset="-122"/>
                 <a:cs typeface="Times New Roman" pitchFamily="34" charset="-120"/>
               </a:rPr>
-              <a:t>No social security or pension, and low, irregular income (also no taxes for the state).</a:t>
+              <a:t>A contract, a regular salary, insurance and a pension (CNPS).</a:t>
             </a:r>
             <a:endParaRPr lang="en-US" sz="4000" dirty="0"/>
           </a:p>
@@ -13118,7 +14008,7 @@
         <p:spPr>
           <a:xfrm>
             <a:off x="0" y="658368"/>
-            <a:ext cx="5120640" cy="5833872"/>
+            <a:ext cx="1463040" cy="5833872"/>
           </a:xfrm>
           <a:prstGeom prst="rect">
             <a:avLst/>
@@ -13133,8 +14023,8 @@
         </p:nvSpPr>
         <p:spPr>
           <a:xfrm>
-            <a:off x="5349240" y="1005840"/>
-            <a:ext cx="6522415" cy="731520"/>
+            <a:off x="1691640" y="1005840"/>
+            <a:ext cx="10180015" cy="731520"/>
           </a:xfrm>
           <a:prstGeom prst="rect">
             <a:avLst/>
@@ -13174,8 +14064,8 @@
         </p:nvSpPr>
         <p:spPr>
           <a:xfrm>
-            <a:off x="5349240" y="1783080"/>
-            <a:ext cx="6522415" cy="4663440"/>
+            <a:off x="1691640" y="1783080"/>
+            <a:ext cx="10180015" cy="4663440"/>
           </a:xfrm>
           <a:prstGeom prst="rect">
             <a:avLst/>
@@ -13240,6 +14130,43 @@
                 <a:cs typeface="Times New Roman" pitchFamily="34" charset="-120"/>
               </a:rPr>
               <a:t>It is all the small economic activities that are not registered and do not pay taxes regularly.</a:t>
+            </a:r>
+            <a:endParaRPr lang="en-US" sz="4000" dirty="0"/>
+          </a:p>
+          <a:p>
+            <a:pPr algn="l" indent="0" marL="0">
+              <a:spcAft>
+                <a:spcPts val="800"/>
+              </a:spcAft>
+              <a:buNone/>
+            </a:pPr>
+            <a:r>
+              <a:rPr lang="en-US" sz="4000" b="1" dirty="0">
+                <a:solidFill>
+                  <a:srgbClr val="111111"/>
+                </a:solidFill>
+                <a:latin typeface="Times New Roman" pitchFamily="34" charset="0"/>
+                <a:ea typeface="Times New Roman" pitchFamily="34" charset="-122"/>
+                <a:cs typeface="Times New Roman" pitchFamily="34" charset="-120"/>
+              </a:rPr>
+              <a:t>Small trade: </a:t>
+            </a:r>
+            <a:pPr algn="l" indent="0" marL="0">
+              <a:spcAft>
+                <a:spcPts val="800"/>
+              </a:spcAft>
+              <a:buNone/>
+            </a:pPr>
+            <a:r>
+              <a:rPr lang="en-US" sz="4000" dirty="0">
+                <a:solidFill>
+                  <a:srgbClr val="111111"/>
+                </a:solidFill>
+                <a:latin typeface="Times New Roman" pitchFamily="34" charset="0"/>
+                <a:ea typeface="Times New Roman" pitchFamily="34" charset="-122"/>
+                <a:cs typeface="Times New Roman" pitchFamily="34" charset="-120"/>
+              </a:rPr>
+              <a:t>It is a small business run by one person or a family with little money.</a:t>
             </a:r>
             <a:endParaRPr lang="en-US" sz="4000" dirty="0"/>
           </a:p>
@@ -13374,7 +14301,7 @@
         <p:spPr>
           <a:xfrm>
             <a:off x="0" y="658368"/>
-            <a:ext cx="1463040" cy="5833872"/>
+            <a:ext cx="5120640" cy="5833872"/>
           </a:xfrm>
           <a:prstGeom prst="rect">
             <a:avLst/>
@@ -13389,8 +14316,8 @@
         </p:nvSpPr>
         <p:spPr>
           <a:xfrm>
-            <a:off x="1691640" y="1005840"/>
-            <a:ext cx="10180015" cy="731520"/>
+            <a:off x="5349240" y="1005840"/>
+            <a:ext cx="6522415" cy="731520"/>
           </a:xfrm>
           <a:prstGeom prst="rect">
             <a:avLst/>
@@ -13416,7 +14343,7 @@
                 <a:ea typeface="Times New Roman" pitchFamily="34" charset="-122"/>
                 <a:cs typeface="Times New Roman" pitchFamily="34" charset="-120"/>
               </a:rPr>
-              <a:t>1. Types and Characteristics</a:t>
+              <a:t>DEFINITIONS (continued)</a:t>
             </a:r>
             <a:endParaRPr lang="en-US" sz="3600" dirty="0"/>
           </a:p>
@@ -13430,8 +14357,8 @@
         </p:nvSpPr>
         <p:spPr>
           <a:xfrm>
-            <a:off x="1691640" y="1783080"/>
-            <a:ext cx="10180015" cy="4663440"/>
+            <a:off x="5349240" y="1783080"/>
+            <a:ext cx="6522415" cy="4663440"/>
           </a:xfrm>
           <a:prstGeom prst="rect">
             <a:avLst/>
@@ -13450,7 +14377,7 @@
               <a:buNone/>
             </a:pPr>
             <a:r>
-              <a:rPr lang="en-US" sz="4000" i="1" dirty="0">
+              <a:rPr lang="en-US" sz="4000" b="1" dirty="0">
                 <a:solidFill>
                   <a:srgbClr val="111111"/>
                 </a:solidFill>
@@ -13458,11 +14385,8 @@
                 <a:ea typeface="Times New Roman" pitchFamily="34" charset="-122"/>
                 <a:cs typeface="Times New Roman" pitchFamily="34" charset="-120"/>
               </a:rPr>
-              <a:t>Informal activities have the following types and characteristics:</a:t>
-            </a:r>
-            <a:endParaRPr lang="en-US" sz="4000" dirty="0"/>
-          </a:p>
-          <a:p>
+              <a:t>Self-employment: </a:t>
+            </a:r>
             <a:pPr algn="l" indent="0" marL="0">
               <a:spcAft>
                 <a:spcPts val="800"/>
@@ -13470,7 +14394,7 @@
               <a:buNone/>
             </a:pPr>
             <a:r>
-              <a:rPr lang="en-US" sz="4000" b="1" dirty="0">
+              <a:rPr lang="en-US" sz="4000" dirty="0">
                 <a:solidFill>
                   <a:srgbClr val="111111"/>
                 </a:solidFill>
@@ -13478,61 +14402,7 @@
                 <a:ea typeface="Times New Roman" pitchFamily="34" charset="-122"/>
                 <a:cs typeface="Times New Roman" pitchFamily="34" charset="-120"/>
               </a:rPr>
-              <a:t>Types: </a:t>
-            </a:r>
-            <a:pPr algn="l" indent="0" marL="0">
-              <a:spcAft>
-                <a:spcPts val="800"/>
-              </a:spcAft>
-              <a:buNone/>
-            </a:pPr>
-            <a:r>
-              <a:rPr lang="en-US" sz="4000" dirty="0">
-                <a:solidFill>
-                  <a:srgbClr val="111111"/>
-                </a:solidFill>
-                <a:latin typeface="Times New Roman" pitchFamily="34" charset="0"/>
-                <a:ea typeface="Times New Roman" pitchFamily="34" charset="-122"/>
-                <a:cs typeface="Times New Roman" pitchFamily="34" charset="-120"/>
-              </a:rPr>
-              <a:t>They include small trade, moto-taxi transport, crafts, repairs and food selling.</a:t>
-            </a:r>
-            <a:endParaRPr lang="en-US" sz="4000" dirty="0"/>
-          </a:p>
-          <a:p>
-            <a:pPr algn="l" indent="0" marL="0">
-              <a:spcAft>
-                <a:spcPts val="800"/>
-              </a:spcAft>
-              <a:buNone/>
-            </a:pPr>
-            <a:r>
-              <a:rPr lang="en-US" sz="4000" b="1" dirty="0">
-                <a:solidFill>
-                  <a:srgbClr val="111111"/>
-                </a:solidFill>
-                <a:latin typeface="Times New Roman" pitchFamily="34" charset="0"/>
-                <a:ea typeface="Times New Roman" pitchFamily="34" charset="-122"/>
-                <a:cs typeface="Times New Roman" pitchFamily="34" charset="-120"/>
-              </a:rPr>
-              <a:t>Characteristics: </a:t>
-            </a:r>
-            <a:pPr algn="l" indent="0" marL="0">
-              <a:spcAft>
-                <a:spcPts val="800"/>
-              </a:spcAft>
-              <a:buNone/>
-            </a:pPr>
-            <a:r>
-              <a:rPr lang="en-US" sz="4000" dirty="0">
-                <a:solidFill>
-                  <a:srgbClr val="111111"/>
-                </a:solidFill>
-                <a:latin typeface="Times New Roman" pitchFamily="34" charset="0"/>
-                <a:ea typeface="Times New Roman" pitchFamily="34" charset="-122"/>
-                <a:cs typeface="Times New Roman" pitchFamily="34" charset="-120"/>
-              </a:rPr>
-              <a:t>They need little capital and little training and are run by individuals or families.</a:t>
+              <a:t>It is working for oneself instead of working for an employer.</a:t>
             </a:r>
             <a:endParaRPr lang="en-US" sz="4000" dirty="0"/>
           </a:p>
@@ -13650,9 +14520,129 @@
           </a:p>
         </p:txBody>
       </p:sp>
+      <p:sp>
+        <p:nvSpPr>
+          <p:cNvPr id="3" name="Text 1"/>
+          <p:cNvSpPr/>
+          <p:nvPr/>
+        </p:nvSpPr>
+        <p:spPr>
+          <a:xfrm>
+            <a:off x="365760" y="1005840"/>
+            <a:ext cx="11460175" cy="731520"/>
+          </a:xfrm>
+          <a:prstGeom prst="rect">
+            <a:avLst/>
+          </a:prstGeom>
+          <a:noFill/>
+          <a:ln/>
+        </p:spPr>
+        <p:txBody>
+          <a:bodyPr wrap="square" lIns="0" tIns="0" rIns="0" bIns="0" rtlCol="0" anchor="ctr">
+            <a:normAutofit/>
+          </a:bodyPr>
+          <a:lstStyle/>
+          <a:p>
+            <a:pPr algn="ctr" indent="0" marL="0">
+              <a:buNone/>
+            </a:pPr>
+            <a:r>
+              <a:rPr lang="en-US" sz="3600" b="1" dirty="0">
+                <a:solidFill>
+                  <a:srgbClr val="990011"/>
+                </a:solidFill>
+                <a:latin typeface="Times New Roman" pitchFamily="34" charset="0"/>
+                <a:ea typeface="Times New Roman" pitchFamily="34" charset="-122"/>
+                <a:cs typeface="Times New Roman" pitchFamily="34" charset="-120"/>
+              </a:rPr>
+              <a:t>1. Types of Informal Activities</a:t>
+            </a:r>
+            <a:endParaRPr lang="en-US" sz="3600" dirty="0"/>
+          </a:p>
+        </p:txBody>
+      </p:sp>
+      <p:sp>
+        <p:nvSpPr>
+          <p:cNvPr id="4" name="Text 2"/>
+          <p:cNvSpPr/>
+          <p:nvPr/>
+        </p:nvSpPr>
+        <p:spPr>
+          <a:xfrm>
+            <a:off x="365760" y="1783080"/>
+            <a:ext cx="4846320" cy="4617720"/>
+          </a:xfrm>
+          <a:prstGeom prst="rect">
+            <a:avLst/>
+          </a:prstGeom>
+          <a:noFill/>
+          <a:ln/>
+        </p:spPr>
+        <p:txBody>
+          <a:bodyPr wrap="square" lIns="0" tIns="0" rIns="0" bIns="0" rtlCol="0" anchor="t"/>
+          <a:lstStyle/>
+          <a:p>
+            <a:pPr algn="l" indent="0" marL="0">
+              <a:spcAft>
+                <a:spcPts val="800"/>
+              </a:spcAft>
+              <a:buNone/>
+            </a:pPr>
+            <a:r>
+              <a:rPr lang="en-US" sz="3600" i="1" dirty="0">
+                <a:solidFill>
+                  <a:srgbClr val="111111"/>
+                </a:solidFill>
+                <a:latin typeface="Times New Roman" pitchFamily="34" charset="0"/>
+                <a:ea typeface="Times New Roman" pitchFamily="34" charset="-122"/>
+                <a:cs typeface="Times New Roman" pitchFamily="34" charset="-120"/>
+              </a:rPr>
+              <a:t>The main types of informal activities are the following:</a:t>
+            </a:r>
+            <a:endParaRPr lang="en-US" sz="3600" dirty="0"/>
+          </a:p>
+          <a:p>
+            <a:pPr algn="l" indent="0" marL="0">
+              <a:spcAft>
+                <a:spcPts val="800"/>
+              </a:spcAft>
+              <a:buNone/>
+            </a:pPr>
+            <a:r>
+              <a:rPr lang="en-US" sz="3600" b="1" dirty="0">
+                <a:solidFill>
+                  <a:srgbClr val="111111"/>
+                </a:solidFill>
+                <a:latin typeface="Times New Roman" pitchFamily="34" charset="0"/>
+                <a:ea typeface="Times New Roman" pitchFamily="34" charset="-122"/>
+                <a:cs typeface="Times New Roman" pitchFamily="34" charset="-120"/>
+              </a:rPr>
+              <a:t>Small trade: </a:t>
+            </a:r>
+            <a:pPr algn="l" indent="0" marL="0">
+              <a:spcAft>
+                <a:spcPts val="800"/>
+              </a:spcAft>
+              <a:buNone/>
+            </a:pPr>
+            <a:r>
+              <a:rPr lang="en-US" sz="3600" dirty="0">
+                <a:solidFill>
+                  <a:srgbClr val="111111"/>
+                </a:solidFill>
+                <a:latin typeface="Times New Roman" pitchFamily="34" charset="0"/>
+                <a:ea typeface="Times New Roman" pitchFamily="34" charset="-122"/>
+                <a:cs typeface="Times New Roman" pitchFamily="34" charset="-120"/>
+              </a:rPr>
+              <a:t>Street selling of food, fruits, clothes, fuel and phone credit.</a:t>
+            </a:r>
+            <a:endParaRPr lang="en-US" sz="3600" dirty="0"/>
+          </a:p>
+        </p:txBody>
+      </p:sp>
       <p:pic>
         <p:nvPicPr>
-          <p:cNvPr id="3" name="Image 0" descr="/home/claude/f4/img/minesec_sheet.png">    </p:cNvPr>
+          <p:cNvPr id="5" name="Image 0" descr="/home/claude/f4/img/v2/f2t_street_vendor.jpg">    </p:cNvPr>
           <p:cNvPicPr>
             <a:picLocks noChangeAspect="1"/>
           </p:cNvPicPr>
@@ -13666,8 +14656,8 @@
         </p:blipFill>
         <p:spPr>
           <a:xfrm>
-            <a:off x="0" y="658368"/>
-            <a:ext cx="3840480" cy="5833872"/>
+            <a:off x="5349240" y="2071212"/>
+            <a:ext cx="6659575" cy="3693983"/>
           </a:xfrm>
           <a:prstGeom prst="rect">
             <a:avLst/>
@@ -13676,14 +14666,14 @@
       </p:pic>
       <p:sp>
         <p:nvSpPr>
-          <p:cNvPr id="4" name="Text 1"/>
+          <p:cNvPr id="6" name="Text 3"/>
           <p:cNvSpPr/>
           <p:nvPr/>
         </p:nvSpPr>
         <p:spPr>
           <a:xfrm>
-            <a:off x="4069080" y="1005840"/>
-            <a:ext cx="7802575" cy="731520"/>
+            <a:off x="5349240" y="6089904"/>
+            <a:ext cx="6659575" cy="347472"/>
           </a:xfrm>
           <a:prstGeom prst="rect">
             <a:avLst/>
@@ -13692,142 +14682,24 @@
           <a:ln/>
         </p:spPr>
         <p:txBody>
-          <a:bodyPr wrap="square" lIns="0" tIns="0" rIns="0" bIns="0" rtlCol="0" anchor="ctr">
-            <a:normAutofit/>
-          </a:bodyPr>
+          <a:bodyPr wrap="square" lIns="0" tIns="0" rIns="0" bIns="0" rtlCol="0" anchor="ctr"/>
           <a:lstStyle/>
           <a:p>
             <a:pPr algn="ctr" indent="0" marL="0">
               <a:buNone/>
             </a:pPr>
             <a:r>
-              <a:rPr lang="en-US" sz="3600" b="1" dirty="0">
-                <a:solidFill>
-                  <a:srgbClr val="990011"/>
+              <a:rPr lang="en-US" sz="1600" i="1" dirty="0">
+                <a:solidFill>
+                  <a:srgbClr val="555555"/>
                 </a:solidFill>
                 <a:latin typeface="Times New Roman" pitchFamily="34" charset="0"/>
                 <a:ea typeface="Times New Roman" pitchFamily="34" charset="-122"/>
                 <a:cs typeface="Times New Roman" pitchFamily="34" charset="-120"/>
               </a:rPr>
-              <a:t>2. Importance</a:t>
-            </a:r>
-            <a:endParaRPr lang="en-US" sz="3600" dirty="0"/>
-          </a:p>
-        </p:txBody>
-      </p:sp>
-      <p:sp>
-        <p:nvSpPr>
-          <p:cNvPr id="5" name="Text 2"/>
-          <p:cNvSpPr/>
-          <p:nvPr/>
-        </p:nvSpPr>
-        <p:spPr>
-          <a:xfrm>
-            <a:off x="4069080" y="1783080"/>
-            <a:ext cx="7802575" cy="4663440"/>
-          </a:xfrm>
-          <a:prstGeom prst="rect">
-            <a:avLst/>
-          </a:prstGeom>
-          <a:noFill/>
-          <a:ln/>
-        </p:spPr>
-        <p:txBody>
-          <a:bodyPr wrap="square" lIns="0" tIns="0" rIns="0" bIns="0" rtlCol="0" anchor="t"/>
-          <a:lstStyle/>
-          <a:p>
-            <a:pPr algn="l" indent="0" marL="0">
-              <a:spcAft>
-                <a:spcPts val="800"/>
-              </a:spcAft>
-              <a:buNone/>
-            </a:pPr>
-            <a:r>
-              <a:rPr lang="en-US" sz="4000" i="1" dirty="0">
-                <a:solidFill>
-                  <a:srgbClr val="111111"/>
-                </a:solidFill>
-                <a:latin typeface="Times New Roman" pitchFamily="34" charset="0"/>
-                <a:ea typeface="Times New Roman" pitchFamily="34" charset="-122"/>
-                <a:cs typeface="Times New Roman" pitchFamily="34" charset="-120"/>
-              </a:rPr>
-              <a:t>The informal sector is important for the following reasons:</a:t>
-            </a:r>
-            <a:endParaRPr lang="en-US" sz="4000" dirty="0"/>
-          </a:p>
-          <a:p>
-            <a:pPr algn="l" indent="0" marL="0">
-              <a:spcAft>
-                <a:spcPts val="800"/>
-              </a:spcAft>
-              <a:buNone/>
-            </a:pPr>
-            <a:r>
-              <a:rPr lang="en-US" sz="4000" b="1" dirty="0">
-                <a:solidFill>
-                  <a:srgbClr val="111111"/>
-                </a:solidFill>
-                <a:latin typeface="Times New Roman" pitchFamily="34" charset="0"/>
-                <a:ea typeface="Times New Roman" pitchFamily="34" charset="-122"/>
-                <a:cs typeface="Times New Roman" pitchFamily="34" charset="-120"/>
-              </a:rPr>
-              <a:t>Jobs and income: </a:t>
-            </a:r>
-            <a:pPr algn="l" indent="0" marL="0">
-              <a:spcAft>
-                <a:spcPts val="800"/>
-              </a:spcAft>
-              <a:buNone/>
-            </a:pPr>
-            <a:r>
-              <a:rPr lang="en-US" sz="4000" dirty="0">
-                <a:solidFill>
-                  <a:srgbClr val="111111"/>
-                </a:solidFill>
-                <a:latin typeface="Times New Roman" pitchFamily="34" charset="0"/>
-                <a:ea typeface="Times New Roman" pitchFamily="34" charset="-122"/>
-                <a:cs typeface="Times New Roman" pitchFamily="34" charset="-120"/>
-              </a:rPr>
-              <a:t>It employs most workers in African cities.</a:t>
-            </a:r>
-            <a:endParaRPr lang="en-US" sz="4000" dirty="0"/>
-          </a:p>
-          <a:p>
-            <a:pPr algn="l" indent="0" marL="0">
-              <a:spcAft>
-                <a:spcPts val="800"/>
-              </a:spcAft>
-              <a:buNone/>
-            </a:pPr>
-            <a:r>
-              <a:rPr lang="en-US" sz="4000" b="1" dirty="0">
-                <a:solidFill>
-                  <a:srgbClr val="111111"/>
-                </a:solidFill>
-                <a:latin typeface="Times New Roman" pitchFamily="34" charset="0"/>
-                <a:ea typeface="Times New Roman" pitchFamily="34" charset="-122"/>
-                <a:cs typeface="Times New Roman" pitchFamily="34" charset="-120"/>
-              </a:rPr>
-              <a:t>Cheap goods and services: </a:t>
-            </a:r>
-            <a:pPr algn="l" indent="0" marL="0">
-              <a:spcAft>
-                <a:spcPts val="800"/>
-              </a:spcAft>
-              <a:buNone/>
-            </a:pPr>
-            <a:r>
-              <a:rPr lang="en-US" sz="4000" dirty="0">
-                <a:solidFill>
-                  <a:srgbClr val="111111"/>
-                </a:solidFill>
-                <a:latin typeface="Times New Roman" pitchFamily="34" charset="0"/>
-                <a:ea typeface="Times New Roman" pitchFamily="34" charset="-122"/>
-                <a:cs typeface="Times New Roman" pitchFamily="34" charset="-120"/>
-              </a:rPr>
-              <a:t>It provides food, transport and repairs at low prices.</a:t>
-            </a:r>
-            <a:endParaRPr lang="en-US" sz="4000" dirty="0"/>
+              <a:t>Illustration: a street seller</a:t>
+            </a:r>
+            <a:endParaRPr lang="en-US" sz="1600" dirty="0"/>
           </a:p>
         </p:txBody>
       </p:sp>
@@ -13943,9 +14815,109 @@
           </a:p>
         </p:txBody>
       </p:sp>
+      <p:sp>
+        <p:nvSpPr>
+          <p:cNvPr id="3" name="Text 1"/>
+          <p:cNvSpPr/>
+          <p:nvPr/>
+        </p:nvSpPr>
+        <p:spPr>
+          <a:xfrm>
+            <a:off x="365760" y="1005840"/>
+            <a:ext cx="11460175" cy="731520"/>
+          </a:xfrm>
+          <a:prstGeom prst="rect">
+            <a:avLst/>
+          </a:prstGeom>
+          <a:noFill/>
+          <a:ln/>
+        </p:spPr>
+        <p:txBody>
+          <a:bodyPr wrap="square" lIns="0" tIns="0" rIns="0" bIns="0" rtlCol="0" anchor="ctr">
+            <a:normAutofit/>
+          </a:bodyPr>
+          <a:lstStyle/>
+          <a:p>
+            <a:pPr algn="ctr" indent="0" marL="0">
+              <a:buNone/>
+            </a:pPr>
+            <a:r>
+              <a:rPr lang="en-US" sz="3600" b="1" dirty="0">
+                <a:solidFill>
+                  <a:srgbClr val="990011"/>
+                </a:solidFill>
+                <a:latin typeface="Times New Roman" pitchFamily="34" charset="0"/>
+                <a:ea typeface="Times New Roman" pitchFamily="34" charset="-122"/>
+                <a:cs typeface="Times New Roman" pitchFamily="34" charset="-120"/>
+              </a:rPr>
+              <a:t>1. Types of Informal Activities</a:t>
+            </a:r>
+            <a:endParaRPr lang="en-US" sz="3600" dirty="0"/>
+          </a:p>
+        </p:txBody>
+      </p:sp>
+      <p:sp>
+        <p:nvSpPr>
+          <p:cNvPr id="4" name="Text 2"/>
+          <p:cNvSpPr/>
+          <p:nvPr/>
+        </p:nvSpPr>
+        <p:spPr>
+          <a:xfrm>
+            <a:off x="365760" y="1783080"/>
+            <a:ext cx="4846320" cy="4617720"/>
+          </a:xfrm>
+          <a:prstGeom prst="rect">
+            <a:avLst/>
+          </a:prstGeom>
+          <a:noFill/>
+          <a:ln/>
+        </p:spPr>
+        <p:txBody>
+          <a:bodyPr wrap="square" lIns="0" tIns="0" rIns="0" bIns="0" rtlCol="0" anchor="t"/>
+          <a:lstStyle/>
+          <a:p>
+            <a:pPr algn="l" indent="0" marL="0">
+              <a:spcAft>
+                <a:spcPts val="800"/>
+              </a:spcAft>
+              <a:buNone/>
+            </a:pPr>
+            <a:r>
+              <a:rPr lang="en-US" sz="3600" b="1" dirty="0">
+                <a:solidFill>
+                  <a:srgbClr val="111111"/>
+                </a:solidFill>
+                <a:latin typeface="Times New Roman" pitchFamily="34" charset="0"/>
+                <a:ea typeface="Times New Roman" pitchFamily="34" charset="-122"/>
+                <a:cs typeface="Times New Roman" pitchFamily="34" charset="-120"/>
+              </a:rPr>
+              <a:t>Transport: </a:t>
+            </a:r>
+            <a:pPr algn="l" indent="0" marL="0">
+              <a:spcAft>
+                <a:spcPts val="800"/>
+              </a:spcAft>
+              <a:buNone/>
+            </a:pPr>
+            <a:r>
+              <a:rPr lang="en-US" sz="3600" dirty="0">
+                <a:solidFill>
+                  <a:srgbClr val="111111"/>
+                </a:solidFill>
+                <a:latin typeface="Times New Roman" pitchFamily="34" charset="0"/>
+                <a:ea typeface="Times New Roman" pitchFamily="34" charset="-122"/>
+                <a:cs typeface="Times New Roman" pitchFamily="34" charset="-120"/>
+              </a:rPr>
+              <a:t>Moto-taxis, clandestine taxis, push-carts and porters.</a:t>
+            </a:r>
+            <a:endParaRPr lang="en-US" sz="3600" dirty="0"/>
+          </a:p>
+        </p:txBody>
+      </p:sp>
       <p:pic>
         <p:nvPicPr>
-          <p:cNvPr id="3" name="Image 0" descr="/home/claude/f4/img/minesec_sheet.png">    </p:cNvPr>
+          <p:cNvPr id="5" name="Image 0" descr="/home/claude/f4/img/v2/f2t_moto_taxi.jpg">    </p:cNvPr>
           <p:cNvPicPr>
             <a:picLocks noChangeAspect="1"/>
           </p:cNvPicPr>
@@ -13959,8 +14931,8 @@
         </p:blipFill>
         <p:spPr>
           <a:xfrm>
-            <a:off x="0" y="658368"/>
-            <a:ext cx="2468880" cy="5833872"/>
+            <a:off x="5349240" y="2071212"/>
+            <a:ext cx="6659575" cy="3693983"/>
           </a:xfrm>
           <a:prstGeom prst="rect">
             <a:avLst/>
@@ -13969,14 +14941,14 @@
       </p:pic>
       <p:sp>
         <p:nvSpPr>
-          <p:cNvPr id="4" name="Text 1"/>
+          <p:cNvPr id="6" name="Text 3"/>
           <p:cNvSpPr/>
           <p:nvPr/>
         </p:nvSpPr>
         <p:spPr>
           <a:xfrm>
-            <a:off x="2697480" y="1005840"/>
-            <a:ext cx="9174175" cy="731520"/>
+            <a:off x="5349240" y="6089904"/>
+            <a:ext cx="6659575" cy="347472"/>
           </a:xfrm>
           <a:prstGeom prst="rect">
             <a:avLst/>
@@ -13985,142 +14957,24 @@
           <a:ln/>
         </p:spPr>
         <p:txBody>
-          <a:bodyPr wrap="square" lIns="0" tIns="0" rIns="0" bIns="0" rtlCol="0" anchor="ctr">
-            <a:normAutofit/>
-          </a:bodyPr>
+          <a:bodyPr wrap="square" lIns="0" tIns="0" rIns="0" bIns="0" rtlCol="0" anchor="ctr"/>
           <a:lstStyle/>
           <a:p>
             <a:pPr algn="ctr" indent="0" marL="0">
               <a:buNone/>
             </a:pPr>
             <a:r>
-              <a:rPr lang="en-US" sz="3600" b="1" dirty="0">
-                <a:solidFill>
-                  <a:srgbClr val="990011"/>
+              <a:rPr lang="en-US" sz="1600" i="1" dirty="0">
+                <a:solidFill>
+                  <a:srgbClr val="555555"/>
                 </a:solidFill>
                 <a:latin typeface="Times New Roman" pitchFamily="34" charset="0"/>
                 <a:ea typeface="Times New Roman" pitchFamily="34" charset="-122"/>
                 <a:cs typeface="Times New Roman" pitchFamily="34" charset="-120"/>
               </a:rPr>
-              <a:t>3. Limitations</a:t>
-            </a:r>
-            <a:endParaRPr lang="en-US" sz="3600" dirty="0"/>
-          </a:p>
-        </p:txBody>
-      </p:sp>
-      <p:sp>
-        <p:nvSpPr>
-          <p:cNvPr id="5" name="Text 2"/>
-          <p:cNvSpPr/>
-          <p:nvPr/>
-        </p:nvSpPr>
-        <p:spPr>
-          <a:xfrm>
-            <a:off x="2697480" y="1783080"/>
-            <a:ext cx="9174175" cy="4663440"/>
-          </a:xfrm>
-          <a:prstGeom prst="rect">
-            <a:avLst/>
-          </a:prstGeom>
-          <a:noFill/>
-          <a:ln/>
-        </p:spPr>
-        <p:txBody>
-          <a:bodyPr wrap="square" lIns="0" tIns="0" rIns="0" bIns="0" rtlCol="0" anchor="t"/>
-          <a:lstStyle/>
-          <a:p>
-            <a:pPr algn="l" indent="0" marL="0">
-              <a:spcAft>
-                <a:spcPts val="800"/>
-              </a:spcAft>
-              <a:buNone/>
-            </a:pPr>
-            <a:r>
-              <a:rPr lang="en-US" sz="4000" i="1" dirty="0">
-                <a:solidFill>
-                  <a:srgbClr val="111111"/>
-                </a:solidFill>
-                <a:latin typeface="Times New Roman" pitchFamily="34" charset="0"/>
-                <a:ea typeface="Times New Roman" pitchFamily="34" charset="-122"/>
-                <a:cs typeface="Times New Roman" pitchFamily="34" charset="-120"/>
-              </a:rPr>
-              <a:t>The informal sector has the following limitations:</a:t>
-            </a:r>
-            <a:endParaRPr lang="en-US" sz="4000" dirty="0"/>
-          </a:p>
-          <a:p>
-            <a:pPr algn="l" indent="0" marL="0">
-              <a:spcAft>
-                <a:spcPts val="800"/>
-              </a:spcAft>
-              <a:buNone/>
-            </a:pPr>
-            <a:r>
-              <a:rPr lang="en-US" sz="4000" b="1" dirty="0">
-                <a:solidFill>
-                  <a:srgbClr val="111111"/>
-                </a:solidFill>
-                <a:latin typeface="Times New Roman" pitchFamily="34" charset="0"/>
-                <a:ea typeface="Times New Roman" pitchFamily="34" charset="-122"/>
-                <a:cs typeface="Times New Roman" pitchFamily="34" charset="-120"/>
-              </a:rPr>
-              <a:t>For workers: </a:t>
-            </a:r>
-            <a:pPr algn="l" indent="0" marL="0">
-              <a:spcAft>
-                <a:spcPts val="800"/>
-              </a:spcAft>
-              <a:buNone/>
-            </a:pPr>
-            <a:r>
-              <a:rPr lang="en-US" sz="4000" dirty="0">
-                <a:solidFill>
-                  <a:srgbClr val="111111"/>
-                </a:solidFill>
-                <a:latin typeface="Times New Roman" pitchFamily="34" charset="0"/>
-                <a:ea typeface="Times New Roman" pitchFamily="34" charset="-122"/>
-                <a:cs typeface="Times New Roman" pitchFamily="34" charset="-120"/>
-              </a:rPr>
-              <a:t>Workers have low, irregular incomes and no insurance or pension.</a:t>
-            </a:r>
-            <a:endParaRPr lang="en-US" sz="4000" dirty="0"/>
-          </a:p>
-          <a:p>
-            <a:pPr algn="l" indent="0" marL="0">
-              <a:spcAft>
-                <a:spcPts val="800"/>
-              </a:spcAft>
-              <a:buNone/>
-            </a:pPr>
-            <a:r>
-              <a:rPr lang="en-US" sz="4000" b="1" dirty="0">
-                <a:solidFill>
-                  <a:srgbClr val="111111"/>
-                </a:solidFill>
-                <a:latin typeface="Times New Roman" pitchFamily="34" charset="0"/>
-                <a:ea typeface="Times New Roman" pitchFamily="34" charset="-122"/>
-                <a:cs typeface="Times New Roman" pitchFamily="34" charset="-120"/>
-              </a:rPr>
-              <a:t>For the state and towns: </a:t>
-            </a:r>
-            <a:pPr algn="l" indent="0" marL="0">
-              <a:spcAft>
-                <a:spcPts val="800"/>
-              </a:spcAft>
-              <a:buNone/>
-            </a:pPr>
-            <a:r>
-              <a:rPr lang="en-US" sz="4000" dirty="0">
-                <a:solidFill>
-                  <a:srgbClr val="111111"/>
-                </a:solidFill>
-                <a:latin typeface="Times New Roman" pitchFamily="34" charset="0"/>
-                <a:ea typeface="Times New Roman" pitchFamily="34" charset="-122"/>
-                <a:cs typeface="Times New Roman" pitchFamily="34" charset="-120"/>
-              </a:rPr>
-              <a:t>The state loses taxes and streets become crowded and dirty.</a:t>
-            </a:r>
-            <a:endParaRPr lang="en-US" sz="4000" dirty="0"/>
+              <a:t>Illustration: moto-taxis</a:t>
+            </a:r>
+            <a:endParaRPr lang="en-US" sz="1600" dirty="0"/>
           </a:p>
         </p:txBody>
       </p:sp>
@@ -14244,8 +15098,8 @@
         </p:nvSpPr>
         <p:spPr>
           <a:xfrm>
-            <a:off x="457200" y="1005840"/>
-            <a:ext cx="11277295" cy="731520"/>
+            <a:off x="365760" y="1005840"/>
+            <a:ext cx="11460175" cy="731520"/>
           </a:xfrm>
           <a:prstGeom prst="rect">
             <a:avLst/>
@@ -14254,7 +15108,9 @@
           <a:ln/>
         </p:spPr>
         <p:txBody>
-          <a:bodyPr wrap="square" lIns="0" tIns="0" rIns="0" bIns="0" rtlCol="0" anchor="ctr"/>
+          <a:bodyPr wrap="square" lIns="0" tIns="0" rIns="0" bIns="0" rtlCol="0" anchor="ctr">
+            <a:normAutofit/>
+          </a:bodyPr>
           <a:lstStyle/>
           <a:p>
             <a:pPr algn="ctr" indent="0" marL="0">
@@ -14269,7 +15125,66 @@
                 <a:ea typeface="Times New Roman" pitchFamily="34" charset="-122"/>
                 <a:cs typeface="Times New Roman" pitchFamily="34" charset="-120"/>
               </a:rPr>
-              <a:t>3. Limitations</a:t>
+              <a:t>1. Types of Informal Activities</a:t>
+            </a:r>
+            <a:endParaRPr lang="en-US" sz="3600" dirty="0"/>
+          </a:p>
+        </p:txBody>
+      </p:sp>
+      <p:sp>
+        <p:nvSpPr>
+          <p:cNvPr id="4" name="Text 2"/>
+          <p:cNvSpPr/>
+          <p:nvPr/>
+        </p:nvSpPr>
+        <p:spPr>
+          <a:xfrm>
+            <a:off x="365760" y="1783080"/>
+            <a:ext cx="4846320" cy="4617720"/>
+          </a:xfrm>
+          <a:prstGeom prst="rect">
+            <a:avLst/>
+          </a:prstGeom>
+          <a:noFill/>
+          <a:ln/>
+        </p:spPr>
+        <p:txBody>
+          <a:bodyPr wrap="square" lIns="0" tIns="0" rIns="0" bIns="0" rtlCol="0" anchor="t"/>
+          <a:lstStyle/>
+          <a:p>
+            <a:pPr algn="l" indent="0" marL="0">
+              <a:spcAft>
+                <a:spcPts val="800"/>
+              </a:spcAft>
+              <a:buNone/>
+            </a:pPr>
+            <a:r>
+              <a:rPr lang="en-US" sz="3600" b="1" dirty="0">
+                <a:solidFill>
+                  <a:srgbClr val="111111"/>
+                </a:solidFill>
+                <a:latin typeface="Times New Roman" pitchFamily="34" charset="0"/>
+                <a:ea typeface="Times New Roman" pitchFamily="34" charset="-122"/>
+                <a:cs typeface="Times New Roman" pitchFamily="34" charset="-120"/>
+              </a:rPr>
+              <a:t>Crafts: </a:t>
+            </a:r>
+            <a:pPr algn="l" indent="0" marL="0">
+              <a:spcAft>
+                <a:spcPts val="800"/>
+              </a:spcAft>
+              <a:buNone/>
+            </a:pPr>
+            <a:r>
+              <a:rPr lang="en-US" sz="3600" dirty="0">
+                <a:solidFill>
+                  <a:srgbClr val="111111"/>
+                </a:solidFill>
+                <a:latin typeface="Times New Roman" pitchFamily="34" charset="0"/>
+                <a:ea typeface="Times New Roman" pitchFamily="34" charset="-122"/>
+                <a:cs typeface="Times New Roman" pitchFamily="34" charset="-120"/>
+              </a:rPr>
+              <a:t>Tailoring, carpentry, blacksmithing, pottery and hairdressing.</a:t>
             </a:r>
             <a:endParaRPr lang="en-US" sz="3600" dirty="0"/>
           </a:p>
@@ -14277,7 +15192,7 @@
       </p:sp>
       <p:pic>
         <p:nvPicPr>
-          <p:cNvPr id="4" name="Image 0" descr="/home/claude/f4/img/v2/formal_informal_big.png">    </p:cNvPr>
+          <p:cNvPr id="5" name="Image 0" descr="/home/claude/f4/img/v2/f2t_tailor.jpg">    </p:cNvPr>
           <p:cNvPicPr>
             <a:picLocks noChangeAspect="1"/>
           </p:cNvPicPr>
@@ -14291,8 +15206,8 @@
         </p:blipFill>
         <p:spPr>
           <a:xfrm>
-            <a:off x="629930" y="1783080"/>
-            <a:ext cx="10931835" cy="4270248"/>
+            <a:off x="5349240" y="2071212"/>
+            <a:ext cx="6659575" cy="3693983"/>
           </a:xfrm>
           <a:prstGeom prst="rect">
             <a:avLst/>
@@ -14301,14 +15216,14 @@
       </p:pic>
       <p:sp>
         <p:nvSpPr>
-          <p:cNvPr id="5" name="Text 2"/>
+          <p:cNvPr id="6" name="Text 3"/>
           <p:cNvSpPr/>
           <p:nvPr/>
         </p:nvSpPr>
         <p:spPr>
           <a:xfrm>
-            <a:off x="457200" y="6089904"/>
-            <a:ext cx="11277295" cy="347472"/>
+            <a:off x="5349240" y="6089904"/>
+            <a:ext cx="6659575" cy="347472"/>
           </a:xfrm>
           <a:prstGeom prst="rect">
             <a:avLst/>
@@ -14324,7 +15239,7 @@
               <a:buNone/>
             </a:pPr>
             <a:r>
-              <a:rPr lang="en-US" sz="1800" i="1" dirty="0">
+              <a:rPr lang="en-US" sz="1600" i="1" dirty="0">
                 <a:solidFill>
                   <a:srgbClr val="555555"/>
                 </a:solidFill>
@@ -14332,9 +15247,9 @@
                 <a:ea typeface="Times New Roman" pitchFamily="34" charset="-122"/>
                 <a:cs typeface="Times New Roman" pitchFamily="34" charset="-120"/>
               </a:rPr>
-              <a:t>Illustration: formal and informal sectors</a:t>
-            </a:r>
-            <a:endParaRPr lang="en-US" sz="1800" dirty="0"/>
+              <a:t>Illustration: a tailor</a:t>
+            </a:r>
+            <a:endParaRPr lang="en-US" sz="1600" dirty="0"/>
           </a:p>
         </p:txBody>
       </p:sp>
@@ -14444,7 +15359,7 @@
                 <a:ea typeface="Calibri" pitchFamily="34" charset="-122"/>
                 <a:cs typeface="Calibri" pitchFamily="34" charset="-120"/>
               </a:rPr>
-              <a:t>FORMATIVE EVALUATION</a:t>
+              <a:t>BOARD SUMMARY</a:t>
             </a:r>
             <a:endParaRPr lang="en-US" sz="1400" dirty="0"/>
           </a:p>
@@ -14509,7 +15424,7 @@
                 <a:ea typeface="Times New Roman" pitchFamily="34" charset="-122"/>
                 <a:cs typeface="Times New Roman" pitchFamily="34" charset="-120"/>
               </a:rPr>
-              <a:t>Evaluation 1</a:t>
+              <a:t>1. Types of Informal Activities</a:t>
             </a:r>
             <a:endParaRPr lang="en-US" sz="3600" dirty="0"/>
           </a:p>
@@ -14543,7 +15458,7 @@
               <a:buNone/>
             </a:pPr>
             <a:r>
-              <a:rPr lang="en-US" sz="4000" dirty="0">
+              <a:rPr lang="en-US" sz="4000" b="1" dirty="0">
                 <a:solidFill>
                   <a:srgbClr val="111111"/>
                 </a:solidFill>
@@ -14551,7 +15466,61 @@
                 <a:ea typeface="Times New Roman" pitchFamily="34" charset="-122"/>
                 <a:cs typeface="Times New Roman" pitchFamily="34" charset="-120"/>
               </a:rPr>
-              <a:t>Give two characteristics of informal activities.</a:t>
+              <a:t>Repairs: </a:t>
+            </a:r>
+            <a:pPr algn="l" indent="0" marL="0">
+              <a:spcAft>
+                <a:spcPts val="800"/>
+              </a:spcAft>
+              <a:buNone/>
+            </a:pPr>
+            <a:r>
+              <a:rPr lang="en-US" sz="4000" dirty="0">
+                <a:solidFill>
+                  <a:srgbClr val="111111"/>
+                </a:solidFill>
+                <a:latin typeface="Times New Roman" pitchFamily="34" charset="0"/>
+                <a:ea typeface="Times New Roman" pitchFamily="34" charset="-122"/>
+                <a:cs typeface="Times New Roman" pitchFamily="34" charset="-120"/>
+              </a:rPr>
+              <a:t>Repairing of cars, motorbikes, shoes, phones and radios.</a:t>
+            </a:r>
+            <a:endParaRPr lang="en-US" sz="4000" dirty="0"/>
+          </a:p>
+          <a:p>
+            <a:pPr algn="l" indent="0" marL="0">
+              <a:spcAft>
+                <a:spcPts val="800"/>
+              </a:spcAft>
+              <a:buNone/>
+            </a:pPr>
+            <a:r>
+              <a:rPr lang="en-US" sz="4000" b="1" dirty="0">
+                <a:solidFill>
+                  <a:srgbClr val="111111"/>
+                </a:solidFill>
+                <a:latin typeface="Times New Roman" pitchFamily="34" charset="0"/>
+                <a:ea typeface="Times New Roman" pitchFamily="34" charset="-122"/>
+                <a:cs typeface="Times New Roman" pitchFamily="34" charset="-120"/>
+              </a:rPr>
+              <a:t>Food services: </a:t>
+            </a:r>
+            <a:pPr algn="l" indent="0" marL="0">
+              <a:spcAft>
+                <a:spcPts val="800"/>
+              </a:spcAft>
+              <a:buNone/>
+            </a:pPr>
+            <a:r>
+              <a:rPr lang="en-US" sz="4000" dirty="0">
+                <a:solidFill>
+                  <a:srgbClr val="111111"/>
+                </a:solidFill>
+                <a:latin typeface="Times New Roman" pitchFamily="34" charset="0"/>
+                <a:ea typeface="Times New Roman" pitchFamily="34" charset="-122"/>
+                <a:cs typeface="Times New Roman" pitchFamily="34" charset="-120"/>
+              </a:rPr>
+              <a:t>Small restaurants (tourne-dos), roasted fish and maize, and drinks.</a:t>
             </a:r>
             <a:endParaRPr lang="en-US" sz="4000" dirty="0"/>
           </a:p>
@@ -14902,7 +15871,7 @@
                 <a:ea typeface="Calibri" pitchFamily="34" charset="-122"/>
                 <a:cs typeface="Calibri" pitchFamily="34" charset="-120"/>
               </a:rPr>
-              <a:t>FORMATIVE EVALUATION</a:t>
+              <a:t>BOARD SUMMARY</a:t>
             </a:r>
             <a:endParaRPr lang="en-US" sz="1400" dirty="0"/>
           </a:p>
@@ -14967,7 +15936,7 @@
                 <a:ea typeface="Times New Roman" pitchFamily="34" charset="-122"/>
                 <a:cs typeface="Times New Roman" pitchFamily="34" charset="-120"/>
               </a:rPr>
-              <a:t>Expected Answer</a:t>
+              <a:t>2. General Characteristics</a:t>
             </a:r>
             <a:endParaRPr lang="en-US" sz="3600" dirty="0"/>
           </a:p>
@@ -15001,7 +15970,7 @@
               <a:buNone/>
             </a:pPr>
             <a:r>
-              <a:rPr lang="en-US" sz="4000" dirty="0">
+              <a:rPr lang="en-US" sz="4000" i="1" dirty="0">
                 <a:solidFill>
                   <a:srgbClr val="111111"/>
                 </a:solidFill>
@@ -15009,7 +15978,81 @@
                 <a:ea typeface="Times New Roman" pitchFamily="34" charset="-122"/>
                 <a:cs typeface="Times New Roman" pitchFamily="34" charset="-120"/>
               </a:rPr>
-              <a:t>Little capital and no registration.</a:t>
+              <a:t>Informal activities have the following characteristics:</a:t>
+            </a:r>
+            <a:endParaRPr lang="en-US" sz="4000" dirty="0"/>
+          </a:p>
+          <a:p>
+            <a:pPr algn="l" indent="0" marL="0">
+              <a:spcAft>
+                <a:spcPts val="800"/>
+              </a:spcAft>
+              <a:buNone/>
+            </a:pPr>
+            <a:r>
+              <a:rPr lang="en-US" sz="4000" b="1" dirty="0">
+                <a:solidFill>
+                  <a:srgbClr val="111111"/>
+                </a:solidFill>
+                <a:latin typeface="Times New Roman" pitchFamily="34" charset="0"/>
+                <a:ea typeface="Times New Roman" pitchFamily="34" charset="-122"/>
+                <a:cs typeface="Times New Roman" pitchFamily="34" charset="-120"/>
+              </a:rPr>
+              <a:t>Small capital: </a:t>
+            </a:r>
+            <a:pPr algn="l" indent="0" marL="0">
+              <a:spcAft>
+                <a:spcPts val="800"/>
+              </a:spcAft>
+              <a:buNone/>
+            </a:pPr>
+            <a:r>
+              <a:rPr lang="en-US" sz="4000" dirty="0">
+                <a:solidFill>
+                  <a:srgbClr val="111111"/>
+                </a:solidFill>
+                <a:latin typeface="Times New Roman" pitchFamily="34" charset="0"/>
+                <a:ea typeface="Times New Roman" pitchFamily="34" charset="-122"/>
+                <a:cs typeface="Times New Roman" pitchFamily="34" charset="-120"/>
+              </a:rPr>
+              <a:t>They need very little money to start.</a:t>
+            </a:r>
+            <a:endParaRPr lang="en-US" sz="4000" dirty="0"/>
+          </a:p>
+          <a:p>
+            <a:pPr algn="l" indent="0" marL="0">
+              <a:spcAft>
+                <a:spcPts val="800"/>
+              </a:spcAft>
+              <a:buNone/>
+            </a:pPr>
+            <a:r>
+              <a:rPr lang="en-US" sz="4000" b="1" dirty="0">
+                <a:solidFill>
+                  <a:srgbClr val="111111"/>
+                </a:solidFill>
+                <a:latin typeface="Times New Roman" pitchFamily="34" charset="0"/>
+                <a:ea typeface="Times New Roman" pitchFamily="34" charset="-122"/>
+                <a:cs typeface="Times New Roman" pitchFamily="34" charset="-120"/>
+              </a:rPr>
+              <a:t>No registration: </a:t>
+            </a:r>
+            <a:pPr algn="l" indent="0" marL="0">
+              <a:spcAft>
+                <a:spcPts val="800"/>
+              </a:spcAft>
+              <a:buNone/>
+            </a:pPr>
+            <a:r>
+              <a:rPr lang="en-US" sz="4000" dirty="0">
+                <a:solidFill>
+                  <a:srgbClr val="111111"/>
+                </a:solidFill>
+                <a:latin typeface="Times New Roman" pitchFamily="34" charset="0"/>
+                <a:ea typeface="Times New Roman" pitchFamily="34" charset="-122"/>
+                <a:cs typeface="Times New Roman" pitchFamily="34" charset="-120"/>
+              </a:rPr>
+              <a:t>They are not registered and pay few or no taxes.</a:t>
             </a:r>
             <a:endParaRPr lang="en-US" sz="4000" dirty="0"/>
           </a:p>
@@ -15121,7 +16164,7 @@
                 <a:ea typeface="Calibri" pitchFamily="34" charset="-122"/>
                 <a:cs typeface="Calibri" pitchFamily="34" charset="-120"/>
               </a:rPr>
-              <a:t>FORMATIVE EVALUATION</a:t>
+              <a:t>BOARD SUMMARY</a:t>
             </a:r>
             <a:endParaRPr lang="en-US" sz="1400" dirty="0"/>
           </a:p>
@@ -15186,7 +16229,7 @@
                 <a:ea typeface="Times New Roman" pitchFamily="34" charset="-122"/>
                 <a:cs typeface="Times New Roman" pitchFamily="34" charset="-120"/>
               </a:rPr>
-              <a:t>Evaluation 2</a:t>
+              <a:t>2. General Characteristics (continued)</a:t>
             </a:r>
             <a:endParaRPr lang="en-US" sz="3600" dirty="0"/>
           </a:p>
@@ -15220,7 +16263,7 @@
               <a:buNone/>
             </a:pPr>
             <a:r>
-              <a:rPr lang="en-US" sz="4000" dirty="0">
+              <a:rPr lang="en-US" sz="4000" b="1" dirty="0">
                 <a:solidFill>
                   <a:srgbClr val="111111"/>
                 </a:solidFill>
@@ -15228,7 +16271,61 @@
                 <a:ea typeface="Times New Roman" pitchFamily="34" charset="-122"/>
                 <a:cs typeface="Times New Roman" pitchFamily="34" charset="-120"/>
               </a:rPr>
-              <a:t>Give one importance and one limitation.</a:t>
+              <a:t>Little training: </a:t>
+            </a:r>
+            <a:pPr algn="l" indent="0" marL="0">
+              <a:spcAft>
+                <a:spcPts val="800"/>
+              </a:spcAft>
+              <a:buNone/>
+            </a:pPr>
+            <a:r>
+              <a:rPr lang="en-US" sz="4000" dirty="0">
+                <a:solidFill>
+                  <a:srgbClr val="111111"/>
+                </a:solidFill>
+                <a:latin typeface="Times New Roman" pitchFamily="34" charset="0"/>
+                <a:ea typeface="Times New Roman" pitchFamily="34" charset="-122"/>
+                <a:cs typeface="Times New Roman" pitchFamily="34" charset="-120"/>
+              </a:rPr>
+              <a:t>They are learnt on the job or by apprenticeship.</a:t>
+            </a:r>
+            <a:endParaRPr lang="en-US" sz="4000" dirty="0"/>
+          </a:p>
+          <a:p>
+            <a:pPr algn="l" indent="0" marL="0">
+              <a:spcAft>
+                <a:spcPts val="800"/>
+              </a:spcAft>
+              <a:buNone/>
+            </a:pPr>
+            <a:r>
+              <a:rPr lang="en-US" sz="4000" b="1" dirty="0">
+                <a:solidFill>
+                  <a:srgbClr val="111111"/>
+                </a:solidFill>
+                <a:latin typeface="Times New Roman" pitchFamily="34" charset="0"/>
+                <a:ea typeface="Times New Roman" pitchFamily="34" charset="-122"/>
+                <a:cs typeface="Times New Roman" pitchFamily="34" charset="-120"/>
+              </a:rPr>
+              <a:t>Family or self-employment: </a:t>
+            </a:r>
+            <a:pPr algn="l" indent="0" marL="0">
+              <a:spcAft>
+                <a:spcPts val="800"/>
+              </a:spcAft>
+              <a:buNone/>
+            </a:pPr>
+            <a:r>
+              <a:rPr lang="en-US" sz="4000" dirty="0">
+                <a:solidFill>
+                  <a:srgbClr val="111111"/>
+                </a:solidFill>
+                <a:latin typeface="Times New Roman" pitchFamily="34" charset="0"/>
+                <a:ea typeface="Times New Roman" pitchFamily="34" charset="-122"/>
+                <a:cs typeface="Times New Roman" pitchFamily="34" charset="-120"/>
+              </a:rPr>
+              <a:t>They are run by one person or a family, without a written contract.</a:t>
             </a:r>
             <a:endParaRPr lang="en-US" sz="4000" dirty="0"/>
           </a:p>
@@ -15340,7 +16437,7 @@
                 <a:ea typeface="Calibri" pitchFamily="34" charset="-122"/>
                 <a:cs typeface="Calibri" pitchFamily="34" charset="-120"/>
               </a:rPr>
-              <a:t>FORMATIVE EVALUATION</a:t>
+              <a:t>BOARD SUMMARY</a:t>
             </a:r>
             <a:endParaRPr lang="en-US" sz="1400" dirty="0"/>
           </a:p>
@@ -15405,7 +16502,7 @@
                 <a:ea typeface="Times New Roman" pitchFamily="34" charset="-122"/>
                 <a:cs typeface="Times New Roman" pitchFamily="34" charset="-120"/>
               </a:rPr>
-              <a:t>Expected Answer</a:t>
+              <a:t>2. General Characteristics (continued)</a:t>
             </a:r>
             <a:endParaRPr lang="en-US" sz="3600" dirty="0"/>
           </a:p>
@@ -15439,7 +16536,7 @@
               <a:buNone/>
             </a:pPr>
             <a:r>
-              <a:rPr lang="en-US" sz="4000" dirty="0">
+              <a:rPr lang="en-US" sz="4000" b="1" dirty="0">
                 <a:solidFill>
                   <a:srgbClr val="111111"/>
                 </a:solidFill>
@@ -15447,7 +16544,24 @@
                 <a:ea typeface="Times New Roman" pitchFamily="34" charset="-122"/>
                 <a:cs typeface="Times New Roman" pitchFamily="34" charset="-120"/>
               </a:rPr>
-              <a:t>It gives jobs; workers have no pension.</a:t>
+              <a:t>Irregular income and place: </a:t>
+            </a:r>
+            <a:pPr algn="l" indent="0" marL="0">
+              <a:spcAft>
+                <a:spcPts val="800"/>
+              </a:spcAft>
+              <a:buNone/>
+            </a:pPr>
+            <a:r>
+              <a:rPr lang="en-US" sz="4000" dirty="0">
+                <a:solidFill>
+                  <a:srgbClr val="111111"/>
+                </a:solidFill>
+                <a:latin typeface="Times New Roman" pitchFamily="34" charset="0"/>
+                <a:ea typeface="Times New Roman" pitchFamily="34" charset="-122"/>
+                <a:cs typeface="Times New Roman" pitchFamily="34" charset="-120"/>
+              </a:rPr>
+              <a:t>Income changes every day, and many workers have no fixed place of work.</a:t>
             </a:r>
             <a:endParaRPr lang="en-US" sz="4000" dirty="0"/>
           </a:p>
@@ -15559,15 +16673,135 @@
                 <a:ea typeface="Calibri" pitchFamily="34" charset="-122"/>
                 <a:cs typeface="Calibri" pitchFamily="34" charset="-120"/>
               </a:rPr>
-              <a:t>REMEDIATION</a:t>
+              <a:t>BOARD SUMMARY</a:t>
             </a:r>
             <a:endParaRPr lang="en-US" sz="1400" dirty="0"/>
+          </a:p>
+        </p:txBody>
+      </p:sp>
+      <p:sp>
+        <p:nvSpPr>
+          <p:cNvPr id="3" name="Text 1"/>
+          <p:cNvSpPr/>
+          <p:nvPr/>
+        </p:nvSpPr>
+        <p:spPr>
+          <a:xfrm>
+            <a:off x="365760" y="1005840"/>
+            <a:ext cx="11460175" cy="731520"/>
+          </a:xfrm>
+          <a:prstGeom prst="rect">
+            <a:avLst/>
+          </a:prstGeom>
+          <a:noFill/>
+          <a:ln/>
+        </p:spPr>
+        <p:txBody>
+          <a:bodyPr wrap="square" lIns="0" tIns="0" rIns="0" bIns="0" rtlCol="0" anchor="ctr">
+            <a:normAutofit/>
+          </a:bodyPr>
+          <a:lstStyle/>
+          <a:p>
+            <a:pPr algn="ctr" indent="0" marL="0">
+              <a:buNone/>
+            </a:pPr>
+            <a:r>
+              <a:rPr lang="en-US" sz="3600" b="1" dirty="0">
+                <a:solidFill>
+                  <a:srgbClr val="990011"/>
+                </a:solidFill>
+                <a:latin typeface="Times New Roman" pitchFamily="34" charset="0"/>
+                <a:ea typeface="Times New Roman" pitchFamily="34" charset="-122"/>
+                <a:cs typeface="Times New Roman" pitchFamily="34" charset="-120"/>
+              </a:rPr>
+              <a:t>3. Importance of the Informal Sector</a:t>
+            </a:r>
+            <a:endParaRPr lang="en-US" sz="3600" dirty="0"/>
+          </a:p>
+        </p:txBody>
+      </p:sp>
+      <p:sp>
+        <p:nvSpPr>
+          <p:cNvPr id="4" name="Text 2"/>
+          <p:cNvSpPr/>
+          <p:nvPr/>
+        </p:nvSpPr>
+        <p:spPr>
+          <a:xfrm>
+            <a:off x="365760" y="1783080"/>
+            <a:ext cx="4846320" cy="4617720"/>
+          </a:xfrm>
+          <a:prstGeom prst="rect">
+            <a:avLst/>
+          </a:prstGeom>
+          <a:noFill/>
+          <a:ln/>
+        </p:spPr>
+        <p:txBody>
+          <a:bodyPr wrap="square" lIns="0" tIns="0" rIns="0" bIns="0" rtlCol="0" anchor="t"/>
+          <a:lstStyle/>
+          <a:p>
+            <a:pPr algn="l" indent="0" marL="0">
+              <a:spcAft>
+                <a:spcPts val="800"/>
+              </a:spcAft>
+              <a:buNone/>
+            </a:pPr>
+            <a:r>
+              <a:rPr lang="en-US" sz="3600" i="1" dirty="0">
+                <a:solidFill>
+                  <a:srgbClr val="111111"/>
+                </a:solidFill>
+                <a:latin typeface="Times New Roman" pitchFamily="34" charset="0"/>
+                <a:ea typeface="Times New Roman" pitchFamily="34" charset="-122"/>
+                <a:cs typeface="Times New Roman" pitchFamily="34" charset="-120"/>
+              </a:rPr>
+              <a:t>The informal sector is important for the following reasons:</a:t>
+            </a:r>
+            <a:endParaRPr lang="en-US" sz="3600" dirty="0"/>
+          </a:p>
+          <a:p>
+            <a:pPr algn="l" indent="0" marL="0">
+              <a:spcAft>
+                <a:spcPts val="800"/>
+              </a:spcAft>
+              <a:buNone/>
+            </a:pPr>
+            <a:r>
+              <a:rPr lang="en-US" sz="3600" b="1" dirty="0">
+                <a:solidFill>
+                  <a:srgbClr val="111111"/>
+                </a:solidFill>
+                <a:latin typeface="Times New Roman" pitchFamily="34" charset="0"/>
+                <a:ea typeface="Times New Roman" pitchFamily="34" charset="-122"/>
+                <a:cs typeface="Times New Roman" pitchFamily="34" charset="-120"/>
+              </a:rPr>
+              <a:t>Jobs: </a:t>
+            </a:r>
+            <a:pPr algn="l" indent="0" marL="0">
+              <a:spcAft>
+                <a:spcPts val="800"/>
+              </a:spcAft>
+              <a:buNone/>
+            </a:pPr>
+            <a:r>
+              <a:rPr lang="en-US" sz="3600" dirty="0">
+                <a:solidFill>
+                  <a:srgbClr val="111111"/>
+                </a:solidFill>
+                <a:latin typeface="Times New Roman" pitchFamily="34" charset="0"/>
+                <a:ea typeface="Times New Roman" pitchFamily="34" charset="-122"/>
+                <a:cs typeface="Times New Roman" pitchFamily="34" charset="-120"/>
+              </a:rPr>
+              <a:t>It employs most of the workers in African cities, especially young people.</a:t>
+            </a:r>
+            <a:endParaRPr lang="en-US" sz="3600" dirty="0"/>
           </a:p>
         </p:txBody>
       </p:sp>
       <p:pic>
         <p:nvPicPr>
-          <p:cNvPr id="3" name="Image 0" descr="/home/claude/f4/img/minesec_sheet.png">    </p:cNvPr>
+          <p:cNvPr id="5" name="Image 0" descr="/home/claude/f4/img/v2/f2t_market.jpg">    </p:cNvPr>
           <p:cNvPicPr>
             <a:picLocks noChangeAspect="1"/>
           </p:cNvPicPr>
@@ -15581,8 +16815,8 @@
         </p:blipFill>
         <p:spPr>
           <a:xfrm>
-            <a:off x="0" y="658368"/>
-            <a:ext cx="2468880" cy="5833872"/>
+            <a:off x="5349240" y="2071212"/>
+            <a:ext cx="6659575" cy="3693983"/>
           </a:xfrm>
           <a:prstGeom prst="rect">
             <a:avLst/>
@@ -15591,14 +16825,14 @@
       </p:pic>
       <p:sp>
         <p:nvSpPr>
-          <p:cNvPr id="4" name="Text 1"/>
+          <p:cNvPr id="6" name="Text 3"/>
           <p:cNvSpPr/>
           <p:nvPr/>
         </p:nvSpPr>
         <p:spPr>
           <a:xfrm>
-            <a:off x="2697480" y="1005840"/>
-            <a:ext cx="9174175" cy="731520"/>
+            <a:off x="5349240" y="6089904"/>
+            <a:ext cx="6659575" cy="347472"/>
           </a:xfrm>
           <a:prstGeom prst="rect">
             <a:avLst/>
@@ -15607,134 +16841,24 @@
           <a:ln/>
         </p:spPr>
         <p:txBody>
-          <a:bodyPr wrap="square" lIns="0" tIns="0" rIns="0" bIns="0" rtlCol="0" anchor="ctr">
-            <a:normAutofit/>
-          </a:bodyPr>
+          <a:bodyPr wrap="square" lIns="0" tIns="0" rIns="0" bIns="0" rtlCol="0" anchor="ctr"/>
           <a:lstStyle/>
           <a:p>
             <a:pPr algn="ctr" indent="0" marL="0">
               <a:buNone/>
             </a:pPr>
             <a:r>
-              <a:rPr lang="en-US" sz="3600" b="1" dirty="0">
-                <a:solidFill>
-                  <a:srgbClr val="990011"/>
+              <a:rPr lang="en-US" sz="1600" i="1" dirty="0">
+                <a:solidFill>
+                  <a:srgbClr val="555555"/>
                 </a:solidFill>
                 <a:latin typeface="Times New Roman" pitchFamily="34" charset="0"/>
                 <a:ea typeface="Times New Roman" pitchFamily="34" charset="-122"/>
                 <a:cs typeface="Times New Roman" pitchFamily="34" charset="-120"/>
               </a:rPr>
-              <a:t>Remediation</a:t>
-            </a:r>
-            <a:endParaRPr lang="en-US" sz="3600" dirty="0"/>
-          </a:p>
-        </p:txBody>
-      </p:sp>
-      <p:sp>
-        <p:nvSpPr>
-          <p:cNvPr id="5" name="Text 2"/>
-          <p:cNvSpPr/>
-          <p:nvPr/>
-        </p:nvSpPr>
-        <p:spPr>
-          <a:xfrm>
-            <a:off x="2697480" y="1783080"/>
-            <a:ext cx="9174175" cy="4663440"/>
-          </a:xfrm>
-          <a:prstGeom prst="rect">
-            <a:avLst/>
-          </a:prstGeom>
-          <a:noFill/>
-          <a:ln/>
-        </p:spPr>
-        <p:txBody>
-          <a:bodyPr wrap="square" lIns="0" tIns="0" rIns="0" bIns="0" rtlCol="0" anchor="t"/>
-          <a:lstStyle/>
-          <a:p>
-            <a:pPr algn="l" indent="0" marL="0">
-              <a:spcAft>
-                <a:spcPts val="800"/>
-              </a:spcAft>
-              <a:buNone/>
-            </a:pPr>
-            <a:r>
-              <a:rPr lang="en-US" sz="4000" b="1" dirty="0">
-                <a:solidFill>
-                  <a:srgbClr val="111111"/>
-                </a:solidFill>
-                <a:latin typeface="Times New Roman" pitchFamily="34" charset="0"/>
-                <a:ea typeface="Times New Roman" pitchFamily="34" charset="-122"/>
-                <a:cs typeface="Times New Roman" pitchFamily="34" charset="-120"/>
-              </a:rPr>
-              <a:t>Fill in the blanks:</a:t>
-            </a:r>
-            <a:endParaRPr lang="en-US" sz="4000" dirty="0"/>
-          </a:p>
-          <a:p>
-            <a:pPr algn="l" marL="342900" indent="-342900">
-              <a:spcAft>
-                <a:spcPts val="800"/>
-              </a:spcAft>
-              <a:buSzPct val="100000"/>
-              <a:buFont typeface="+mj-lt"/>
-              <a:buAutoNum type="arabicPeriod" startAt="1"/>
-            </a:pPr>
-            <a:r>
-              <a:rPr lang="en-US" sz="4000" dirty="0">
-                <a:solidFill>
-                  <a:srgbClr val="111111"/>
-                </a:solidFill>
-                <a:latin typeface="Times New Roman" pitchFamily="34" charset="0"/>
-                <a:ea typeface="Times New Roman" pitchFamily="34" charset="-122"/>
-                <a:cs typeface="Times New Roman" pitchFamily="34" charset="-120"/>
-              </a:rPr>
-              <a:t>Informal activities are not ______.</a:t>
-            </a:r>
-            <a:endParaRPr lang="en-US" sz="4000" dirty="0"/>
-          </a:p>
-          <a:p>
-            <a:pPr algn="l" marL="342900" indent="-342900">
-              <a:spcAft>
-                <a:spcPts val="800"/>
-              </a:spcAft>
-              <a:buSzPct val="100000"/>
-              <a:buFont typeface="+mj-lt"/>
-              <a:buAutoNum type="arabicPeriod" startAt="1"/>
-            </a:pPr>
-            <a:r>
-              <a:rPr lang="en-US" sz="4000" dirty="0">
-                <a:solidFill>
-                  <a:srgbClr val="111111"/>
-                </a:solidFill>
-                <a:latin typeface="Times New Roman" pitchFamily="34" charset="0"/>
-                <a:ea typeface="Times New Roman" pitchFamily="34" charset="-122"/>
-                <a:cs typeface="Times New Roman" pitchFamily="34" charset="-120"/>
-              </a:rPr>
-              <a:t>A moto-taxi driver works in the ______ sector.</a:t>
-            </a:r>
-            <a:endParaRPr lang="en-US" sz="4000" dirty="0"/>
-          </a:p>
-          <a:p>
-            <a:pPr algn="l" marL="342900" indent="-342900">
-              <a:spcAft>
-                <a:spcPts val="800"/>
-              </a:spcAft>
-              <a:buSzPct val="100000"/>
-              <a:buFont typeface="+mj-lt"/>
-              <a:buAutoNum type="arabicPeriod" startAt="1"/>
-            </a:pPr>
-            <a:r>
-              <a:rPr lang="en-US" sz="4000" dirty="0">
-                <a:solidFill>
-                  <a:srgbClr val="111111"/>
-                </a:solidFill>
-                <a:latin typeface="Times New Roman" pitchFamily="34" charset="0"/>
-                <a:ea typeface="Times New Roman" pitchFamily="34" charset="-122"/>
-                <a:cs typeface="Times New Roman" pitchFamily="34" charset="-120"/>
-              </a:rPr>
-              <a:t>Informal workers often have no ______.</a:t>
-            </a:r>
-            <a:endParaRPr lang="en-US" sz="4000" dirty="0"/>
+              <a:t>Illustration: a busy market</a:t>
+            </a:r>
+            <a:endParaRPr lang="en-US" sz="1600" dirty="0"/>
           </a:p>
         </p:txBody>
       </p:sp>
@@ -15844,7 +16968,7 @@
                 <a:ea typeface="Calibri" pitchFamily="34" charset="-122"/>
                 <a:cs typeface="Calibri" pitchFamily="34" charset="-120"/>
               </a:rPr>
-              <a:t>HOMEWORK</a:t>
+              <a:t>BOARD SUMMARY</a:t>
             </a:r>
             <a:endParaRPr lang="en-US" sz="1400" dirty="0"/>
           </a:p>
@@ -15867,7 +16991,7 @@
         <p:spPr>
           <a:xfrm>
             <a:off x="0" y="658368"/>
-            <a:ext cx="5120640" cy="5833872"/>
+            <a:ext cx="3840480" cy="5833872"/>
           </a:xfrm>
           <a:prstGeom prst="rect">
             <a:avLst/>
@@ -15882,8 +17006,8 @@
         </p:nvSpPr>
         <p:spPr>
           <a:xfrm>
-            <a:off x="5349240" y="1005840"/>
-            <a:ext cx="6522415" cy="731520"/>
+            <a:off x="4069080" y="1005840"/>
+            <a:ext cx="7802575" cy="731520"/>
           </a:xfrm>
           <a:prstGeom prst="rect">
             <a:avLst/>
@@ -15909,7 +17033,7 @@
                 <a:ea typeface="Times New Roman" pitchFamily="34" charset="-122"/>
                 <a:cs typeface="Times New Roman" pitchFamily="34" charset="-120"/>
               </a:rPr>
-              <a:t>Homework</a:t>
+              <a:t>3. Importance of the Informal Sector</a:t>
             </a:r>
             <a:endParaRPr lang="en-US" sz="3600" dirty="0"/>
           </a:p>
@@ -15923,8 +17047,8 @@
         </p:nvSpPr>
         <p:spPr>
           <a:xfrm>
-            <a:off x="5349240" y="1783080"/>
-            <a:ext cx="6522415" cy="4663440"/>
+            <a:off x="4069080" y="1783080"/>
+            <a:ext cx="7802575" cy="4663440"/>
           </a:xfrm>
           <a:prstGeom prst="rect">
             <a:avLst/>
@@ -15943,7 +17067,7 @@
               <a:buNone/>
             </a:pPr>
             <a:r>
-              <a:rPr lang="en-US" sz="4000" dirty="0">
+              <a:rPr lang="en-US" sz="4000" b="1" dirty="0">
                 <a:solidFill>
                   <a:srgbClr val="111111"/>
                 </a:solidFill>
@@ -15951,7 +17075,98 @@
                 <a:ea typeface="Times New Roman" pitchFamily="34" charset="-122"/>
                 <a:cs typeface="Times New Roman" pitchFamily="34" charset="-120"/>
               </a:rPr>
-              <a:t>Interview one informal worker: his job, his income and his main problem.</a:t>
+              <a:t>Income: </a:t>
+            </a:r>
+            <a:pPr algn="l" indent="0" marL="0">
+              <a:spcAft>
+                <a:spcPts val="800"/>
+              </a:spcAft>
+              <a:buNone/>
+            </a:pPr>
+            <a:r>
+              <a:rPr lang="en-US" sz="4000" dirty="0">
+                <a:solidFill>
+                  <a:srgbClr val="111111"/>
+                </a:solidFill>
+                <a:latin typeface="Times New Roman" pitchFamily="34" charset="0"/>
+                <a:ea typeface="Times New Roman" pitchFamily="34" charset="-122"/>
+                <a:cs typeface="Times New Roman" pitchFamily="34" charset="-120"/>
+              </a:rPr>
+              <a:t>It gives daily income to families and reduces poverty.</a:t>
+            </a:r>
+            <a:endParaRPr lang="en-US" sz="4000" dirty="0"/>
+          </a:p>
+          <a:p>
+            <a:pPr algn="l" indent="0" marL="0">
+              <a:spcAft>
+                <a:spcPts val="800"/>
+              </a:spcAft>
+              <a:buNone/>
+            </a:pPr>
+            <a:r>
+              <a:rPr lang="en-US" sz="4000" b="1" dirty="0">
+                <a:solidFill>
+                  <a:srgbClr val="111111"/>
+                </a:solidFill>
+                <a:latin typeface="Times New Roman" pitchFamily="34" charset="0"/>
+                <a:ea typeface="Times New Roman" pitchFamily="34" charset="-122"/>
+                <a:cs typeface="Times New Roman" pitchFamily="34" charset="-120"/>
+              </a:rPr>
+              <a:t>Cheap goods and services: </a:t>
+            </a:r>
+            <a:pPr algn="l" indent="0" marL="0">
+              <a:spcAft>
+                <a:spcPts val="800"/>
+              </a:spcAft>
+              <a:buNone/>
+            </a:pPr>
+            <a:r>
+              <a:rPr lang="en-US" sz="4000" dirty="0">
+                <a:solidFill>
+                  <a:srgbClr val="111111"/>
+                </a:solidFill>
+                <a:latin typeface="Times New Roman" pitchFamily="34" charset="0"/>
+                <a:ea typeface="Times New Roman" pitchFamily="34" charset="-122"/>
+                <a:cs typeface="Times New Roman" pitchFamily="34" charset="-120"/>
+              </a:rPr>
+              <a:t>It provides food, transport and repairs at low prices.</a:t>
+            </a:r>
+            <a:endParaRPr lang="en-US" sz="4000" dirty="0"/>
+          </a:p>
+          <a:p>
+            <a:pPr algn="l" indent="0" marL="0">
+              <a:spcAft>
+                <a:spcPts val="800"/>
+              </a:spcAft>
+              <a:buNone/>
+            </a:pPr>
+            <a:r>
+              <a:rPr lang="en-US" sz="4000" b="1" dirty="0">
+                <a:solidFill>
+                  <a:srgbClr val="111111"/>
+                </a:solidFill>
+                <a:latin typeface="Times New Roman" pitchFamily="34" charset="0"/>
+                <a:ea typeface="Times New Roman" pitchFamily="34" charset="-122"/>
+                <a:cs typeface="Times New Roman" pitchFamily="34" charset="-120"/>
+              </a:rPr>
+              <a:t>Training: </a:t>
+            </a:r>
+            <a:pPr algn="l" indent="0" marL="0">
+              <a:spcAft>
+                <a:spcPts val="800"/>
+              </a:spcAft>
+              <a:buNone/>
+            </a:pPr>
+            <a:r>
+              <a:rPr lang="en-US" sz="4000" dirty="0">
+                <a:solidFill>
+                  <a:srgbClr val="111111"/>
+                </a:solidFill>
+                <a:latin typeface="Times New Roman" pitchFamily="34" charset="0"/>
+                <a:ea typeface="Times New Roman" pitchFamily="34" charset="-122"/>
+                <a:cs typeface="Times New Roman" pitchFamily="34" charset="-120"/>
+              </a:rPr>
+              <a:t>Apprentices learn a trade in workshops.</a:t>
             </a:r>
             <a:endParaRPr lang="en-US" sz="4000" dirty="0"/>
           </a:p>
@@ -16063,7 +17278,7 @@
                 <a:ea typeface="Calibri" pitchFamily="34" charset="-122"/>
                 <a:cs typeface="Calibri" pitchFamily="34" charset="-120"/>
               </a:rPr>
-              <a:t>NEXT LESSON</a:t>
+              <a:t>BOARD SUMMARY</a:t>
             </a:r>
             <a:endParaRPr lang="en-US" sz="1400" dirty="0"/>
           </a:p>
@@ -16128,7 +17343,7 @@
                 <a:ea typeface="Times New Roman" pitchFamily="34" charset="-122"/>
                 <a:cs typeface="Times New Roman" pitchFamily="34" charset="-120"/>
               </a:rPr>
-              <a:t>Next Lesson</a:t>
+              <a:t>3. Importance of the Informal Sector (continued)</a:t>
             </a:r>
             <a:endParaRPr lang="en-US" sz="3600" dirty="0"/>
           </a:p>
@@ -16152,10 +17367,10 @@
           <a:ln/>
         </p:spPr>
         <p:txBody>
-          <a:bodyPr wrap="square" lIns="0" tIns="0" rIns="0" bIns="0" rtlCol="0" anchor="ctr"/>
-          <a:lstStyle/>
-          <a:p>
-            <a:pPr algn="ctr" indent="0" marL="0">
+          <a:bodyPr wrap="square" lIns="0" tIns="0" rIns="0" bIns="0" rtlCol="0" anchor="t"/>
+          <a:lstStyle/>
+          <a:p>
+            <a:pPr algn="l" indent="0" marL="0">
               <a:spcAft>
                 <a:spcPts val="800"/>
               </a:spcAft>
@@ -16170,27 +17385,24 @@
                 <a:ea typeface="Times New Roman" pitchFamily="34" charset="-122"/>
                 <a:cs typeface="Times New Roman" pitchFamily="34" charset="-120"/>
               </a:rPr>
-              <a:t>Our next lesson will be on:</a:t>
-            </a:r>
-            <a:endParaRPr lang="en-US" sz="4000" dirty="0"/>
-          </a:p>
-          <a:p>
-            <a:pPr algn="ctr" indent="0" marL="0">
+              <a:t>Links with the countryside: </a:t>
+            </a:r>
+            <a:pPr algn="l" indent="0" marL="0">
               <a:spcAft>
                 <a:spcPts val="800"/>
               </a:spcAft>
               <a:buNone/>
             </a:pPr>
             <a:r>
-              <a:rPr lang="en-US" sz="4000" b="1" dirty="0">
-                <a:solidFill>
-                  <a:srgbClr val="990011"/>
+              <a:rPr lang="en-US" sz="4000" dirty="0">
+                <a:solidFill>
+                  <a:srgbClr val="111111"/>
                 </a:solidFill>
                 <a:latin typeface="Times New Roman" pitchFamily="34" charset="0"/>
                 <a:ea typeface="Times New Roman" pitchFamily="34" charset="-122"/>
                 <a:cs typeface="Times New Roman" pitchFamily="34" charset="-120"/>
               </a:rPr>
-              <a:t>Practical Work 4: Location of the Regional and Divisional Headquarters of Cameroon</a:t>
+              <a:t>Traders sell farm products from the villages in the town.</a:t>
             </a:r>
             <a:endParaRPr lang="en-US" sz="4000" dirty="0"/>
           </a:p>
@@ -16302,7 +17514,7 @@
                 <a:ea typeface="Calibri" pitchFamily="34" charset="-122"/>
                 <a:cs typeface="Calibri" pitchFamily="34" charset="-120"/>
               </a:rPr>
-              <a:t>BILINGUAL GAME</a:t>
+              <a:t>BOARD SUMMARY</a:t>
             </a:r>
             <a:endParaRPr lang="en-US" sz="1400" dirty="0"/>
           </a:p>
@@ -16316,8 +17528,8 @@
         </p:nvSpPr>
         <p:spPr>
           <a:xfrm>
-            <a:off x="457200" y="1005840"/>
-            <a:ext cx="11277295" cy="731520"/>
+            <a:off x="365760" y="1005840"/>
+            <a:ext cx="11460175" cy="731520"/>
           </a:xfrm>
           <a:prstGeom prst="rect">
             <a:avLst/>
@@ -16326,7 +17538,9 @@
           <a:ln/>
         </p:spPr>
         <p:txBody>
-          <a:bodyPr wrap="square" lIns="0" tIns="0" rIns="0" bIns="0" rtlCol="0" anchor="ctr"/>
+          <a:bodyPr wrap="square" lIns="0" tIns="0" rIns="0" bIns="0" rtlCol="0" anchor="ctr">
+            <a:normAutofit/>
+          </a:bodyPr>
           <a:lstStyle/>
           <a:p>
             <a:pPr algn="ctr" indent="0" marL="0">
@@ -16341,6 +17555,2683 @@
                 <a:ea typeface="Times New Roman" pitchFamily="34" charset="-122"/>
                 <a:cs typeface="Times New Roman" pitchFamily="34" charset="-120"/>
               </a:rPr>
+              <a:t>4. Limitations of the Informal Sector</a:t>
+            </a:r>
+            <a:endParaRPr lang="en-US" sz="3600" dirty="0"/>
+          </a:p>
+        </p:txBody>
+      </p:sp>
+      <p:sp>
+        <p:nvSpPr>
+          <p:cNvPr id="4" name="Text 2"/>
+          <p:cNvSpPr/>
+          <p:nvPr/>
+        </p:nvSpPr>
+        <p:spPr>
+          <a:xfrm>
+            <a:off x="365760" y="1783080"/>
+            <a:ext cx="4846320" cy="4617720"/>
+          </a:xfrm>
+          <a:prstGeom prst="rect">
+            <a:avLst/>
+          </a:prstGeom>
+          <a:noFill/>
+          <a:ln/>
+        </p:spPr>
+        <p:txBody>
+          <a:bodyPr wrap="square" lIns="0" tIns="0" rIns="0" bIns="0" rtlCol="0" anchor="t"/>
+          <a:lstStyle/>
+          <a:p>
+            <a:pPr algn="l" indent="0" marL="0">
+              <a:spcAft>
+                <a:spcPts val="800"/>
+              </a:spcAft>
+              <a:buNone/>
+            </a:pPr>
+            <a:r>
+              <a:rPr lang="en-US" sz="3600" i="1" dirty="0">
+                <a:solidFill>
+                  <a:srgbClr val="111111"/>
+                </a:solidFill>
+                <a:latin typeface="Times New Roman" pitchFamily="34" charset="0"/>
+                <a:ea typeface="Times New Roman" pitchFamily="34" charset="-122"/>
+                <a:cs typeface="Times New Roman" pitchFamily="34" charset="-120"/>
+              </a:rPr>
+              <a:t>The informal sector has the following limitations:</a:t>
+            </a:r>
+            <a:endParaRPr lang="en-US" sz="3600" dirty="0"/>
+          </a:p>
+          <a:p>
+            <a:pPr algn="l" indent="0" marL="0">
+              <a:spcAft>
+                <a:spcPts val="800"/>
+              </a:spcAft>
+              <a:buNone/>
+            </a:pPr>
+            <a:r>
+              <a:rPr lang="en-US" sz="3600" b="1" dirty="0">
+                <a:solidFill>
+                  <a:srgbClr val="111111"/>
+                </a:solidFill>
+                <a:latin typeface="Times New Roman" pitchFamily="34" charset="0"/>
+                <a:ea typeface="Times New Roman" pitchFamily="34" charset="-122"/>
+                <a:cs typeface="Times New Roman" pitchFamily="34" charset="-120"/>
+              </a:rPr>
+              <a:t>No social protection: </a:t>
+            </a:r>
+            <a:pPr algn="l" indent="0" marL="0">
+              <a:spcAft>
+                <a:spcPts val="800"/>
+              </a:spcAft>
+              <a:buNone/>
+            </a:pPr>
+            <a:r>
+              <a:rPr lang="en-US" sz="3600" dirty="0">
+                <a:solidFill>
+                  <a:srgbClr val="111111"/>
+                </a:solidFill>
+                <a:latin typeface="Times New Roman" pitchFamily="34" charset="0"/>
+                <a:ea typeface="Times New Roman" pitchFamily="34" charset="-122"/>
+                <a:cs typeface="Times New Roman" pitchFamily="34" charset="-120"/>
+              </a:rPr>
+              <a:t>Workers have no insurance, no pension and no paid leave.</a:t>
+            </a:r>
+            <a:endParaRPr lang="en-US" sz="3600" dirty="0"/>
+          </a:p>
+        </p:txBody>
+      </p:sp>
+      <p:pic>
+        <p:nvPicPr>
+          <p:cNvPr id="5" name="Image 0" descr="/home/claude/f4/img/v2/formal_informal_big.png">    </p:cNvPr>
+          <p:cNvPicPr>
+            <a:picLocks noChangeAspect="1"/>
+          </p:cNvPicPr>
+          <p:nvPr/>
+        </p:nvPicPr>
+        <p:blipFill>
+          <a:blip r:embed="rId1"/>
+          <a:stretch>
+            <a:fillRect/>
+          </a:stretch>
+        </p:blipFill>
+        <p:spPr>
+          <a:xfrm>
+            <a:off x="5349240" y="2617506"/>
+            <a:ext cx="6659575" cy="2601397"/>
+          </a:xfrm>
+          <a:prstGeom prst="rect">
+            <a:avLst/>
+          </a:prstGeom>
+        </p:spPr>
+      </p:pic>
+      <p:sp>
+        <p:nvSpPr>
+          <p:cNvPr id="6" name="Text 3"/>
+          <p:cNvSpPr/>
+          <p:nvPr/>
+        </p:nvSpPr>
+        <p:spPr>
+          <a:xfrm>
+            <a:off x="5349240" y="6089904"/>
+            <a:ext cx="6659575" cy="347472"/>
+          </a:xfrm>
+          <a:prstGeom prst="rect">
+            <a:avLst/>
+          </a:prstGeom>
+          <a:noFill/>
+          <a:ln/>
+        </p:spPr>
+        <p:txBody>
+          <a:bodyPr wrap="square" lIns="0" tIns="0" rIns="0" bIns="0" rtlCol="0" anchor="ctr"/>
+          <a:lstStyle/>
+          <a:p>
+            <a:pPr algn="ctr" indent="0" marL="0">
+              <a:buNone/>
+            </a:pPr>
+            <a:r>
+              <a:rPr lang="en-US" sz="1600" i="1" dirty="0">
+                <a:solidFill>
+                  <a:srgbClr val="555555"/>
+                </a:solidFill>
+                <a:latin typeface="Times New Roman" pitchFamily="34" charset="0"/>
+                <a:ea typeface="Times New Roman" pitchFamily="34" charset="-122"/>
+                <a:cs typeface="Times New Roman" pitchFamily="34" charset="-120"/>
+              </a:rPr>
+              <a:t>Illustration: formal and informal sectors</a:t>
+            </a:r>
+            <a:endParaRPr lang="en-US" sz="1600" dirty="0"/>
+          </a:p>
+        </p:txBody>
+      </p:sp>
+      <p:sp>
+        <p:nvSpPr>
+          <p:cNvPr id="25" name="Slide Number Placeholder 0"/>
+          <p:cNvSpPr>
+            <a:spLocks noGrp="1"/>
+          </p:cNvSpPr>
+          <p:nvPr>
+            <p:ph type="sldNum" sz="quarter" idx="4294967295"/>
+          </p:nvPr>
+        </p:nvSpPr>
+        <p:spPr>
+          <a:xfrm>
+            <a:off x="27432" y="91440"/>
+            <a:ext cx="585216" cy="475488"/>
+          </a:xfrm>
+          <a:prstGeom prst="rect">
+            <a:avLst/>
+          </a:prstGeom>
+          <a:extLst>
+            <a:ext uri="{C572A759-6A51-4108-AA02-DFA0A04FC94B}">
+              <ma14:wrappingTextBoxFlag xmlns:ma14="http://schemas.microsoft.com/office/mac/drawingml/2011/main" val="0"/>
+            </a:ext>
+          </a:extLst>
+        </p:spPr>
+        <p:txBody>
+          <a:bodyPr/>
+          <a:lstStyle>
+            <a:lvl1pPr>
+              <a:defRPr sz="2000">
+                <a:solidFill>
+                  <a:srgbClr val="FFFFFF"/>
+                </a:solidFill>
+                <a:latin typeface="Calibri"/>
+                <a:ea typeface="Calibri"/>
+                <a:cs typeface="Calibri"/>
+              </a:defRPr>
+            </a:lvl1pPr>
+          </a:lstStyle>
+          <a:p>
+            <a:pPr algn="ctr"/>
+            <a:fld id="{F7021451-1387-4CA6-816F-3879F97B5CBC}" type="slidenum">
+              <a:rPr b="1" lang="en-US"/>
+              <a:t>46</a:t>
+            </a:fld>
+            <a:endParaRPr lang="en-US"/>
+          </a:p>
+        </p:txBody>
+      </p:sp>
+    </p:spTree>
+  </p:cSld>
+  <p:clrMapOvr>
+    <a:masterClrMapping/>
+  </p:clrMapOvr>
+</p:sld>
+</file>
+
+<file path=ppt/slides/slide47.xml><?xml version="1.0" encoding="utf-8"?>
+<p:sld xmlns:a="http://schemas.openxmlformats.org/drawingml/2006/main" xmlns:r="http://schemas.openxmlformats.org/officeDocument/2006/relationships" xmlns:p="http://schemas.openxmlformats.org/presentationml/2006/main">
+  <p:cSld name="Slide 47">
+    <p:spTree>
+      <p:nvGrpSpPr>
+        <p:cNvPr id="1" name=""/>
+        <p:cNvGrpSpPr/>
+        <p:nvPr/>
+      </p:nvGrpSpPr>
+      <p:grpSpPr>
+        <a:xfrm>
+          <a:off x="0" y="0"/>
+          <a:ext cx="0" cy="0"/>
+          <a:chOff x="0" y="0"/>
+          <a:chExt cx="0" cy="0"/>
+        </a:xfrm>
+      </p:grpSpPr>
+      <p:sp>
+        <p:nvSpPr>
+          <p:cNvPr id="2" name="Text 0"/>
+          <p:cNvSpPr/>
+          <p:nvPr/>
+        </p:nvSpPr>
+        <p:spPr>
+          <a:xfrm>
+            <a:off x="457200" y="713232"/>
+            <a:ext cx="11368735" cy="274320"/>
+          </a:xfrm>
+          <a:prstGeom prst="rect">
+            <a:avLst/>
+          </a:prstGeom>
+          <a:noFill/>
+          <a:ln/>
+        </p:spPr>
+        <p:txBody>
+          <a:bodyPr wrap="square" lIns="0" tIns="0" rIns="0" bIns="0" rtlCol="0" anchor="ctr"/>
+          <a:lstStyle/>
+          <a:p>
+            <a:pPr algn="r" indent="0" marL="0">
+              <a:buNone/>
+            </a:pPr>
+            <a:r>
+              <a:rPr lang="en-US" sz="1400" b="1" dirty="0">
+                <a:solidFill>
+                  <a:srgbClr val="1C3F6E"/>
+                </a:solidFill>
+                <a:latin typeface="Calibri" pitchFamily="34" charset="0"/>
+                <a:ea typeface="Calibri" pitchFamily="34" charset="-122"/>
+                <a:cs typeface="Calibri" pitchFamily="34" charset="-120"/>
+              </a:rPr>
+              <a:t>BOARD SUMMARY</a:t>
+            </a:r>
+            <a:endParaRPr lang="en-US" sz="1400" dirty="0"/>
+          </a:p>
+        </p:txBody>
+      </p:sp>
+      <p:pic>
+        <p:nvPicPr>
+          <p:cNvPr id="3" name="Image 0" descr="/home/claude/f4/img/minesec_sheet.png">    </p:cNvPr>
+          <p:cNvPicPr>
+            <a:picLocks noChangeAspect="1"/>
+          </p:cNvPicPr>
+          <p:nvPr/>
+        </p:nvPicPr>
+        <p:blipFill>
+          <a:blip r:embed="rId1"/>
+          <a:stretch>
+            <a:fillRect/>
+          </a:stretch>
+        </p:blipFill>
+        <p:spPr>
+          <a:xfrm>
+            <a:off x="0" y="658368"/>
+            <a:ext cx="2468880" cy="5833872"/>
+          </a:xfrm>
+          <a:prstGeom prst="rect">
+            <a:avLst/>
+          </a:prstGeom>
+        </p:spPr>
+      </p:pic>
+      <p:sp>
+        <p:nvSpPr>
+          <p:cNvPr id="4" name="Text 1"/>
+          <p:cNvSpPr/>
+          <p:nvPr/>
+        </p:nvSpPr>
+        <p:spPr>
+          <a:xfrm>
+            <a:off x="2697480" y="1005840"/>
+            <a:ext cx="9174175" cy="731520"/>
+          </a:xfrm>
+          <a:prstGeom prst="rect">
+            <a:avLst/>
+          </a:prstGeom>
+          <a:noFill/>
+          <a:ln/>
+        </p:spPr>
+        <p:txBody>
+          <a:bodyPr wrap="square" lIns="0" tIns="0" rIns="0" bIns="0" rtlCol="0" anchor="ctr">
+            <a:normAutofit/>
+          </a:bodyPr>
+          <a:lstStyle/>
+          <a:p>
+            <a:pPr algn="ctr" indent="0" marL="0">
+              <a:buNone/>
+            </a:pPr>
+            <a:r>
+              <a:rPr lang="en-US" sz="3600" b="1" dirty="0">
+                <a:solidFill>
+                  <a:srgbClr val="990011"/>
+                </a:solidFill>
+                <a:latin typeface="Times New Roman" pitchFamily="34" charset="0"/>
+                <a:ea typeface="Times New Roman" pitchFamily="34" charset="-122"/>
+                <a:cs typeface="Times New Roman" pitchFamily="34" charset="-120"/>
+              </a:rPr>
+              <a:t>4. Limitations of the Informal Sector</a:t>
+            </a:r>
+            <a:endParaRPr lang="en-US" sz="3600" dirty="0"/>
+          </a:p>
+        </p:txBody>
+      </p:sp>
+      <p:sp>
+        <p:nvSpPr>
+          <p:cNvPr id="5" name="Text 2"/>
+          <p:cNvSpPr/>
+          <p:nvPr/>
+        </p:nvSpPr>
+        <p:spPr>
+          <a:xfrm>
+            <a:off x="2697480" y="1783080"/>
+            <a:ext cx="9174175" cy="4663440"/>
+          </a:xfrm>
+          <a:prstGeom prst="rect">
+            <a:avLst/>
+          </a:prstGeom>
+          <a:noFill/>
+          <a:ln/>
+        </p:spPr>
+        <p:txBody>
+          <a:bodyPr wrap="square" lIns="0" tIns="0" rIns="0" bIns="0" rtlCol="0" anchor="t"/>
+          <a:lstStyle/>
+          <a:p>
+            <a:pPr algn="l" indent="0" marL="0">
+              <a:spcAft>
+                <a:spcPts val="800"/>
+              </a:spcAft>
+              <a:buNone/>
+            </a:pPr>
+            <a:r>
+              <a:rPr lang="en-US" sz="4000" b="1" dirty="0">
+                <a:solidFill>
+                  <a:srgbClr val="111111"/>
+                </a:solidFill>
+                <a:latin typeface="Times New Roman" pitchFamily="34" charset="0"/>
+                <a:ea typeface="Times New Roman" pitchFamily="34" charset="-122"/>
+                <a:cs typeface="Times New Roman" pitchFamily="34" charset="-120"/>
+              </a:rPr>
+              <a:t>Low and irregular income: </a:t>
+            </a:r>
+            <a:pPr algn="l" indent="0" marL="0">
+              <a:spcAft>
+                <a:spcPts val="800"/>
+              </a:spcAft>
+              <a:buNone/>
+            </a:pPr>
+            <a:r>
+              <a:rPr lang="en-US" sz="4000" dirty="0">
+                <a:solidFill>
+                  <a:srgbClr val="111111"/>
+                </a:solidFill>
+                <a:latin typeface="Times New Roman" pitchFamily="34" charset="0"/>
+                <a:ea typeface="Times New Roman" pitchFamily="34" charset="-122"/>
+                <a:cs typeface="Times New Roman" pitchFamily="34" charset="-120"/>
+              </a:rPr>
+              <a:t>Incomes are small and change from day to day.</a:t>
+            </a:r>
+            <a:endParaRPr lang="en-US" sz="4000" dirty="0"/>
+          </a:p>
+          <a:p>
+            <a:pPr algn="l" indent="0" marL="0">
+              <a:spcAft>
+                <a:spcPts val="800"/>
+              </a:spcAft>
+              <a:buNone/>
+            </a:pPr>
+            <a:r>
+              <a:rPr lang="en-US" sz="4000" b="1" dirty="0">
+                <a:solidFill>
+                  <a:srgbClr val="111111"/>
+                </a:solidFill>
+                <a:latin typeface="Times New Roman" pitchFamily="34" charset="0"/>
+                <a:ea typeface="Times New Roman" pitchFamily="34" charset="-122"/>
+                <a:cs typeface="Times New Roman" pitchFamily="34" charset="-120"/>
+              </a:rPr>
+              <a:t>Loss of taxes: </a:t>
+            </a:r>
+            <a:pPr algn="l" indent="0" marL="0">
+              <a:spcAft>
+                <a:spcPts val="800"/>
+              </a:spcAft>
+              <a:buNone/>
+            </a:pPr>
+            <a:r>
+              <a:rPr lang="en-US" sz="4000" dirty="0">
+                <a:solidFill>
+                  <a:srgbClr val="111111"/>
+                </a:solidFill>
+                <a:latin typeface="Times New Roman" pitchFamily="34" charset="0"/>
+                <a:ea typeface="Times New Roman" pitchFamily="34" charset="-122"/>
+                <a:cs typeface="Times New Roman" pitchFamily="34" charset="-120"/>
+              </a:rPr>
+              <a:t>The state and the councils lose money because taxes are not paid.</a:t>
+            </a:r>
+            <a:endParaRPr lang="en-US" sz="4000" dirty="0"/>
+          </a:p>
+          <a:p>
+            <a:pPr algn="l" indent="0" marL="0">
+              <a:spcAft>
+                <a:spcPts val="800"/>
+              </a:spcAft>
+              <a:buNone/>
+            </a:pPr>
+            <a:r>
+              <a:rPr lang="en-US" sz="4000" b="1" dirty="0">
+                <a:solidFill>
+                  <a:srgbClr val="111111"/>
+                </a:solidFill>
+                <a:latin typeface="Times New Roman" pitchFamily="34" charset="0"/>
+                <a:ea typeface="Times New Roman" pitchFamily="34" charset="-122"/>
+                <a:cs typeface="Times New Roman" pitchFamily="34" charset="-120"/>
+              </a:rPr>
+              <a:t>Disorder and pollution: </a:t>
+            </a:r>
+            <a:pPr algn="l" indent="0" marL="0">
+              <a:spcAft>
+                <a:spcPts val="800"/>
+              </a:spcAft>
+              <a:buNone/>
+            </a:pPr>
+            <a:r>
+              <a:rPr lang="en-US" sz="4000" dirty="0">
+                <a:solidFill>
+                  <a:srgbClr val="111111"/>
+                </a:solidFill>
+                <a:latin typeface="Times New Roman" pitchFamily="34" charset="0"/>
+                <a:ea typeface="Times New Roman" pitchFamily="34" charset="-122"/>
+                <a:cs typeface="Times New Roman" pitchFamily="34" charset="-120"/>
+              </a:rPr>
+              <a:t>Streets become crowded, dirty and dangerous.</a:t>
+            </a:r>
+            <a:endParaRPr lang="en-US" sz="4000" dirty="0"/>
+          </a:p>
+        </p:txBody>
+      </p:sp>
+      <p:sp>
+        <p:nvSpPr>
+          <p:cNvPr id="25" name="Slide Number Placeholder 0"/>
+          <p:cNvSpPr>
+            <a:spLocks noGrp="1"/>
+          </p:cNvSpPr>
+          <p:nvPr>
+            <p:ph type="sldNum" sz="quarter" idx="4294967295"/>
+          </p:nvPr>
+        </p:nvSpPr>
+        <p:spPr>
+          <a:xfrm>
+            <a:off x="27432" y="91440"/>
+            <a:ext cx="585216" cy="475488"/>
+          </a:xfrm>
+          <a:prstGeom prst="rect">
+            <a:avLst/>
+          </a:prstGeom>
+          <a:extLst>
+            <a:ext uri="{C572A759-6A51-4108-AA02-DFA0A04FC94B}">
+              <ma14:wrappingTextBoxFlag xmlns:ma14="http://schemas.microsoft.com/office/mac/drawingml/2011/main" val="0"/>
+            </a:ext>
+          </a:extLst>
+        </p:spPr>
+        <p:txBody>
+          <a:bodyPr/>
+          <a:lstStyle>
+            <a:lvl1pPr>
+              <a:defRPr sz="2000">
+                <a:solidFill>
+                  <a:srgbClr val="FFFFFF"/>
+                </a:solidFill>
+                <a:latin typeface="Calibri"/>
+                <a:ea typeface="Calibri"/>
+                <a:cs typeface="Calibri"/>
+              </a:defRPr>
+            </a:lvl1pPr>
+          </a:lstStyle>
+          <a:p>
+            <a:pPr algn="ctr"/>
+            <a:fld id="{F7021451-1387-4CA6-816F-3879F97B5CBC}" type="slidenum">
+              <a:rPr b="1" lang="en-US"/>
+              <a:t>47</a:t>
+            </a:fld>
+            <a:endParaRPr lang="en-US"/>
+          </a:p>
+        </p:txBody>
+      </p:sp>
+    </p:spTree>
+  </p:cSld>
+  <p:clrMapOvr>
+    <a:masterClrMapping/>
+  </p:clrMapOvr>
+</p:sld>
+</file>
+
+<file path=ppt/slides/slide48.xml><?xml version="1.0" encoding="utf-8"?>
+<p:sld xmlns:a="http://schemas.openxmlformats.org/drawingml/2006/main" xmlns:r="http://schemas.openxmlformats.org/officeDocument/2006/relationships" xmlns:p="http://schemas.openxmlformats.org/presentationml/2006/main">
+  <p:cSld name="Slide 48">
+    <p:spTree>
+      <p:nvGrpSpPr>
+        <p:cNvPr id="1" name=""/>
+        <p:cNvGrpSpPr/>
+        <p:nvPr/>
+      </p:nvGrpSpPr>
+      <p:grpSpPr>
+        <a:xfrm>
+          <a:off x="0" y="0"/>
+          <a:ext cx="0" cy="0"/>
+          <a:chOff x="0" y="0"/>
+          <a:chExt cx="0" cy="0"/>
+        </a:xfrm>
+      </p:grpSpPr>
+      <p:sp>
+        <p:nvSpPr>
+          <p:cNvPr id="2" name="Text 0"/>
+          <p:cNvSpPr/>
+          <p:nvPr/>
+        </p:nvSpPr>
+        <p:spPr>
+          <a:xfrm>
+            <a:off x="457200" y="713232"/>
+            <a:ext cx="11368735" cy="274320"/>
+          </a:xfrm>
+          <a:prstGeom prst="rect">
+            <a:avLst/>
+          </a:prstGeom>
+          <a:noFill/>
+          <a:ln/>
+        </p:spPr>
+        <p:txBody>
+          <a:bodyPr wrap="square" lIns="0" tIns="0" rIns="0" bIns="0" rtlCol="0" anchor="ctr"/>
+          <a:lstStyle/>
+          <a:p>
+            <a:pPr algn="r" indent="0" marL="0">
+              <a:buNone/>
+            </a:pPr>
+            <a:r>
+              <a:rPr lang="en-US" sz="1400" b="1" dirty="0">
+                <a:solidFill>
+                  <a:srgbClr val="1C3F6E"/>
+                </a:solidFill>
+                <a:latin typeface="Calibri" pitchFamily="34" charset="0"/>
+                <a:ea typeface="Calibri" pitchFamily="34" charset="-122"/>
+                <a:cs typeface="Calibri" pitchFamily="34" charset="-120"/>
+              </a:rPr>
+              <a:t>BOARD SUMMARY</a:t>
+            </a:r>
+            <a:endParaRPr lang="en-US" sz="1400" dirty="0"/>
+          </a:p>
+        </p:txBody>
+      </p:sp>
+      <p:pic>
+        <p:nvPicPr>
+          <p:cNvPr id="3" name="Image 0" descr="/home/claude/f4/img/minesec_sheet.png">    </p:cNvPr>
+          <p:cNvPicPr>
+            <a:picLocks noChangeAspect="1"/>
+          </p:cNvPicPr>
+          <p:nvPr/>
+        </p:nvPicPr>
+        <p:blipFill>
+          <a:blip r:embed="rId1"/>
+          <a:stretch>
+            <a:fillRect/>
+          </a:stretch>
+        </p:blipFill>
+        <p:spPr>
+          <a:xfrm>
+            <a:off x="0" y="658368"/>
+            <a:ext cx="5120640" cy="5833872"/>
+          </a:xfrm>
+          <a:prstGeom prst="rect">
+            <a:avLst/>
+          </a:prstGeom>
+        </p:spPr>
+      </p:pic>
+      <p:sp>
+        <p:nvSpPr>
+          <p:cNvPr id="4" name="Text 1"/>
+          <p:cNvSpPr/>
+          <p:nvPr/>
+        </p:nvSpPr>
+        <p:spPr>
+          <a:xfrm>
+            <a:off x="5349240" y="1005840"/>
+            <a:ext cx="6522415" cy="731520"/>
+          </a:xfrm>
+          <a:prstGeom prst="rect">
+            <a:avLst/>
+          </a:prstGeom>
+          <a:noFill/>
+          <a:ln/>
+        </p:spPr>
+        <p:txBody>
+          <a:bodyPr wrap="square" lIns="0" tIns="0" rIns="0" bIns="0" rtlCol="0" anchor="ctr">
+            <a:normAutofit/>
+          </a:bodyPr>
+          <a:lstStyle/>
+          <a:p>
+            <a:pPr algn="ctr" indent="0" marL="0">
+              <a:buNone/>
+            </a:pPr>
+            <a:r>
+              <a:rPr lang="en-US" sz="3600" b="1" dirty="0">
+                <a:solidFill>
+                  <a:srgbClr val="990011"/>
+                </a:solidFill>
+                <a:latin typeface="Times New Roman" pitchFamily="34" charset="0"/>
+                <a:ea typeface="Times New Roman" pitchFamily="34" charset="-122"/>
+                <a:cs typeface="Times New Roman" pitchFamily="34" charset="-120"/>
+              </a:rPr>
+              <a:t>4. Limitations of the Informal Sector (continued)</a:t>
+            </a:r>
+            <a:endParaRPr lang="en-US" sz="3600" dirty="0"/>
+          </a:p>
+        </p:txBody>
+      </p:sp>
+      <p:sp>
+        <p:nvSpPr>
+          <p:cNvPr id="5" name="Text 2"/>
+          <p:cNvSpPr/>
+          <p:nvPr/>
+        </p:nvSpPr>
+        <p:spPr>
+          <a:xfrm>
+            <a:off x="5349240" y="1783080"/>
+            <a:ext cx="6522415" cy="4663440"/>
+          </a:xfrm>
+          <a:prstGeom prst="rect">
+            <a:avLst/>
+          </a:prstGeom>
+          <a:noFill/>
+          <a:ln/>
+        </p:spPr>
+        <p:txBody>
+          <a:bodyPr wrap="square" lIns="0" tIns="0" rIns="0" bIns="0" rtlCol="0" anchor="t"/>
+          <a:lstStyle/>
+          <a:p>
+            <a:pPr algn="l" indent="0" marL="0">
+              <a:spcAft>
+                <a:spcPts val="800"/>
+              </a:spcAft>
+              <a:buNone/>
+            </a:pPr>
+            <a:r>
+              <a:rPr lang="en-US" sz="4000" b="1" dirty="0">
+                <a:solidFill>
+                  <a:srgbClr val="111111"/>
+                </a:solidFill>
+                <a:latin typeface="Times New Roman" pitchFamily="34" charset="0"/>
+                <a:ea typeface="Times New Roman" pitchFamily="34" charset="-122"/>
+                <a:cs typeface="Times New Roman" pitchFamily="34" charset="-120"/>
+              </a:rPr>
+              <a:t>Accidents and poor quality: </a:t>
+            </a:r>
+            <a:pPr algn="l" indent="0" marL="0">
+              <a:spcAft>
+                <a:spcPts val="800"/>
+              </a:spcAft>
+              <a:buNone/>
+            </a:pPr>
+            <a:r>
+              <a:rPr lang="en-US" sz="4000" dirty="0">
+                <a:solidFill>
+                  <a:srgbClr val="111111"/>
+                </a:solidFill>
+                <a:latin typeface="Times New Roman" pitchFamily="34" charset="0"/>
+                <a:ea typeface="Times New Roman" pitchFamily="34" charset="-122"/>
+                <a:cs typeface="Times New Roman" pitchFamily="34" charset="-120"/>
+              </a:rPr>
+              <a:t>Moto-taxi accidents are frequent, and some goods and services are of poor quality.</a:t>
+            </a:r>
+            <a:endParaRPr lang="en-US" sz="4000" dirty="0"/>
+          </a:p>
+        </p:txBody>
+      </p:sp>
+      <p:sp>
+        <p:nvSpPr>
+          <p:cNvPr id="25" name="Slide Number Placeholder 0"/>
+          <p:cNvSpPr>
+            <a:spLocks noGrp="1"/>
+          </p:cNvSpPr>
+          <p:nvPr>
+            <p:ph type="sldNum" sz="quarter" idx="4294967295"/>
+          </p:nvPr>
+        </p:nvSpPr>
+        <p:spPr>
+          <a:xfrm>
+            <a:off x="27432" y="91440"/>
+            <a:ext cx="585216" cy="475488"/>
+          </a:xfrm>
+          <a:prstGeom prst="rect">
+            <a:avLst/>
+          </a:prstGeom>
+          <a:extLst>
+            <a:ext uri="{C572A759-6A51-4108-AA02-DFA0A04FC94B}">
+              <ma14:wrappingTextBoxFlag xmlns:ma14="http://schemas.microsoft.com/office/mac/drawingml/2011/main" val="0"/>
+            </a:ext>
+          </a:extLst>
+        </p:spPr>
+        <p:txBody>
+          <a:bodyPr/>
+          <a:lstStyle>
+            <a:lvl1pPr>
+              <a:defRPr sz="2000">
+                <a:solidFill>
+                  <a:srgbClr val="FFFFFF"/>
+                </a:solidFill>
+                <a:latin typeface="Calibri"/>
+                <a:ea typeface="Calibri"/>
+                <a:cs typeface="Calibri"/>
+              </a:defRPr>
+            </a:lvl1pPr>
+          </a:lstStyle>
+          <a:p>
+            <a:pPr algn="ctr"/>
+            <a:fld id="{F7021451-1387-4CA6-816F-3879F97B5CBC}" type="slidenum">
+              <a:rPr b="1" lang="en-US"/>
+              <a:t>48</a:t>
+            </a:fld>
+            <a:endParaRPr lang="en-US"/>
+          </a:p>
+        </p:txBody>
+      </p:sp>
+    </p:spTree>
+  </p:cSld>
+  <p:clrMapOvr>
+    <a:masterClrMapping/>
+  </p:clrMapOvr>
+</p:sld>
+</file>
+
+<file path=ppt/slides/slide49.xml><?xml version="1.0" encoding="utf-8"?>
+<p:sld xmlns:a="http://schemas.openxmlformats.org/drawingml/2006/main" xmlns:r="http://schemas.openxmlformats.org/officeDocument/2006/relationships" xmlns:p="http://schemas.openxmlformats.org/presentationml/2006/main">
+  <p:cSld name="Slide 49">
+    <p:spTree>
+      <p:nvGrpSpPr>
+        <p:cNvPr id="1" name=""/>
+        <p:cNvGrpSpPr/>
+        <p:nvPr/>
+      </p:nvGrpSpPr>
+      <p:grpSpPr>
+        <a:xfrm>
+          <a:off x="0" y="0"/>
+          <a:ext cx="0" cy="0"/>
+          <a:chOff x="0" y="0"/>
+          <a:chExt cx="0" cy="0"/>
+        </a:xfrm>
+      </p:grpSpPr>
+      <p:sp>
+        <p:nvSpPr>
+          <p:cNvPr id="2" name="Text 0"/>
+          <p:cNvSpPr/>
+          <p:nvPr/>
+        </p:nvSpPr>
+        <p:spPr>
+          <a:xfrm>
+            <a:off x="457200" y="713232"/>
+            <a:ext cx="11368735" cy="274320"/>
+          </a:xfrm>
+          <a:prstGeom prst="rect">
+            <a:avLst/>
+          </a:prstGeom>
+          <a:noFill/>
+          <a:ln/>
+        </p:spPr>
+        <p:txBody>
+          <a:bodyPr wrap="square" lIns="0" tIns="0" rIns="0" bIns="0" rtlCol="0" anchor="ctr"/>
+          <a:lstStyle/>
+          <a:p>
+            <a:pPr algn="r" indent="0" marL="0">
+              <a:buNone/>
+            </a:pPr>
+            <a:r>
+              <a:rPr lang="en-US" sz="1400" b="1" dirty="0">
+                <a:solidFill>
+                  <a:srgbClr val="1C3F6E"/>
+                </a:solidFill>
+                <a:latin typeface="Calibri" pitchFamily="34" charset="0"/>
+                <a:ea typeface="Calibri" pitchFamily="34" charset="-122"/>
+                <a:cs typeface="Calibri" pitchFamily="34" charset="-120"/>
+              </a:rPr>
+              <a:t>FORMATIVE EVALUATION</a:t>
+            </a:r>
+            <a:endParaRPr lang="en-US" sz="1400" dirty="0"/>
+          </a:p>
+        </p:txBody>
+      </p:sp>
+      <p:pic>
+        <p:nvPicPr>
+          <p:cNvPr id="3" name="Image 0" descr="/home/claude/f4/img/minesec_sheet.png">    </p:cNvPr>
+          <p:cNvPicPr>
+            <a:picLocks noChangeAspect="1"/>
+          </p:cNvPicPr>
+          <p:nvPr/>
+        </p:nvPicPr>
+        <p:blipFill>
+          <a:blip r:embed="rId1"/>
+          <a:stretch>
+            <a:fillRect/>
+          </a:stretch>
+        </p:blipFill>
+        <p:spPr>
+          <a:xfrm>
+            <a:off x="0" y="658368"/>
+            <a:ext cx="5120640" cy="5833872"/>
+          </a:xfrm>
+          <a:prstGeom prst="rect">
+            <a:avLst/>
+          </a:prstGeom>
+        </p:spPr>
+      </p:pic>
+      <p:sp>
+        <p:nvSpPr>
+          <p:cNvPr id="4" name="Text 1"/>
+          <p:cNvSpPr/>
+          <p:nvPr/>
+        </p:nvSpPr>
+        <p:spPr>
+          <a:xfrm>
+            <a:off x="5349240" y="1005840"/>
+            <a:ext cx="6522415" cy="731520"/>
+          </a:xfrm>
+          <a:prstGeom prst="rect">
+            <a:avLst/>
+          </a:prstGeom>
+          <a:noFill/>
+          <a:ln/>
+        </p:spPr>
+        <p:txBody>
+          <a:bodyPr wrap="square" lIns="0" tIns="0" rIns="0" bIns="0" rtlCol="0" anchor="ctr">
+            <a:normAutofit/>
+          </a:bodyPr>
+          <a:lstStyle/>
+          <a:p>
+            <a:pPr algn="ctr" indent="0" marL="0">
+              <a:buNone/>
+            </a:pPr>
+            <a:r>
+              <a:rPr lang="en-US" sz="3600" b="1" dirty="0">
+                <a:solidFill>
+                  <a:srgbClr val="990011"/>
+                </a:solidFill>
+                <a:latin typeface="Times New Roman" pitchFamily="34" charset="0"/>
+                <a:ea typeface="Times New Roman" pitchFamily="34" charset="-122"/>
+                <a:cs typeface="Times New Roman" pitchFamily="34" charset="-120"/>
+              </a:rPr>
+              <a:t>Evaluation 1</a:t>
+            </a:r>
+            <a:endParaRPr lang="en-US" sz="3600" dirty="0"/>
+          </a:p>
+        </p:txBody>
+      </p:sp>
+      <p:sp>
+        <p:nvSpPr>
+          <p:cNvPr id="5" name="Text 2"/>
+          <p:cNvSpPr/>
+          <p:nvPr/>
+        </p:nvSpPr>
+        <p:spPr>
+          <a:xfrm>
+            <a:off x="5349240" y="1783080"/>
+            <a:ext cx="6522415" cy="4663440"/>
+          </a:xfrm>
+          <a:prstGeom prst="rect">
+            <a:avLst/>
+          </a:prstGeom>
+          <a:noFill/>
+          <a:ln/>
+        </p:spPr>
+        <p:txBody>
+          <a:bodyPr wrap="square" lIns="0" tIns="0" rIns="0" bIns="0" rtlCol="0" anchor="t"/>
+          <a:lstStyle/>
+          <a:p>
+            <a:pPr algn="l" indent="0" marL="0">
+              <a:spcAft>
+                <a:spcPts val="800"/>
+              </a:spcAft>
+              <a:buNone/>
+            </a:pPr>
+            <a:r>
+              <a:rPr lang="en-US" sz="4000" dirty="0">
+                <a:solidFill>
+                  <a:srgbClr val="111111"/>
+                </a:solidFill>
+                <a:latin typeface="Times New Roman" pitchFamily="34" charset="0"/>
+                <a:ea typeface="Times New Roman" pitchFamily="34" charset="-122"/>
+                <a:cs typeface="Times New Roman" pitchFamily="34" charset="-120"/>
+              </a:rPr>
+              <a:t>Give two characteristics of informal activities.</a:t>
+            </a:r>
+            <a:endParaRPr lang="en-US" sz="4000" dirty="0"/>
+          </a:p>
+        </p:txBody>
+      </p:sp>
+      <p:sp>
+        <p:nvSpPr>
+          <p:cNvPr id="25" name="Slide Number Placeholder 0"/>
+          <p:cNvSpPr>
+            <a:spLocks noGrp="1"/>
+          </p:cNvSpPr>
+          <p:nvPr>
+            <p:ph type="sldNum" sz="quarter" idx="4294967295"/>
+          </p:nvPr>
+        </p:nvSpPr>
+        <p:spPr>
+          <a:xfrm>
+            <a:off x="27432" y="91440"/>
+            <a:ext cx="585216" cy="475488"/>
+          </a:xfrm>
+          <a:prstGeom prst="rect">
+            <a:avLst/>
+          </a:prstGeom>
+          <a:extLst>
+            <a:ext uri="{C572A759-6A51-4108-AA02-DFA0A04FC94B}">
+              <ma14:wrappingTextBoxFlag xmlns:ma14="http://schemas.microsoft.com/office/mac/drawingml/2011/main" val="0"/>
+            </a:ext>
+          </a:extLst>
+        </p:spPr>
+        <p:txBody>
+          <a:bodyPr/>
+          <a:lstStyle>
+            <a:lvl1pPr>
+              <a:defRPr sz="2000">
+                <a:solidFill>
+                  <a:srgbClr val="FFFFFF"/>
+                </a:solidFill>
+                <a:latin typeface="Calibri"/>
+                <a:ea typeface="Calibri"/>
+                <a:cs typeface="Calibri"/>
+              </a:defRPr>
+            </a:lvl1pPr>
+          </a:lstStyle>
+          <a:p>
+            <a:pPr algn="ctr"/>
+            <a:fld id="{F7021451-1387-4CA6-816F-3879F97B5CBC}" type="slidenum">
+              <a:rPr b="1" lang="en-US"/>
+              <a:t>49</a:t>
+            </a:fld>
+            <a:endParaRPr lang="en-US"/>
+          </a:p>
+        </p:txBody>
+      </p:sp>
+    </p:spTree>
+  </p:cSld>
+  <p:clrMapOvr>
+    <a:masterClrMapping/>
+  </p:clrMapOvr>
+</p:sld>
+</file>
+
+<file path=ppt/slides/slide5.xml><?xml version="1.0" encoding="utf-8"?>
+<p:sld xmlns:a="http://schemas.openxmlformats.org/drawingml/2006/main" xmlns:r="http://schemas.openxmlformats.org/officeDocument/2006/relationships" xmlns:p="http://schemas.openxmlformats.org/presentationml/2006/main">
+  <p:cSld name="Slide 5">
+    <p:spTree>
+      <p:nvGrpSpPr>
+        <p:cNvPr id="1" name=""/>
+        <p:cNvGrpSpPr/>
+        <p:nvPr/>
+      </p:nvGrpSpPr>
+      <p:grpSpPr>
+        <a:xfrm>
+          <a:off x="0" y="0"/>
+          <a:ext cx="0" cy="0"/>
+          <a:chOff x="0" y="0"/>
+          <a:chExt cx="0" cy="0"/>
+        </a:xfrm>
+      </p:grpSpPr>
+      <p:sp>
+        <p:nvSpPr>
+          <p:cNvPr id="2" name="Text 0"/>
+          <p:cNvSpPr/>
+          <p:nvPr/>
+        </p:nvSpPr>
+        <p:spPr>
+          <a:xfrm>
+            <a:off x="457200" y="713232"/>
+            <a:ext cx="11368735" cy="274320"/>
+          </a:xfrm>
+          <a:prstGeom prst="rect">
+            <a:avLst/>
+          </a:prstGeom>
+          <a:noFill/>
+          <a:ln/>
+        </p:spPr>
+        <p:txBody>
+          <a:bodyPr wrap="square" lIns="0" tIns="0" rIns="0" bIns="0" rtlCol="0" anchor="ctr"/>
+          <a:lstStyle/>
+          <a:p>
+            <a:pPr algn="r" indent="0" marL="0">
+              <a:buNone/>
+            </a:pPr>
+            <a:r>
+              <a:rPr lang="en-US" sz="1400" b="1" dirty="0">
+                <a:solidFill>
+                  <a:srgbClr val="1C3F6E"/>
+                </a:solidFill>
+                <a:latin typeface="Calibri" pitchFamily="34" charset="0"/>
+                <a:ea typeface="Calibri" pitchFamily="34" charset="-122"/>
+                <a:cs typeface="Calibri" pitchFamily="34" charset="-120"/>
+              </a:rPr>
+              <a:t>HOMEWORK CORRECTION</a:t>
+            </a:r>
+            <a:endParaRPr lang="en-US" sz="1400" dirty="0"/>
+          </a:p>
+        </p:txBody>
+      </p:sp>
+      <p:pic>
+        <p:nvPicPr>
+          <p:cNvPr id="3" name="Image 0" descr="/home/claude/f4/img/minesec_sheet.png">    </p:cNvPr>
+          <p:cNvPicPr>
+            <a:picLocks noChangeAspect="1"/>
+          </p:cNvPicPr>
+          <p:nvPr/>
+        </p:nvPicPr>
+        <p:blipFill>
+          <a:blip r:embed="rId1"/>
+          <a:stretch>
+            <a:fillRect/>
+          </a:stretch>
+        </p:blipFill>
+        <p:spPr>
+          <a:xfrm>
+            <a:off x="0" y="658368"/>
+            <a:ext cx="5120640" cy="5833872"/>
+          </a:xfrm>
+          <a:prstGeom prst="rect">
+            <a:avLst/>
+          </a:prstGeom>
+        </p:spPr>
+      </p:pic>
+      <p:sp>
+        <p:nvSpPr>
+          <p:cNvPr id="4" name="Text 1"/>
+          <p:cNvSpPr/>
+          <p:nvPr/>
+        </p:nvSpPr>
+        <p:spPr>
+          <a:xfrm>
+            <a:off x="5349240" y="1005840"/>
+            <a:ext cx="6522415" cy="731520"/>
+          </a:xfrm>
+          <a:prstGeom prst="rect">
+            <a:avLst/>
+          </a:prstGeom>
+          <a:noFill/>
+          <a:ln/>
+        </p:spPr>
+        <p:txBody>
+          <a:bodyPr wrap="square" lIns="0" tIns="0" rIns="0" bIns="0" rtlCol="0" anchor="ctr">
+            <a:normAutofit/>
+          </a:bodyPr>
+          <a:lstStyle/>
+          <a:p>
+            <a:pPr algn="ctr" indent="0" marL="0">
+              <a:buNone/>
+            </a:pPr>
+            <a:r>
+              <a:rPr lang="en-US" sz="3600" b="1" dirty="0">
+                <a:solidFill>
+                  <a:srgbClr val="990011"/>
+                </a:solidFill>
+                <a:latin typeface="Times New Roman" pitchFamily="34" charset="0"/>
+                <a:ea typeface="Times New Roman" pitchFamily="34" charset="-122"/>
+                <a:cs typeface="Times New Roman" pitchFamily="34" charset="-120"/>
+              </a:rPr>
+              <a:t>Correction: Possible Answer</a:t>
+            </a:r>
+            <a:endParaRPr lang="en-US" sz="3600" dirty="0"/>
+          </a:p>
+        </p:txBody>
+      </p:sp>
+      <p:sp>
+        <p:nvSpPr>
+          <p:cNvPr id="5" name="Text 2"/>
+          <p:cNvSpPr/>
+          <p:nvPr/>
+        </p:nvSpPr>
+        <p:spPr>
+          <a:xfrm>
+            <a:off x="5349240" y="1783080"/>
+            <a:ext cx="6522415" cy="4663440"/>
+          </a:xfrm>
+          <a:prstGeom prst="rect">
+            <a:avLst/>
+          </a:prstGeom>
+          <a:noFill/>
+          <a:ln/>
+        </p:spPr>
+        <p:txBody>
+          <a:bodyPr wrap="square" lIns="0" tIns="0" rIns="0" bIns="0" rtlCol="0" anchor="t"/>
+          <a:lstStyle/>
+          <a:p>
+            <a:pPr algn="l" indent="0" marL="0">
+              <a:spcAft>
+                <a:spcPts val="800"/>
+              </a:spcAft>
+              <a:buNone/>
+            </a:pPr>
+            <a:r>
+              <a:rPr lang="en-US" sz="4000" dirty="0">
+                <a:solidFill>
+                  <a:srgbClr val="111111"/>
+                </a:solidFill>
+                <a:latin typeface="Times New Roman" pitchFamily="34" charset="0"/>
+                <a:ea typeface="Times New Roman" pitchFamily="34" charset="-122"/>
+                <a:cs typeface="Times New Roman" pitchFamily="34" charset="-120"/>
+              </a:rPr>
+              <a:t>Moto-taxi driving, selling roasted maize, selling fuel in bottles, shoe repairing, hairdressing in the street.</a:t>
+            </a:r>
+            <a:endParaRPr lang="en-US" sz="4000" dirty="0"/>
+          </a:p>
+        </p:txBody>
+      </p:sp>
+      <p:sp>
+        <p:nvSpPr>
+          <p:cNvPr id="25" name="Slide Number Placeholder 0"/>
+          <p:cNvSpPr>
+            <a:spLocks noGrp="1"/>
+          </p:cNvSpPr>
+          <p:nvPr>
+            <p:ph type="sldNum" sz="quarter" idx="4294967295"/>
+          </p:nvPr>
+        </p:nvSpPr>
+        <p:spPr>
+          <a:xfrm>
+            <a:off x="27432" y="91440"/>
+            <a:ext cx="585216" cy="475488"/>
+          </a:xfrm>
+          <a:prstGeom prst="rect">
+            <a:avLst/>
+          </a:prstGeom>
+          <a:extLst>
+            <a:ext uri="{C572A759-6A51-4108-AA02-DFA0A04FC94B}">
+              <ma14:wrappingTextBoxFlag xmlns:ma14="http://schemas.microsoft.com/office/mac/drawingml/2011/main" val="0"/>
+            </a:ext>
+          </a:extLst>
+        </p:spPr>
+        <p:txBody>
+          <a:bodyPr/>
+          <a:lstStyle>
+            <a:lvl1pPr>
+              <a:defRPr sz="2000">
+                <a:solidFill>
+                  <a:srgbClr val="FFFFFF"/>
+                </a:solidFill>
+                <a:latin typeface="Calibri"/>
+                <a:ea typeface="Calibri"/>
+                <a:cs typeface="Calibri"/>
+              </a:defRPr>
+            </a:lvl1pPr>
+          </a:lstStyle>
+          <a:p>
+            <a:pPr algn="ctr"/>
+            <a:fld id="{F7021451-1387-4CA6-816F-3879F97B5CBC}" type="slidenum">
+              <a:rPr b="1" lang="en-US"/>
+              <a:t>5</a:t>
+            </a:fld>
+            <a:endParaRPr lang="en-US"/>
+          </a:p>
+        </p:txBody>
+      </p:sp>
+    </p:spTree>
+  </p:cSld>
+  <p:clrMapOvr>
+    <a:masterClrMapping/>
+  </p:clrMapOvr>
+</p:sld>
+</file>
+
+<file path=ppt/slides/slide50.xml><?xml version="1.0" encoding="utf-8"?>
+<p:sld xmlns:a="http://schemas.openxmlformats.org/drawingml/2006/main" xmlns:r="http://schemas.openxmlformats.org/officeDocument/2006/relationships" xmlns:p="http://schemas.openxmlformats.org/presentationml/2006/main">
+  <p:cSld name="Slide 50">
+    <p:spTree>
+      <p:nvGrpSpPr>
+        <p:cNvPr id="1" name=""/>
+        <p:cNvGrpSpPr/>
+        <p:nvPr/>
+      </p:nvGrpSpPr>
+      <p:grpSpPr>
+        <a:xfrm>
+          <a:off x="0" y="0"/>
+          <a:ext cx="0" cy="0"/>
+          <a:chOff x="0" y="0"/>
+          <a:chExt cx="0" cy="0"/>
+        </a:xfrm>
+      </p:grpSpPr>
+      <p:sp>
+        <p:nvSpPr>
+          <p:cNvPr id="2" name="Text 0"/>
+          <p:cNvSpPr/>
+          <p:nvPr/>
+        </p:nvSpPr>
+        <p:spPr>
+          <a:xfrm>
+            <a:off x="457200" y="713232"/>
+            <a:ext cx="11368735" cy="274320"/>
+          </a:xfrm>
+          <a:prstGeom prst="rect">
+            <a:avLst/>
+          </a:prstGeom>
+          <a:noFill/>
+          <a:ln/>
+        </p:spPr>
+        <p:txBody>
+          <a:bodyPr wrap="square" lIns="0" tIns="0" rIns="0" bIns="0" rtlCol="0" anchor="ctr"/>
+          <a:lstStyle/>
+          <a:p>
+            <a:pPr algn="r" indent="0" marL="0">
+              <a:buNone/>
+            </a:pPr>
+            <a:r>
+              <a:rPr lang="en-US" sz="1400" b="1" dirty="0">
+                <a:solidFill>
+                  <a:srgbClr val="1C3F6E"/>
+                </a:solidFill>
+                <a:latin typeface="Calibri" pitchFamily="34" charset="0"/>
+                <a:ea typeface="Calibri" pitchFamily="34" charset="-122"/>
+                <a:cs typeface="Calibri" pitchFamily="34" charset="-120"/>
+              </a:rPr>
+              <a:t>FORMATIVE EVALUATION</a:t>
+            </a:r>
+            <a:endParaRPr lang="en-US" sz="1400" dirty="0"/>
+          </a:p>
+        </p:txBody>
+      </p:sp>
+      <p:pic>
+        <p:nvPicPr>
+          <p:cNvPr id="3" name="Image 0" descr="/home/claude/f4/img/minesec_sheet.png">    </p:cNvPr>
+          <p:cNvPicPr>
+            <a:picLocks noChangeAspect="1"/>
+          </p:cNvPicPr>
+          <p:nvPr/>
+        </p:nvPicPr>
+        <p:blipFill>
+          <a:blip r:embed="rId1"/>
+          <a:stretch>
+            <a:fillRect/>
+          </a:stretch>
+        </p:blipFill>
+        <p:spPr>
+          <a:xfrm>
+            <a:off x="0" y="658368"/>
+            <a:ext cx="5120640" cy="5833872"/>
+          </a:xfrm>
+          <a:prstGeom prst="rect">
+            <a:avLst/>
+          </a:prstGeom>
+        </p:spPr>
+      </p:pic>
+      <p:sp>
+        <p:nvSpPr>
+          <p:cNvPr id="4" name="Text 1"/>
+          <p:cNvSpPr/>
+          <p:nvPr/>
+        </p:nvSpPr>
+        <p:spPr>
+          <a:xfrm>
+            <a:off x="5349240" y="1005840"/>
+            <a:ext cx="6522415" cy="731520"/>
+          </a:xfrm>
+          <a:prstGeom prst="rect">
+            <a:avLst/>
+          </a:prstGeom>
+          <a:noFill/>
+          <a:ln/>
+        </p:spPr>
+        <p:txBody>
+          <a:bodyPr wrap="square" lIns="0" tIns="0" rIns="0" bIns="0" rtlCol="0" anchor="ctr">
+            <a:normAutofit/>
+          </a:bodyPr>
+          <a:lstStyle/>
+          <a:p>
+            <a:pPr algn="ctr" indent="0" marL="0">
+              <a:buNone/>
+            </a:pPr>
+            <a:r>
+              <a:rPr lang="en-US" sz="3600" b="1" dirty="0">
+                <a:solidFill>
+                  <a:srgbClr val="990011"/>
+                </a:solidFill>
+                <a:latin typeface="Times New Roman" pitchFamily="34" charset="0"/>
+                <a:ea typeface="Times New Roman" pitchFamily="34" charset="-122"/>
+                <a:cs typeface="Times New Roman" pitchFamily="34" charset="-120"/>
+              </a:rPr>
+              <a:t>Expected Answer</a:t>
+            </a:r>
+            <a:endParaRPr lang="en-US" sz="3600" dirty="0"/>
+          </a:p>
+        </p:txBody>
+      </p:sp>
+      <p:sp>
+        <p:nvSpPr>
+          <p:cNvPr id="5" name="Text 2"/>
+          <p:cNvSpPr/>
+          <p:nvPr/>
+        </p:nvSpPr>
+        <p:spPr>
+          <a:xfrm>
+            <a:off x="5349240" y="1783080"/>
+            <a:ext cx="6522415" cy="4663440"/>
+          </a:xfrm>
+          <a:prstGeom prst="rect">
+            <a:avLst/>
+          </a:prstGeom>
+          <a:noFill/>
+          <a:ln/>
+        </p:spPr>
+        <p:txBody>
+          <a:bodyPr wrap="square" lIns="0" tIns="0" rIns="0" bIns="0" rtlCol="0" anchor="t"/>
+          <a:lstStyle/>
+          <a:p>
+            <a:pPr algn="l" indent="0" marL="0">
+              <a:spcAft>
+                <a:spcPts val="800"/>
+              </a:spcAft>
+              <a:buNone/>
+            </a:pPr>
+            <a:r>
+              <a:rPr lang="en-US" sz="4000" dirty="0">
+                <a:solidFill>
+                  <a:srgbClr val="111111"/>
+                </a:solidFill>
+                <a:latin typeface="Times New Roman" pitchFamily="34" charset="0"/>
+                <a:ea typeface="Times New Roman" pitchFamily="34" charset="-122"/>
+                <a:cs typeface="Times New Roman" pitchFamily="34" charset="-120"/>
+              </a:rPr>
+              <a:t>Little capital and no registration.</a:t>
+            </a:r>
+            <a:endParaRPr lang="en-US" sz="4000" dirty="0"/>
+          </a:p>
+        </p:txBody>
+      </p:sp>
+      <p:sp>
+        <p:nvSpPr>
+          <p:cNvPr id="25" name="Slide Number Placeholder 0"/>
+          <p:cNvSpPr>
+            <a:spLocks noGrp="1"/>
+          </p:cNvSpPr>
+          <p:nvPr>
+            <p:ph type="sldNum" sz="quarter" idx="4294967295"/>
+          </p:nvPr>
+        </p:nvSpPr>
+        <p:spPr>
+          <a:xfrm>
+            <a:off x="27432" y="91440"/>
+            <a:ext cx="585216" cy="475488"/>
+          </a:xfrm>
+          <a:prstGeom prst="rect">
+            <a:avLst/>
+          </a:prstGeom>
+          <a:extLst>
+            <a:ext uri="{C572A759-6A51-4108-AA02-DFA0A04FC94B}">
+              <ma14:wrappingTextBoxFlag xmlns:ma14="http://schemas.microsoft.com/office/mac/drawingml/2011/main" val="0"/>
+            </a:ext>
+          </a:extLst>
+        </p:spPr>
+        <p:txBody>
+          <a:bodyPr/>
+          <a:lstStyle>
+            <a:lvl1pPr>
+              <a:defRPr sz="2000">
+                <a:solidFill>
+                  <a:srgbClr val="FFFFFF"/>
+                </a:solidFill>
+                <a:latin typeface="Calibri"/>
+                <a:ea typeface="Calibri"/>
+                <a:cs typeface="Calibri"/>
+              </a:defRPr>
+            </a:lvl1pPr>
+          </a:lstStyle>
+          <a:p>
+            <a:pPr algn="ctr"/>
+            <a:fld id="{F7021451-1387-4CA6-816F-3879F97B5CBC}" type="slidenum">
+              <a:rPr b="1" lang="en-US"/>
+              <a:t>50</a:t>
+            </a:fld>
+            <a:endParaRPr lang="en-US"/>
+          </a:p>
+        </p:txBody>
+      </p:sp>
+    </p:spTree>
+  </p:cSld>
+  <p:clrMapOvr>
+    <a:masterClrMapping/>
+  </p:clrMapOvr>
+</p:sld>
+</file>
+
+<file path=ppt/slides/slide51.xml><?xml version="1.0" encoding="utf-8"?>
+<p:sld xmlns:a="http://schemas.openxmlformats.org/drawingml/2006/main" xmlns:r="http://schemas.openxmlformats.org/officeDocument/2006/relationships" xmlns:p="http://schemas.openxmlformats.org/presentationml/2006/main">
+  <p:cSld name="Slide 51">
+    <p:spTree>
+      <p:nvGrpSpPr>
+        <p:cNvPr id="1" name=""/>
+        <p:cNvGrpSpPr/>
+        <p:nvPr/>
+      </p:nvGrpSpPr>
+      <p:grpSpPr>
+        <a:xfrm>
+          <a:off x="0" y="0"/>
+          <a:ext cx="0" cy="0"/>
+          <a:chOff x="0" y="0"/>
+          <a:chExt cx="0" cy="0"/>
+        </a:xfrm>
+      </p:grpSpPr>
+      <p:sp>
+        <p:nvSpPr>
+          <p:cNvPr id="2" name="Text 0"/>
+          <p:cNvSpPr/>
+          <p:nvPr/>
+        </p:nvSpPr>
+        <p:spPr>
+          <a:xfrm>
+            <a:off x="457200" y="713232"/>
+            <a:ext cx="11368735" cy="274320"/>
+          </a:xfrm>
+          <a:prstGeom prst="rect">
+            <a:avLst/>
+          </a:prstGeom>
+          <a:noFill/>
+          <a:ln/>
+        </p:spPr>
+        <p:txBody>
+          <a:bodyPr wrap="square" lIns="0" tIns="0" rIns="0" bIns="0" rtlCol="0" anchor="ctr"/>
+          <a:lstStyle/>
+          <a:p>
+            <a:pPr algn="r" indent="0" marL="0">
+              <a:buNone/>
+            </a:pPr>
+            <a:r>
+              <a:rPr lang="en-US" sz="1400" b="1" dirty="0">
+                <a:solidFill>
+                  <a:srgbClr val="1C3F6E"/>
+                </a:solidFill>
+                <a:latin typeface="Calibri" pitchFamily="34" charset="0"/>
+                <a:ea typeface="Calibri" pitchFamily="34" charset="-122"/>
+                <a:cs typeface="Calibri" pitchFamily="34" charset="-120"/>
+              </a:rPr>
+              <a:t>FORMATIVE EVALUATION</a:t>
+            </a:r>
+            <a:endParaRPr lang="en-US" sz="1400" dirty="0"/>
+          </a:p>
+        </p:txBody>
+      </p:sp>
+      <p:pic>
+        <p:nvPicPr>
+          <p:cNvPr id="3" name="Image 0" descr="/home/claude/f4/img/minesec_sheet.png">    </p:cNvPr>
+          <p:cNvPicPr>
+            <a:picLocks noChangeAspect="1"/>
+          </p:cNvPicPr>
+          <p:nvPr/>
+        </p:nvPicPr>
+        <p:blipFill>
+          <a:blip r:embed="rId1"/>
+          <a:stretch>
+            <a:fillRect/>
+          </a:stretch>
+        </p:blipFill>
+        <p:spPr>
+          <a:xfrm>
+            <a:off x="0" y="658368"/>
+            <a:ext cx="5120640" cy="5833872"/>
+          </a:xfrm>
+          <a:prstGeom prst="rect">
+            <a:avLst/>
+          </a:prstGeom>
+        </p:spPr>
+      </p:pic>
+      <p:sp>
+        <p:nvSpPr>
+          <p:cNvPr id="4" name="Text 1"/>
+          <p:cNvSpPr/>
+          <p:nvPr/>
+        </p:nvSpPr>
+        <p:spPr>
+          <a:xfrm>
+            <a:off x="5349240" y="1005840"/>
+            <a:ext cx="6522415" cy="731520"/>
+          </a:xfrm>
+          <a:prstGeom prst="rect">
+            <a:avLst/>
+          </a:prstGeom>
+          <a:noFill/>
+          <a:ln/>
+        </p:spPr>
+        <p:txBody>
+          <a:bodyPr wrap="square" lIns="0" tIns="0" rIns="0" bIns="0" rtlCol="0" anchor="ctr">
+            <a:normAutofit/>
+          </a:bodyPr>
+          <a:lstStyle/>
+          <a:p>
+            <a:pPr algn="ctr" indent="0" marL="0">
+              <a:buNone/>
+            </a:pPr>
+            <a:r>
+              <a:rPr lang="en-US" sz="3600" b="1" dirty="0">
+                <a:solidFill>
+                  <a:srgbClr val="990011"/>
+                </a:solidFill>
+                <a:latin typeface="Times New Roman" pitchFamily="34" charset="0"/>
+                <a:ea typeface="Times New Roman" pitchFamily="34" charset="-122"/>
+                <a:cs typeface="Times New Roman" pitchFamily="34" charset="-120"/>
+              </a:rPr>
+              <a:t>Evaluation 2</a:t>
+            </a:r>
+            <a:endParaRPr lang="en-US" sz="3600" dirty="0"/>
+          </a:p>
+        </p:txBody>
+      </p:sp>
+      <p:sp>
+        <p:nvSpPr>
+          <p:cNvPr id="5" name="Text 2"/>
+          <p:cNvSpPr/>
+          <p:nvPr/>
+        </p:nvSpPr>
+        <p:spPr>
+          <a:xfrm>
+            <a:off x="5349240" y="1783080"/>
+            <a:ext cx="6522415" cy="4663440"/>
+          </a:xfrm>
+          <a:prstGeom prst="rect">
+            <a:avLst/>
+          </a:prstGeom>
+          <a:noFill/>
+          <a:ln/>
+        </p:spPr>
+        <p:txBody>
+          <a:bodyPr wrap="square" lIns="0" tIns="0" rIns="0" bIns="0" rtlCol="0" anchor="t"/>
+          <a:lstStyle/>
+          <a:p>
+            <a:pPr algn="l" indent="0" marL="0">
+              <a:spcAft>
+                <a:spcPts val="800"/>
+              </a:spcAft>
+              <a:buNone/>
+            </a:pPr>
+            <a:r>
+              <a:rPr lang="en-US" sz="4000" dirty="0">
+                <a:solidFill>
+                  <a:srgbClr val="111111"/>
+                </a:solidFill>
+                <a:latin typeface="Times New Roman" pitchFamily="34" charset="0"/>
+                <a:ea typeface="Times New Roman" pitchFamily="34" charset="-122"/>
+                <a:cs typeface="Times New Roman" pitchFamily="34" charset="-120"/>
+              </a:rPr>
+              <a:t>Give one importance and one limitation.</a:t>
+            </a:r>
+            <a:endParaRPr lang="en-US" sz="4000" dirty="0"/>
+          </a:p>
+        </p:txBody>
+      </p:sp>
+      <p:sp>
+        <p:nvSpPr>
+          <p:cNvPr id="25" name="Slide Number Placeholder 0"/>
+          <p:cNvSpPr>
+            <a:spLocks noGrp="1"/>
+          </p:cNvSpPr>
+          <p:nvPr>
+            <p:ph type="sldNum" sz="quarter" idx="4294967295"/>
+          </p:nvPr>
+        </p:nvSpPr>
+        <p:spPr>
+          <a:xfrm>
+            <a:off x="27432" y="91440"/>
+            <a:ext cx="585216" cy="475488"/>
+          </a:xfrm>
+          <a:prstGeom prst="rect">
+            <a:avLst/>
+          </a:prstGeom>
+          <a:extLst>
+            <a:ext uri="{C572A759-6A51-4108-AA02-DFA0A04FC94B}">
+              <ma14:wrappingTextBoxFlag xmlns:ma14="http://schemas.microsoft.com/office/mac/drawingml/2011/main" val="0"/>
+            </a:ext>
+          </a:extLst>
+        </p:spPr>
+        <p:txBody>
+          <a:bodyPr/>
+          <a:lstStyle>
+            <a:lvl1pPr>
+              <a:defRPr sz="2000">
+                <a:solidFill>
+                  <a:srgbClr val="FFFFFF"/>
+                </a:solidFill>
+                <a:latin typeface="Calibri"/>
+                <a:ea typeface="Calibri"/>
+                <a:cs typeface="Calibri"/>
+              </a:defRPr>
+            </a:lvl1pPr>
+          </a:lstStyle>
+          <a:p>
+            <a:pPr algn="ctr"/>
+            <a:fld id="{F7021451-1387-4CA6-816F-3879F97B5CBC}" type="slidenum">
+              <a:rPr b="1" lang="en-US"/>
+              <a:t>51</a:t>
+            </a:fld>
+            <a:endParaRPr lang="en-US"/>
+          </a:p>
+        </p:txBody>
+      </p:sp>
+    </p:spTree>
+  </p:cSld>
+  <p:clrMapOvr>
+    <a:masterClrMapping/>
+  </p:clrMapOvr>
+</p:sld>
+</file>
+
+<file path=ppt/slides/slide52.xml><?xml version="1.0" encoding="utf-8"?>
+<p:sld xmlns:a="http://schemas.openxmlformats.org/drawingml/2006/main" xmlns:r="http://schemas.openxmlformats.org/officeDocument/2006/relationships" xmlns:p="http://schemas.openxmlformats.org/presentationml/2006/main">
+  <p:cSld name="Slide 52">
+    <p:spTree>
+      <p:nvGrpSpPr>
+        <p:cNvPr id="1" name=""/>
+        <p:cNvGrpSpPr/>
+        <p:nvPr/>
+      </p:nvGrpSpPr>
+      <p:grpSpPr>
+        <a:xfrm>
+          <a:off x="0" y="0"/>
+          <a:ext cx="0" cy="0"/>
+          <a:chOff x="0" y="0"/>
+          <a:chExt cx="0" cy="0"/>
+        </a:xfrm>
+      </p:grpSpPr>
+      <p:sp>
+        <p:nvSpPr>
+          <p:cNvPr id="2" name="Text 0"/>
+          <p:cNvSpPr/>
+          <p:nvPr/>
+        </p:nvSpPr>
+        <p:spPr>
+          <a:xfrm>
+            <a:off x="457200" y="713232"/>
+            <a:ext cx="11368735" cy="274320"/>
+          </a:xfrm>
+          <a:prstGeom prst="rect">
+            <a:avLst/>
+          </a:prstGeom>
+          <a:noFill/>
+          <a:ln/>
+        </p:spPr>
+        <p:txBody>
+          <a:bodyPr wrap="square" lIns="0" tIns="0" rIns="0" bIns="0" rtlCol="0" anchor="ctr"/>
+          <a:lstStyle/>
+          <a:p>
+            <a:pPr algn="r" indent="0" marL="0">
+              <a:buNone/>
+            </a:pPr>
+            <a:r>
+              <a:rPr lang="en-US" sz="1400" b="1" dirty="0">
+                <a:solidFill>
+                  <a:srgbClr val="1C3F6E"/>
+                </a:solidFill>
+                <a:latin typeface="Calibri" pitchFamily="34" charset="0"/>
+                <a:ea typeface="Calibri" pitchFamily="34" charset="-122"/>
+                <a:cs typeface="Calibri" pitchFamily="34" charset="-120"/>
+              </a:rPr>
+              <a:t>FORMATIVE EVALUATION</a:t>
+            </a:r>
+            <a:endParaRPr lang="en-US" sz="1400" dirty="0"/>
+          </a:p>
+        </p:txBody>
+      </p:sp>
+      <p:pic>
+        <p:nvPicPr>
+          <p:cNvPr id="3" name="Image 0" descr="/home/claude/f4/img/minesec_sheet.png">    </p:cNvPr>
+          <p:cNvPicPr>
+            <a:picLocks noChangeAspect="1"/>
+          </p:cNvPicPr>
+          <p:nvPr/>
+        </p:nvPicPr>
+        <p:blipFill>
+          <a:blip r:embed="rId1"/>
+          <a:stretch>
+            <a:fillRect/>
+          </a:stretch>
+        </p:blipFill>
+        <p:spPr>
+          <a:xfrm>
+            <a:off x="0" y="658368"/>
+            <a:ext cx="5120640" cy="5833872"/>
+          </a:xfrm>
+          <a:prstGeom prst="rect">
+            <a:avLst/>
+          </a:prstGeom>
+        </p:spPr>
+      </p:pic>
+      <p:sp>
+        <p:nvSpPr>
+          <p:cNvPr id="4" name="Text 1"/>
+          <p:cNvSpPr/>
+          <p:nvPr/>
+        </p:nvSpPr>
+        <p:spPr>
+          <a:xfrm>
+            <a:off x="5349240" y="1005840"/>
+            <a:ext cx="6522415" cy="731520"/>
+          </a:xfrm>
+          <a:prstGeom prst="rect">
+            <a:avLst/>
+          </a:prstGeom>
+          <a:noFill/>
+          <a:ln/>
+        </p:spPr>
+        <p:txBody>
+          <a:bodyPr wrap="square" lIns="0" tIns="0" rIns="0" bIns="0" rtlCol="0" anchor="ctr">
+            <a:normAutofit/>
+          </a:bodyPr>
+          <a:lstStyle/>
+          <a:p>
+            <a:pPr algn="ctr" indent="0" marL="0">
+              <a:buNone/>
+            </a:pPr>
+            <a:r>
+              <a:rPr lang="en-US" sz="3600" b="1" dirty="0">
+                <a:solidFill>
+                  <a:srgbClr val="990011"/>
+                </a:solidFill>
+                <a:latin typeface="Times New Roman" pitchFamily="34" charset="0"/>
+                <a:ea typeface="Times New Roman" pitchFamily="34" charset="-122"/>
+                <a:cs typeface="Times New Roman" pitchFamily="34" charset="-120"/>
+              </a:rPr>
+              <a:t>Expected Answer</a:t>
+            </a:r>
+            <a:endParaRPr lang="en-US" sz="3600" dirty="0"/>
+          </a:p>
+        </p:txBody>
+      </p:sp>
+      <p:sp>
+        <p:nvSpPr>
+          <p:cNvPr id="5" name="Text 2"/>
+          <p:cNvSpPr/>
+          <p:nvPr/>
+        </p:nvSpPr>
+        <p:spPr>
+          <a:xfrm>
+            <a:off x="5349240" y="1783080"/>
+            <a:ext cx="6522415" cy="4663440"/>
+          </a:xfrm>
+          <a:prstGeom prst="rect">
+            <a:avLst/>
+          </a:prstGeom>
+          <a:noFill/>
+          <a:ln/>
+        </p:spPr>
+        <p:txBody>
+          <a:bodyPr wrap="square" lIns="0" tIns="0" rIns="0" bIns="0" rtlCol="0" anchor="t"/>
+          <a:lstStyle/>
+          <a:p>
+            <a:pPr algn="l" indent="0" marL="0">
+              <a:spcAft>
+                <a:spcPts val="800"/>
+              </a:spcAft>
+              <a:buNone/>
+            </a:pPr>
+            <a:r>
+              <a:rPr lang="en-US" sz="4000" dirty="0">
+                <a:solidFill>
+                  <a:srgbClr val="111111"/>
+                </a:solidFill>
+                <a:latin typeface="Times New Roman" pitchFamily="34" charset="0"/>
+                <a:ea typeface="Times New Roman" pitchFamily="34" charset="-122"/>
+                <a:cs typeface="Times New Roman" pitchFamily="34" charset="-120"/>
+              </a:rPr>
+              <a:t>It gives jobs; workers have no pension.</a:t>
+            </a:r>
+            <a:endParaRPr lang="en-US" sz="4000" dirty="0"/>
+          </a:p>
+        </p:txBody>
+      </p:sp>
+      <p:sp>
+        <p:nvSpPr>
+          <p:cNvPr id="25" name="Slide Number Placeholder 0"/>
+          <p:cNvSpPr>
+            <a:spLocks noGrp="1"/>
+          </p:cNvSpPr>
+          <p:nvPr>
+            <p:ph type="sldNum" sz="quarter" idx="4294967295"/>
+          </p:nvPr>
+        </p:nvSpPr>
+        <p:spPr>
+          <a:xfrm>
+            <a:off x="27432" y="91440"/>
+            <a:ext cx="585216" cy="475488"/>
+          </a:xfrm>
+          <a:prstGeom prst="rect">
+            <a:avLst/>
+          </a:prstGeom>
+          <a:extLst>
+            <a:ext uri="{C572A759-6A51-4108-AA02-DFA0A04FC94B}">
+              <ma14:wrappingTextBoxFlag xmlns:ma14="http://schemas.microsoft.com/office/mac/drawingml/2011/main" val="0"/>
+            </a:ext>
+          </a:extLst>
+        </p:spPr>
+        <p:txBody>
+          <a:bodyPr/>
+          <a:lstStyle>
+            <a:lvl1pPr>
+              <a:defRPr sz="2000">
+                <a:solidFill>
+                  <a:srgbClr val="FFFFFF"/>
+                </a:solidFill>
+                <a:latin typeface="Calibri"/>
+                <a:ea typeface="Calibri"/>
+                <a:cs typeface="Calibri"/>
+              </a:defRPr>
+            </a:lvl1pPr>
+          </a:lstStyle>
+          <a:p>
+            <a:pPr algn="ctr"/>
+            <a:fld id="{F7021451-1387-4CA6-816F-3879F97B5CBC}" type="slidenum">
+              <a:rPr b="1" lang="en-US"/>
+              <a:t>52</a:t>
+            </a:fld>
+            <a:endParaRPr lang="en-US"/>
+          </a:p>
+        </p:txBody>
+      </p:sp>
+    </p:spTree>
+  </p:cSld>
+  <p:clrMapOvr>
+    <a:masterClrMapping/>
+  </p:clrMapOvr>
+</p:sld>
+</file>
+
+<file path=ppt/slides/slide53.xml><?xml version="1.0" encoding="utf-8"?>
+<p:sld xmlns:a="http://schemas.openxmlformats.org/drawingml/2006/main" xmlns:r="http://schemas.openxmlformats.org/officeDocument/2006/relationships" xmlns:p="http://schemas.openxmlformats.org/presentationml/2006/main">
+  <p:cSld name="Slide 53">
+    <p:spTree>
+      <p:nvGrpSpPr>
+        <p:cNvPr id="1" name=""/>
+        <p:cNvGrpSpPr/>
+        <p:nvPr/>
+      </p:nvGrpSpPr>
+      <p:grpSpPr>
+        <a:xfrm>
+          <a:off x="0" y="0"/>
+          <a:ext cx="0" cy="0"/>
+          <a:chOff x="0" y="0"/>
+          <a:chExt cx="0" cy="0"/>
+        </a:xfrm>
+      </p:grpSpPr>
+      <p:sp>
+        <p:nvSpPr>
+          <p:cNvPr id="2" name="Text 0"/>
+          <p:cNvSpPr/>
+          <p:nvPr/>
+        </p:nvSpPr>
+        <p:spPr>
+          <a:xfrm>
+            <a:off x="457200" y="713232"/>
+            <a:ext cx="11368735" cy="274320"/>
+          </a:xfrm>
+          <a:prstGeom prst="rect">
+            <a:avLst/>
+          </a:prstGeom>
+          <a:noFill/>
+          <a:ln/>
+        </p:spPr>
+        <p:txBody>
+          <a:bodyPr wrap="square" lIns="0" tIns="0" rIns="0" bIns="0" rtlCol="0" anchor="ctr"/>
+          <a:lstStyle/>
+          <a:p>
+            <a:pPr algn="r" indent="0" marL="0">
+              <a:buNone/>
+            </a:pPr>
+            <a:r>
+              <a:rPr lang="en-US" sz="1400" b="1" dirty="0">
+                <a:solidFill>
+                  <a:srgbClr val="1C3F6E"/>
+                </a:solidFill>
+                <a:latin typeface="Calibri" pitchFamily="34" charset="0"/>
+                <a:ea typeface="Calibri" pitchFamily="34" charset="-122"/>
+                <a:cs typeface="Calibri" pitchFamily="34" charset="-120"/>
+              </a:rPr>
+              <a:t>REMEDIATION</a:t>
+            </a:r>
+            <a:endParaRPr lang="en-US" sz="1400" dirty="0"/>
+          </a:p>
+        </p:txBody>
+      </p:sp>
+      <p:pic>
+        <p:nvPicPr>
+          <p:cNvPr id="3" name="Image 0" descr="/home/claude/f4/img/minesec_sheet.png">    </p:cNvPr>
+          <p:cNvPicPr>
+            <a:picLocks noChangeAspect="1"/>
+          </p:cNvPicPr>
+          <p:nvPr/>
+        </p:nvPicPr>
+        <p:blipFill>
+          <a:blip r:embed="rId1"/>
+          <a:stretch>
+            <a:fillRect/>
+          </a:stretch>
+        </p:blipFill>
+        <p:spPr>
+          <a:xfrm>
+            <a:off x="0" y="658368"/>
+            <a:ext cx="2468880" cy="5833872"/>
+          </a:xfrm>
+          <a:prstGeom prst="rect">
+            <a:avLst/>
+          </a:prstGeom>
+        </p:spPr>
+      </p:pic>
+      <p:sp>
+        <p:nvSpPr>
+          <p:cNvPr id="4" name="Text 1"/>
+          <p:cNvSpPr/>
+          <p:nvPr/>
+        </p:nvSpPr>
+        <p:spPr>
+          <a:xfrm>
+            <a:off x="2697480" y="1005840"/>
+            <a:ext cx="9174175" cy="731520"/>
+          </a:xfrm>
+          <a:prstGeom prst="rect">
+            <a:avLst/>
+          </a:prstGeom>
+          <a:noFill/>
+          <a:ln/>
+        </p:spPr>
+        <p:txBody>
+          <a:bodyPr wrap="square" lIns="0" tIns="0" rIns="0" bIns="0" rtlCol="0" anchor="ctr">
+            <a:normAutofit/>
+          </a:bodyPr>
+          <a:lstStyle/>
+          <a:p>
+            <a:pPr algn="ctr" indent="0" marL="0">
+              <a:buNone/>
+            </a:pPr>
+            <a:r>
+              <a:rPr lang="en-US" sz="3600" b="1" dirty="0">
+                <a:solidFill>
+                  <a:srgbClr val="990011"/>
+                </a:solidFill>
+                <a:latin typeface="Times New Roman" pitchFamily="34" charset="0"/>
+                <a:ea typeface="Times New Roman" pitchFamily="34" charset="-122"/>
+                <a:cs typeface="Times New Roman" pitchFamily="34" charset="-120"/>
+              </a:rPr>
+              <a:t>Remediation</a:t>
+            </a:r>
+            <a:endParaRPr lang="en-US" sz="3600" dirty="0"/>
+          </a:p>
+        </p:txBody>
+      </p:sp>
+      <p:sp>
+        <p:nvSpPr>
+          <p:cNvPr id="5" name="Text 2"/>
+          <p:cNvSpPr/>
+          <p:nvPr/>
+        </p:nvSpPr>
+        <p:spPr>
+          <a:xfrm>
+            <a:off x="2697480" y="1783080"/>
+            <a:ext cx="9174175" cy="4663440"/>
+          </a:xfrm>
+          <a:prstGeom prst="rect">
+            <a:avLst/>
+          </a:prstGeom>
+          <a:noFill/>
+          <a:ln/>
+        </p:spPr>
+        <p:txBody>
+          <a:bodyPr wrap="square" lIns="0" tIns="0" rIns="0" bIns="0" rtlCol="0" anchor="t"/>
+          <a:lstStyle/>
+          <a:p>
+            <a:pPr algn="l" indent="0" marL="0">
+              <a:spcAft>
+                <a:spcPts val="800"/>
+              </a:spcAft>
+              <a:buNone/>
+            </a:pPr>
+            <a:r>
+              <a:rPr lang="en-US" sz="4000" b="1" dirty="0">
+                <a:solidFill>
+                  <a:srgbClr val="111111"/>
+                </a:solidFill>
+                <a:latin typeface="Times New Roman" pitchFamily="34" charset="0"/>
+                <a:ea typeface="Times New Roman" pitchFamily="34" charset="-122"/>
+                <a:cs typeface="Times New Roman" pitchFamily="34" charset="-120"/>
+              </a:rPr>
+              <a:t>Fill in the blanks:</a:t>
+            </a:r>
+            <a:endParaRPr lang="en-US" sz="4000" dirty="0"/>
+          </a:p>
+          <a:p>
+            <a:pPr algn="l" marL="342900" indent="-342900">
+              <a:spcAft>
+                <a:spcPts val="800"/>
+              </a:spcAft>
+              <a:buSzPct val="100000"/>
+              <a:buFont typeface="+mj-lt"/>
+              <a:buAutoNum type="arabicPeriod" startAt="1"/>
+            </a:pPr>
+            <a:r>
+              <a:rPr lang="en-US" sz="4000" dirty="0">
+                <a:solidFill>
+                  <a:srgbClr val="111111"/>
+                </a:solidFill>
+                <a:latin typeface="Times New Roman" pitchFamily="34" charset="0"/>
+                <a:ea typeface="Times New Roman" pitchFamily="34" charset="-122"/>
+                <a:cs typeface="Times New Roman" pitchFamily="34" charset="-120"/>
+              </a:rPr>
+              <a:t>Informal activities are not ______.</a:t>
+            </a:r>
+            <a:endParaRPr lang="en-US" sz="4000" dirty="0"/>
+          </a:p>
+          <a:p>
+            <a:pPr algn="l" marL="342900" indent="-342900">
+              <a:spcAft>
+                <a:spcPts val="800"/>
+              </a:spcAft>
+              <a:buSzPct val="100000"/>
+              <a:buFont typeface="+mj-lt"/>
+              <a:buAutoNum type="arabicPeriod" startAt="1"/>
+            </a:pPr>
+            <a:r>
+              <a:rPr lang="en-US" sz="4000" dirty="0">
+                <a:solidFill>
+                  <a:srgbClr val="111111"/>
+                </a:solidFill>
+                <a:latin typeface="Times New Roman" pitchFamily="34" charset="0"/>
+                <a:ea typeface="Times New Roman" pitchFamily="34" charset="-122"/>
+                <a:cs typeface="Times New Roman" pitchFamily="34" charset="-120"/>
+              </a:rPr>
+              <a:t>A moto-taxi driver works in the ______ sector.</a:t>
+            </a:r>
+            <a:endParaRPr lang="en-US" sz="4000" dirty="0"/>
+          </a:p>
+          <a:p>
+            <a:pPr algn="l" marL="342900" indent="-342900">
+              <a:spcAft>
+                <a:spcPts val="800"/>
+              </a:spcAft>
+              <a:buSzPct val="100000"/>
+              <a:buFont typeface="+mj-lt"/>
+              <a:buAutoNum type="arabicPeriod" startAt="1"/>
+            </a:pPr>
+            <a:r>
+              <a:rPr lang="en-US" sz="4000" dirty="0">
+                <a:solidFill>
+                  <a:srgbClr val="111111"/>
+                </a:solidFill>
+                <a:latin typeface="Times New Roman" pitchFamily="34" charset="0"/>
+                <a:ea typeface="Times New Roman" pitchFamily="34" charset="-122"/>
+                <a:cs typeface="Times New Roman" pitchFamily="34" charset="-120"/>
+              </a:rPr>
+              <a:t>Informal workers often have no ______.</a:t>
+            </a:r>
+            <a:endParaRPr lang="en-US" sz="4000" dirty="0"/>
+          </a:p>
+        </p:txBody>
+      </p:sp>
+      <p:sp>
+        <p:nvSpPr>
+          <p:cNvPr id="25" name="Slide Number Placeholder 0"/>
+          <p:cNvSpPr>
+            <a:spLocks noGrp="1"/>
+          </p:cNvSpPr>
+          <p:nvPr>
+            <p:ph type="sldNum" sz="quarter" idx="4294967295"/>
+          </p:nvPr>
+        </p:nvSpPr>
+        <p:spPr>
+          <a:xfrm>
+            <a:off x="27432" y="91440"/>
+            <a:ext cx="585216" cy="475488"/>
+          </a:xfrm>
+          <a:prstGeom prst="rect">
+            <a:avLst/>
+          </a:prstGeom>
+          <a:extLst>
+            <a:ext uri="{C572A759-6A51-4108-AA02-DFA0A04FC94B}">
+              <ma14:wrappingTextBoxFlag xmlns:ma14="http://schemas.microsoft.com/office/mac/drawingml/2011/main" val="0"/>
+            </a:ext>
+          </a:extLst>
+        </p:spPr>
+        <p:txBody>
+          <a:bodyPr/>
+          <a:lstStyle>
+            <a:lvl1pPr>
+              <a:defRPr sz="2000">
+                <a:solidFill>
+                  <a:srgbClr val="FFFFFF"/>
+                </a:solidFill>
+                <a:latin typeface="Calibri"/>
+                <a:ea typeface="Calibri"/>
+                <a:cs typeface="Calibri"/>
+              </a:defRPr>
+            </a:lvl1pPr>
+          </a:lstStyle>
+          <a:p>
+            <a:pPr algn="ctr"/>
+            <a:fld id="{F7021451-1387-4CA6-816F-3879F97B5CBC}" type="slidenum">
+              <a:rPr b="1" lang="en-US"/>
+              <a:t>53</a:t>
+            </a:fld>
+            <a:endParaRPr lang="en-US"/>
+          </a:p>
+        </p:txBody>
+      </p:sp>
+    </p:spTree>
+  </p:cSld>
+  <p:clrMapOvr>
+    <a:masterClrMapping/>
+  </p:clrMapOvr>
+</p:sld>
+</file>
+
+<file path=ppt/slides/slide54.xml><?xml version="1.0" encoding="utf-8"?>
+<p:sld xmlns:a="http://schemas.openxmlformats.org/drawingml/2006/main" xmlns:r="http://schemas.openxmlformats.org/officeDocument/2006/relationships" xmlns:p="http://schemas.openxmlformats.org/presentationml/2006/main">
+  <p:cSld name="Slide 54">
+    <p:spTree>
+      <p:nvGrpSpPr>
+        <p:cNvPr id="1" name=""/>
+        <p:cNvGrpSpPr/>
+        <p:nvPr/>
+      </p:nvGrpSpPr>
+      <p:grpSpPr>
+        <a:xfrm>
+          <a:off x="0" y="0"/>
+          <a:ext cx="0" cy="0"/>
+          <a:chOff x="0" y="0"/>
+          <a:chExt cx="0" cy="0"/>
+        </a:xfrm>
+      </p:grpSpPr>
+      <p:sp>
+        <p:nvSpPr>
+          <p:cNvPr id="2" name="Text 0"/>
+          <p:cNvSpPr/>
+          <p:nvPr/>
+        </p:nvSpPr>
+        <p:spPr>
+          <a:xfrm>
+            <a:off x="457200" y="713232"/>
+            <a:ext cx="11368735" cy="274320"/>
+          </a:xfrm>
+          <a:prstGeom prst="rect">
+            <a:avLst/>
+          </a:prstGeom>
+          <a:noFill/>
+          <a:ln/>
+        </p:spPr>
+        <p:txBody>
+          <a:bodyPr wrap="square" lIns="0" tIns="0" rIns="0" bIns="0" rtlCol="0" anchor="ctr"/>
+          <a:lstStyle/>
+          <a:p>
+            <a:pPr algn="r" indent="0" marL="0">
+              <a:buNone/>
+            </a:pPr>
+            <a:r>
+              <a:rPr lang="en-US" sz="1400" b="1" dirty="0">
+                <a:solidFill>
+                  <a:srgbClr val="1C3F6E"/>
+                </a:solidFill>
+                <a:latin typeface="Calibri" pitchFamily="34" charset="0"/>
+                <a:ea typeface="Calibri" pitchFamily="34" charset="-122"/>
+                <a:cs typeface="Calibri" pitchFamily="34" charset="-120"/>
+              </a:rPr>
+              <a:t>HOMEWORK</a:t>
+            </a:r>
+            <a:endParaRPr lang="en-US" sz="1400" dirty="0"/>
+          </a:p>
+        </p:txBody>
+      </p:sp>
+      <p:pic>
+        <p:nvPicPr>
+          <p:cNvPr id="3" name="Image 0" descr="/home/claude/f4/img/minesec_sheet.png">    </p:cNvPr>
+          <p:cNvPicPr>
+            <a:picLocks noChangeAspect="1"/>
+          </p:cNvPicPr>
+          <p:nvPr/>
+        </p:nvPicPr>
+        <p:blipFill>
+          <a:blip r:embed="rId1"/>
+          <a:stretch>
+            <a:fillRect/>
+          </a:stretch>
+        </p:blipFill>
+        <p:spPr>
+          <a:xfrm>
+            <a:off x="0" y="658368"/>
+            <a:ext cx="5120640" cy="5833872"/>
+          </a:xfrm>
+          <a:prstGeom prst="rect">
+            <a:avLst/>
+          </a:prstGeom>
+        </p:spPr>
+      </p:pic>
+      <p:sp>
+        <p:nvSpPr>
+          <p:cNvPr id="4" name="Text 1"/>
+          <p:cNvSpPr/>
+          <p:nvPr/>
+        </p:nvSpPr>
+        <p:spPr>
+          <a:xfrm>
+            <a:off x="5349240" y="1005840"/>
+            <a:ext cx="6522415" cy="731520"/>
+          </a:xfrm>
+          <a:prstGeom prst="rect">
+            <a:avLst/>
+          </a:prstGeom>
+          <a:noFill/>
+          <a:ln/>
+        </p:spPr>
+        <p:txBody>
+          <a:bodyPr wrap="square" lIns="0" tIns="0" rIns="0" bIns="0" rtlCol="0" anchor="ctr">
+            <a:normAutofit/>
+          </a:bodyPr>
+          <a:lstStyle/>
+          <a:p>
+            <a:pPr algn="ctr" indent="0" marL="0">
+              <a:buNone/>
+            </a:pPr>
+            <a:r>
+              <a:rPr lang="en-US" sz="3600" b="1" dirty="0">
+                <a:solidFill>
+                  <a:srgbClr val="990011"/>
+                </a:solidFill>
+                <a:latin typeface="Times New Roman" pitchFamily="34" charset="0"/>
+                <a:ea typeface="Times New Roman" pitchFamily="34" charset="-122"/>
+                <a:cs typeface="Times New Roman" pitchFamily="34" charset="-120"/>
+              </a:rPr>
+              <a:t>Homework</a:t>
+            </a:r>
+            <a:endParaRPr lang="en-US" sz="3600" dirty="0"/>
+          </a:p>
+        </p:txBody>
+      </p:sp>
+      <p:sp>
+        <p:nvSpPr>
+          <p:cNvPr id="5" name="Text 2"/>
+          <p:cNvSpPr/>
+          <p:nvPr/>
+        </p:nvSpPr>
+        <p:spPr>
+          <a:xfrm>
+            <a:off x="5349240" y="1783080"/>
+            <a:ext cx="6522415" cy="4663440"/>
+          </a:xfrm>
+          <a:prstGeom prst="rect">
+            <a:avLst/>
+          </a:prstGeom>
+          <a:noFill/>
+          <a:ln/>
+        </p:spPr>
+        <p:txBody>
+          <a:bodyPr wrap="square" lIns="0" tIns="0" rIns="0" bIns="0" rtlCol="0" anchor="t"/>
+          <a:lstStyle/>
+          <a:p>
+            <a:pPr algn="l" indent="0" marL="0">
+              <a:spcAft>
+                <a:spcPts val="800"/>
+              </a:spcAft>
+              <a:buNone/>
+            </a:pPr>
+            <a:r>
+              <a:rPr lang="en-US" sz="4000" dirty="0">
+                <a:solidFill>
+                  <a:srgbClr val="111111"/>
+                </a:solidFill>
+                <a:latin typeface="Times New Roman" pitchFamily="34" charset="0"/>
+                <a:ea typeface="Times New Roman" pitchFamily="34" charset="-122"/>
+                <a:cs typeface="Times New Roman" pitchFamily="34" charset="-120"/>
+              </a:rPr>
+              <a:t>Interview one informal worker: his or her job, income and main problem.</a:t>
+            </a:r>
+            <a:endParaRPr lang="en-US" sz="4000" dirty="0"/>
+          </a:p>
+        </p:txBody>
+      </p:sp>
+      <p:sp>
+        <p:nvSpPr>
+          <p:cNvPr id="25" name="Slide Number Placeholder 0"/>
+          <p:cNvSpPr>
+            <a:spLocks noGrp="1"/>
+          </p:cNvSpPr>
+          <p:nvPr>
+            <p:ph type="sldNum" sz="quarter" idx="4294967295"/>
+          </p:nvPr>
+        </p:nvSpPr>
+        <p:spPr>
+          <a:xfrm>
+            <a:off x="27432" y="91440"/>
+            <a:ext cx="585216" cy="475488"/>
+          </a:xfrm>
+          <a:prstGeom prst="rect">
+            <a:avLst/>
+          </a:prstGeom>
+          <a:extLst>
+            <a:ext uri="{C572A759-6A51-4108-AA02-DFA0A04FC94B}">
+              <ma14:wrappingTextBoxFlag xmlns:ma14="http://schemas.microsoft.com/office/mac/drawingml/2011/main" val="0"/>
+            </a:ext>
+          </a:extLst>
+        </p:spPr>
+        <p:txBody>
+          <a:bodyPr/>
+          <a:lstStyle>
+            <a:lvl1pPr>
+              <a:defRPr sz="2000">
+                <a:solidFill>
+                  <a:srgbClr val="FFFFFF"/>
+                </a:solidFill>
+                <a:latin typeface="Calibri"/>
+                <a:ea typeface="Calibri"/>
+                <a:cs typeface="Calibri"/>
+              </a:defRPr>
+            </a:lvl1pPr>
+          </a:lstStyle>
+          <a:p>
+            <a:pPr algn="ctr"/>
+            <a:fld id="{F7021451-1387-4CA6-816F-3879F97B5CBC}" type="slidenum">
+              <a:rPr b="1" lang="en-US"/>
+              <a:t>54</a:t>
+            </a:fld>
+            <a:endParaRPr lang="en-US"/>
+          </a:p>
+        </p:txBody>
+      </p:sp>
+    </p:spTree>
+  </p:cSld>
+  <p:clrMapOvr>
+    <a:masterClrMapping/>
+  </p:clrMapOvr>
+</p:sld>
+</file>
+
+<file path=ppt/slides/slide55.xml><?xml version="1.0" encoding="utf-8"?>
+<p:sld xmlns:a="http://schemas.openxmlformats.org/drawingml/2006/main" xmlns:r="http://schemas.openxmlformats.org/officeDocument/2006/relationships" xmlns:p="http://schemas.openxmlformats.org/presentationml/2006/main">
+  <p:cSld name="Slide 55">
+    <p:spTree>
+      <p:nvGrpSpPr>
+        <p:cNvPr id="1" name=""/>
+        <p:cNvGrpSpPr/>
+        <p:nvPr/>
+      </p:nvGrpSpPr>
+      <p:grpSpPr>
+        <a:xfrm>
+          <a:off x="0" y="0"/>
+          <a:ext cx="0" cy="0"/>
+          <a:chOff x="0" y="0"/>
+          <a:chExt cx="0" cy="0"/>
+        </a:xfrm>
+      </p:grpSpPr>
+      <p:sp>
+        <p:nvSpPr>
+          <p:cNvPr id="2" name="Text 0"/>
+          <p:cNvSpPr/>
+          <p:nvPr/>
+        </p:nvSpPr>
+        <p:spPr>
+          <a:xfrm>
+            <a:off x="457200" y="713232"/>
+            <a:ext cx="11368735" cy="274320"/>
+          </a:xfrm>
+          <a:prstGeom prst="rect">
+            <a:avLst/>
+          </a:prstGeom>
+          <a:noFill/>
+          <a:ln/>
+        </p:spPr>
+        <p:txBody>
+          <a:bodyPr wrap="square" lIns="0" tIns="0" rIns="0" bIns="0" rtlCol="0" anchor="ctr"/>
+          <a:lstStyle/>
+          <a:p>
+            <a:pPr algn="r" indent="0" marL="0">
+              <a:buNone/>
+            </a:pPr>
+            <a:r>
+              <a:rPr lang="en-US" sz="1400" b="1" dirty="0">
+                <a:solidFill>
+                  <a:srgbClr val="1C3F6E"/>
+                </a:solidFill>
+                <a:latin typeface="Calibri" pitchFamily="34" charset="0"/>
+                <a:ea typeface="Calibri" pitchFamily="34" charset="-122"/>
+                <a:cs typeface="Calibri" pitchFamily="34" charset="-120"/>
+              </a:rPr>
+              <a:t>NEXT LESSON</a:t>
+            </a:r>
+            <a:endParaRPr lang="en-US" sz="1400" dirty="0"/>
+          </a:p>
+        </p:txBody>
+      </p:sp>
+      <p:pic>
+        <p:nvPicPr>
+          <p:cNvPr id="3" name="Image 0" descr="/home/claude/f4/img/minesec_sheet.png">    </p:cNvPr>
+          <p:cNvPicPr>
+            <a:picLocks noChangeAspect="1"/>
+          </p:cNvPicPr>
+          <p:nvPr/>
+        </p:nvPicPr>
+        <p:blipFill>
+          <a:blip r:embed="rId1"/>
+          <a:stretch>
+            <a:fillRect/>
+          </a:stretch>
+        </p:blipFill>
+        <p:spPr>
+          <a:xfrm>
+            <a:off x="0" y="658368"/>
+            <a:ext cx="5120640" cy="5833872"/>
+          </a:xfrm>
+          <a:prstGeom prst="rect">
+            <a:avLst/>
+          </a:prstGeom>
+        </p:spPr>
+      </p:pic>
+      <p:sp>
+        <p:nvSpPr>
+          <p:cNvPr id="4" name="Text 1"/>
+          <p:cNvSpPr/>
+          <p:nvPr/>
+        </p:nvSpPr>
+        <p:spPr>
+          <a:xfrm>
+            <a:off x="5349240" y="1005840"/>
+            <a:ext cx="6522415" cy="731520"/>
+          </a:xfrm>
+          <a:prstGeom prst="rect">
+            <a:avLst/>
+          </a:prstGeom>
+          <a:noFill/>
+          <a:ln/>
+        </p:spPr>
+        <p:txBody>
+          <a:bodyPr wrap="square" lIns="0" tIns="0" rIns="0" bIns="0" rtlCol="0" anchor="ctr">
+            <a:normAutofit/>
+          </a:bodyPr>
+          <a:lstStyle/>
+          <a:p>
+            <a:pPr algn="ctr" indent="0" marL="0">
+              <a:buNone/>
+            </a:pPr>
+            <a:r>
+              <a:rPr lang="en-US" sz="3600" b="1" dirty="0">
+                <a:solidFill>
+                  <a:srgbClr val="990011"/>
+                </a:solidFill>
+                <a:latin typeface="Times New Roman" pitchFamily="34" charset="0"/>
+                <a:ea typeface="Times New Roman" pitchFamily="34" charset="-122"/>
+                <a:cs typeface="Times New Roman" pitchFamily="34" charset="-120"/>
+              </a:rPr>
+              <a:t>Next Lesson</a:t>
+            </a:r>
+            <a:endParaRPr lang="en-US" sz="3600" dirty="0"/>
+          </a:p>
+        </p:txBody>
+      </p:sp>
+      <p:sp>
+        <p:nvSpPr>
+          <p:cNvPr id="5" name="Text 2"/>
+          <p:cNvSpPr/>
+          <p:nvPr/>
+        </p:nvSpPr>
+        <p:spPr>
+          <a:xfrm>
+            <a:off x="5349240" y="1783080"/>
+            <a:ext cx="6522415" cy="4663440"/>
+          </a:xfrm>
+          <a:prstGeom prst="rect">
+            <a:avLst/>
+          </a:prstGeom>
+          <a:noFill/>
+          <a:ln/>
+        </p:spPr>
+        <p:txBody>
+          <a:bodyPr wrap="square" lIns="0" tIns="0" rIns="0" bIns="0" rtlCol="0" anchor="ctr"/>
+          <a:lstStyle/>
+          <a:p>
+            <a:pPr algn="ctr" indent="0" marL="0">
+              <a:spcAft>
+                <a:spcPts val="800"/>
+              </a:spcAft>
+              <a:buNone/>
+            </a:pPr>
+            <a:r>
+              <a:rPr lang="en-US" sz="4000" b="1" dirty="0">
+                <a:solidFill>
+                  <a:srgbClr val="111111"/>
+                </a:solidFill>
+                <a:latin typeface="Times New Roman" pitchFamily="34" charset="0"/>
+                <a:ea typeface="Times New Roman" pitchFamily="34" charset="-122"/>
+                <a:cs typeface="Times New Roman" pitchFamily="34" charset="-120"/>
+              </a:rPr>
+              <a:t>Our next lesson will be on:</a:t>
+            </a:r>
+            <a:endParaRPr lang="en-US" sz="4000" dirty="0"/>
+          </a:p>
+          <a:p>
+            <a:pPr algn="ctr" indent="0" marL="0">
+              <a:spcAft>
+                <a:spcPts val="800"/>
+              </a:spcAft>
+              <a:buNone/>
+            </a:pPr>
+            <a:r>
+              <a:rPr lang="en-US" sz="4000" b="1" dirty="0">
+                <a:solidFill>
+                  <a:srgbClr val="990011"/>
+                </a:solidFill>
+                <a:latin typeface="Times New Roman" pitchFamily="34" charset="0"/>
+                <a:ea typeface="Times New Roman" pitchFamily="34" charset="-122"/>
+                <a:cs typeface="Times New Roman" pitchFamily="34" charset="-120"/>
+              </a:rPr>
+              <a:t>Practical Work 4: Location of the Regional and Divisional Headquarters of Cameroon</a:t>
+            </a:r>
+            <a:endParaRPr lang="en-US" sz="4000" dirty="0"/>
+          </a:p>
+        </p:txBody>
+      </p:sp>
+      <p:sp>
+        <p:nvSpPr>
+          <p:cNvPr id="25" name="Slide Number Placeholder 0"/>
+          <p:cNvSpPr>
+            <a:spLocks noGrp="1"/>
+          </p:cNvSpPr>
+          <p:nvPr>
+            <p:ph type="sldNum" sz="quarter" idx="4294967295"/>
+          </p:nvPr>
+        </p:nvSpPr>
+        <p:spPr>
+          <a:xfrm>
+            <a:off x="27432" y="91440"/>
+            <a:ext cx="585216" cy="475488"/>
+          </a:xfrm>
+          <a:prstGeom prst="rect">
+            <a:avLst/>
+          </a:prstGeom>
+          <a:extLst>
+            <a:ext uri="{C572A759-6A51-4108-AA02-DFA0A04FC94B}">
+              <ma14:wrappingTextBoxFlag xmlns:ma14="http://schemas.microsoft.com/office/mac/drawingml/2011/main" val="0"/>
+            </a:ext>
+          </a:extLst>
+        </p:spPr>
+        <p:txBody>
+          <a:bodyPr/>
+          <a:lstStyle>
+            <a:lvl1pPr>
+              <a:defRPr sz="2000">
+                <a:solidFill>
+                  <a:srgbClr val="FFFFFF"/>
+                </a:solidFill>
+                <a:latin typeface="Calibri"/>
+                <a:ea typeface="Calibri"/>
+                <a:cs typeface="Calibri"/>
+              </a:defRPr>
+            </a:lvl1pPr>
+          </a:lstStyle>
+          <a:p>
+            <a:pPr algn="ctr"/>
+            <a:fld id="{F7021451-1387-4CA6-816F-3879F97B5CBC}" type="slidenum">
+              <a:rPr b="1" lang="en-US"/>
+              <a:t>55</a:t>
+            </a:fld>
+            <a:endParaRPr lang="en-US"/>
+          </a:p>
+        </p:txBody>
+      </p:sp>
+    </p:spTree>
+  </p:cSld>
+  <p:clrMapOvr>
+    <a:masterClrMapping/>
+  </p:clrMapOvr>
+</p:sld>
+</file>
+
+<file path=ppt/slides/slide56.xml><?xml version="1.0" encoding="utf-8"?>
+<p:sld xmlns:a="http://schemas.openxmlformats.org/drawingml/2006/main" xmlns:r="http://schemas.openxmlformats.org/officeDocument/2006/relationships" xmlns:p="http://schemas.openxmlformats.org/presentationml/2006/main">
+  <p:cSld name="Slide 56">
+    <p:spTree>
+      <p:nvGrpSpPr>
+        <p:cNvPr id="1" name=""/>
+        <p:cNvGrpSpPr/>
+        <p:nvPr/>
+      </p:nvGrpSpPr>
+      <p:grpSpPr>
+        <a:xfrm>
+          <a:off x="0" y="0"/>
+          <a:ext cx="0" cy="0"/>
+          <a:chOff x="0" y="0"/>
+          <a:chExt cx="0" cy="0"/>
+        </a:xfrm>
+      </p:grpSpPr>
+      <p:sp>
+        <p:nvSpPr>
+          <p:cNvPr id="2" name="Text 0"/>
+          <p:cNvSpPr/>
+          <p:nvPr/>
+        </p:nvSpPr>
+        <p:spPr>
+          <a:xfrm>
+            <a:off x="457200" y="713232"/>
+            <a:ext cx="11368735" cy="274320"/>
+          </a:xfrm>
+          <a:prstGeom prst="rect">
+            <a:avLst/>
+          </a:prstGeom>
+          <a:noFill/>
+          <a:ln/>
+        </p:spPr>
+        <p:txBody>
+          <a:bodyPr wrap="square" lIns="0" tIns="0" rIns="0" bIns="0" rtlCol="0" anchor="ctr"/>
+          <a:lstStyle/>
+          <a:p>
+            <a:pPr algn="r" indent="0" marL="0">
+              <a:buNone/>
+            </a:pPr>
+            <a:r>
+              <a:rPr lang="en-US" sz="1400" b="1" dirty="0">
+                <a:solidFill>
+                  <a:srgbClr val="1C3F6E"/>
+                </a:solidFill>
+                <a:latin typeface="Calibri" pitchFamily="34" charset="0"/>
+                <a:ea typeface="Calibri" pitchFamily="34" charset="-122"/>
+                <a:cs typeface="Calibri" pitchFamily="34" charset="-120"/>
+              </a:rPr>
+              <a:t>BILINGUAL GAME</a:t>
+            </a:r>
+            <a:endParaRPr lang="en-US" sz="1400" dirty="0"/>
+          </a:p>
+        </p:txBody>
+      </p:sp>
+      <p:sp>
+        <p:nvSpPr>
+          <p:cNvPr id="3" name="Text 1"/>
+          <p:cNvSpPr/>
+          <p:nvPr/>
+        </p:nvSpPr>
+        <p:spPr>
+          <a:xfrm>
+            <a:off x="457200" y="1005840"/>
+            <a:ext cx="11277295" cy="731520"/>
+          </a:xfrm>
+          <a:prstGeom prst="rect">
+            <a:avLst/>
+          </a:prstGeom>
+          <a:noFill/>
+          <a:ln/>
+        </p:spPr>
+        <p:txBody>
+          <a:bodyPr wrap="square" lIns="0" tIns="0" rIns="0" bIns="0" rtlCol="0" anchor="ctr"/>
+          <a:lstStyle/>
+          <a:p>
+            <a:pPr algn="ctr" indent="0" marL="0">
+              <a:buNone/>
+            </a:pPr>
+            <a:r>
+              <a:rPr lang="en-US" sz="3600" b="1" dirty="0">
+                <a:solidFill>
+                  <a:srgbClr val="990011"/>
+                </a:solidFill>
+                <a:latin typeface="Times New Roman" pitchFamily="34" charset="0"/>
+                <a:ea typeface="Times New Roman" pitchFamily="34" charset="-122"/>
+                <a:cs typeface="Times New Roman" pitchFamily="34" charset="-120"/>
+              </a:rPr>
               <a:t>Bilingual Game (Jeu Bilingue)</a:t>
             </a:r>
             <a:endParaRPr lang="en-US" sz="3600" dirty="0"/>
@@ -16349,7 +20240,7 @@
       </p:sp>
       <p:graphicFrame>
         <p:nvGraphicFramePr>
-          <p:cNvPr id="47" name="Table 0"/>
+          <p:cNvPr id="57" name="Table 0"/>
           <p:cNvGraphicFramePr>
             <a:graphicFrameLocks noGrp="1"/>
           </p:cNvGraphicFramePr>
@@ -17385,7 +21276,7 @@
             <a:pPr algn="ctr"/>
             <a:fld id="{F7021451-1387-4CA6-816F-3879F97B5CBC}" type="slidenum">
               <a:rPr b="1" lang="en-US"/>
-              <a:t>46</a:t>
+              <a:t>56</a:t>
             </a:fld>
             <a:endParaRPr lang="en-US"/>
           </a:p>
@@ -17399,9 +21290,9 @@
 </p:sld>
 </file>
 
-<file path=ppt/slides/slide47.xml><?xml version="1.0" encoding="utf-8"?>
+<file path=ppt/slides/slide57.xml><?xml version="1.0" encoding="utf-8"?>
 <p:sld xmlns:a="http://schemas.openxmlformats.org/drawingml/2006/main" xmlns:r="http://schemas.openxmlformats.org/officeDocument/2006/relationships" xmlns:p="http://schemas.openxmlformats.org/presentationml/2006/main">
-  <p:cSld name="Slide 47">
+  <p:cSld name="Slide 57">
     <p:spTree>
       <p:nvGrpSpPr>
         <p:cNvPr id="1" name=""/>
@@ -17496,7 +21387,7 @@
       </p:sp>
       <p:graphicFrame>
         <p:nvGraphicFramePr>
-          <p:cNvPr id="48" name="Table 0"/>
+          <p:cNvPr id="58" name="Table 0"/>
           <p:cNvGraphicFramePr>
             <a:graphicFrameLocks noGrp="1"/>
           </p:cNvGraphicFramePr>
@@ -17882,7 +21773,7 @@
                           <a:ea typeface="Calibri" pitchFamily="34" charset="-122"/>
                           <a:cs typeface="Calibri" pitchFamily="34" charset="-120"/>
                         </a:rPr>
-                        <a:t>Identify types of informal activities. Give their general characteristics. Explain their importance and limitations.</a:t>
+                        <a:t>Identify the types of informal activities. Give their general characteristics. Explain their importance and limitations.</a:t>
                       </a:r>
                       <a:endParaRPr lang="en-US" sz="1600" dirty="0">
                         <a:latin typeface="Calibri" charset="0"/>
@@ -18020,7 +21911,7 @@
                           <a:ea typeface="Calibri" pitchFamily="34" charset="-122"/>
                           <a:cs typeface="Calibri" pitchFamily="34" charset="-120"/>
                         </a:rPr>
-                        <a:t>Learners are able to describe the informal sector and judge its advantages and limits.</a:t>
+                        <a:t>Learners are able to describe the informal sector and judge its importance and its limits.</a:t>
                       </a:r>
                       <a:endParaRPr lang="en-US" sz="1600" dirty="0">
                         <a:latin typeface="Calibri" charset="0"/>
@@ -18118,7 +22009,7 @@
             <a:pPr algn="ctr"/>
             <a:fld id="{F7021451-1387-4CA6-816F-3879F97B5CBC}" type="slidenum">
               <a:rPr b="1" lang="en-US"/>
-              <a:t>47</a:t>
+              <a:t>57</a:t>
             </a:fld>
             <a:endParaRPr lang="en-US"/>
           </a:p>
@@ -18132,9 +22023,9 @@
 </p:sld>
 </file>
 
-<file path=ppt/slides/slide48.xml><?xml version="1.0" encoding="utf-8"?>
+<file path=ppt/slides/slide58.xml><?xml version="1.0" encoding="utf-8"?>
 <p:sld xmlns:a="http://schemas.openxmlformats.org/drawingml/2006/main" xmlns:r="http://schemas.openxmlformats.org/officeDocument/2006/relationships" xmlns:p="http://schemas.openxmlformats.org/presentationml/2006/main">
-  <p:cSld name="Slide 48">
+  <p:cSld name="Slide 58">
     <p:spTree>
       <p:nvGrpSpPr>
         <p:cNvPr id="1" name=""/>
@@ -18229,7 +22120,7 @@
       </p:sp>
       <p:graphicFrame>
         <p:nvGraphicFramePr>
-          <p:cNvPr id="49" name="Table 0"/>
+          <p:cNvPr id="59" name="Table 0"/>
           <p:cNvGraphicFramePr>
             <a:graphicFrameLocks noGrp="1"/>
           </p:cNvGraphicFramePr>
@@ -18339,7 +22230,7 @@
                           <a:ea typeface="Calibri" pitchFamily="34" charset="-122"/>
                           <a:cs typeface="Calibri" pitchFamily="34" charset="-120"/>
                         </a:rPr>
-                        <a:t>DEFINITIONS; Types and Characteristics; Importance; Limitations.</a:t>
+                        <a:t>DEFINITIONS; Types of Informal Activities; General Characteristics; Importance of the Informal Sector; Limitations of the Informal Sector.</a:t>
                       </a:r>
                       <a:endParaRPr lang="en-US" sz="1600" dirty="0">
                         <a:latin typeface="Calibri" charset="0"/>
@@ -18615,7 +22506,7 @@
                           <a:ea typeface="Calibri" pitchFamily="34" charset="-122"/>
                           <a:cs typeface="Calibri" pitchFamily="34" charset="-120"/>
                         </a:rPr>
-                        <a:t>Interview one informal worker: his job, his income and his main problem.</a:t>
+                        <a:t>Interview one informal worker: his or her job, income and main problem.</a:t>
                       </a:r>
                       <a:endParaRPr lang="en-US" sz="1600" dirty="0">
                         <a:latin typeface="Calibri" charset="0"/>
@@ -18989,7 +22880,7 @@
             <a:pPr algn="ctr"/>
             <a:fld id="{F7021451-1387-4CA6-816F-3879F97B5CBC}" type="slidenum">
               <a:rPr b="1" lang="en-US"/>
-              <a:t>48</a:t>
+              <a:t>58</a:t>
             </a:fld>
             <a:endParaRPr lang="en-US"/>
           </a:p>
@@ -19003,9 +22894,9 @@
 </p:sld>
 </file>
 
-<file path=ppt/slides/slide49.xml><?xml version="1.0" encoding="utf-8"?>
+<file path=ppt/slides/slide59.xml><?xml version="1.0" encoding="utf-8"?>
 <p:sld xmlns:a="http://schemas.openxmlformats.org/drawingml/2006/main" xmlns:r="http://schemas.openxmlformats.org/officeDocument/2006/relationships" xmlns:p="http://schemas.openxmlformats.org/presentationml/2006/main">
-  <p:cSld name="Slide 49">
+  <p:cSld name="Slide 59">
     <p:spTree>
       <p:nvGrpSpPr>
         <p:cNvPr id="1" name=""/>
@@ -19314,551 +23205,7 @@
             <a:pPr algn="ctr"/>
             <a:fld id="{F7021451-1387-4CA6-816F-3879F97B5CBC}" type="slidenum">
               <a:rPr b="1" lang="en-US"/>
-              <a:t>49</a:t>
-            </a:fld>
-            <a:endParaRPr lang="en-US"/>
-          </a:p>
-        </p:txBody>
-      </p:sp>
-    </p:spTree>
-  </p:cSld>
-  <p:clrMapOvr>
-    <a:masterClrMapping/>
-  </p:clrMapOvr>
-</p:sld>
-</file>
-
-<file path=ppt/slides/slide5.xml><?xml version="1.0" encoding="utf-8"?>
-<p:sld xmlns:a="http://schemas.openxmlformats.org/drawingml/2006/main" xmlns:r="http://schemas.openxmlformats.org/officeDocument/2006/relationships" xmlns:p="http://schemas.openxmlformats.org/presentationml/2006/main">
-  <p:cSld name="Slide 5">
-    <p:spTree>
-      <p:nvGrpSpPr>
-        <p:cNvPr id="1" name=""/>
-        <p:cNvGrpSpPr/>
-        <p:nvPr/>
-      </p:nvGrpSpPr>
-      <p:grpSpPr>
-        <a:xfrm>
-          <a:off x="0" y="0"/>
-          <a:ext cx="0" cy="0"/>
-          <a:chOff x="0" y="0"/>
-          <a:chExt cx="0" cy="0"/>
-        </a:xfrm>
-      </p:grpSpPr>
-      <p:sp>
-        <p:nvSpPr>
-          <p:cNvPr id="2" name="Text 0"/>
-          <p:cNvSpPr/>
-          <p:nvPr/>
-        </p:nvSpPr>
-        <p:spPr>
-          <a:xfrm>
-            <a:off x="457200" y="713232"/>
-            <a:ext cx="11368735" cy="274320"/>
-          </a:xfrm>
-          <a:prstGeom prst="rect">
-            <a:avLst/>
-          </a:prstGeom>
-          <a:noFill/>
-          <a:ln/>
-        </p:spPr>
-        <p:txBody>
-          <a:bodyPr wrap="square" lIns="0" tIns="0" rIns="0" bIns="0" rtlCol="0" anchor="ctr"/>
-          <a:lstStyle/>
-          <a:p>
-            <a:pPr algn="r" indent="0" marL="0">
-              <a:buNone/>
-            </a:pPr>
-            <a:r>
-              <a:rPr lang="en-US" sz="1400" b="1" dirty="0">
-                <a:solidFill>
-                  <a:srgbClr val="1C3F6E"/>
-                </a:solidFill>
-                <a:latin typeface="Calibri" pitchFamily="34" charset="0"/>
-                <a:ea typeface="Calibri" pitchFamily="34" charset="-122"/>
-                <a:cs typeface="Calibri" pitchFamily="34" charset="-120"/>
-              </a:rPr>
-              <a:t>HOMEWORK CORRECTION</a:t>
-            </a:r>
-            <a:endParaRPr lang="en-US" sz="1400" dirty="0"/>
-          </a:p>
-        </p:txBody>
-      </p:sp>
-      <p:pic>
-        <p:nvPicPr>
-          <p:cNvPr id="3" name="Image 0" descr="/home/claude/f4/img/minesec_sheet.png">    </p:cNvPr>
-          <p:cNvPicPr>
-            <a:picLocks noChangeAspect="1"/>
-          </p:cNvPicPr>
-          <p:nvPr/>
-        </p:nvPicPr>
-        <p:blipFill>
-          <a:blip r:embed="rId1"/>
-          <a:stretch>
-            <a:fillRect/>
-          </a:stretch>
-        </p:blipFill>
-        <p:spPr>
-          <a:xfrm>
-            <a:off x="0" y="658368"/>
-            <a:ext cx="5120640" cy="5833872"/>
-          </a:xfrm>
-          <a:prstGeom prst="rect">
-            <a:avLst/>
-          </a:prstGeom>
-        </p:spPr>
-      </p:pic>
-      <p:sp>
-        <p:nvSpPr>
-          <p:cNvPr id="4" name="Text 1"/>
-          <p:cNvSpPr/>
-          <p:nvPr/>
-        </p:nvSpPr>
-        <p:spPr>
-          <a:xfrm>
-            <a:off x="5349240" y="1005840"/>
-            <a:ext cx="6522415" cy="731520"/>
-          </a:xfrm>
-          <a:prstGeom prst="rect">
-            <a:avLst/>
-          </a:prstGeom>
-          <a:noFill/>
-          <a:ln/>
-        </p:spPr>
-        <p:txBody>
-          <a:bodyPr wrap="square" lIns="0" tIns="0" rIns="0" bIns="0" rtlCol="0" anchor="ctr">
-            <a:normAutofit/>
-          </a:bodyPr>
-          <a:lstStyle/>
-          <a:p>
-            <a:pPr algn="ctr" indent="0" marL="0">
-              <a:buNone/>
-            </a:pPr>
-            <a:r>
-              <a:rPr lang="en-US" sz="3600" b="1" dirty="0">
-                <a:solidFill>
-                  <a:srgbClr val="990011"/>
-                </a:solidFill>
-                <a:latin typeface="Times New Roman" pitchFamily="34" charset="0"/>
-                <a:ea typeface="Times New Roman" pitchFamily="34" charset="-122"/>
-                <a:cs typeface="Times New Roman" pitchFamily="34" charset="-120"/>
-              </a:rPr>
-              <a:t>Correction: Possible Answer</a:t>
-            </a:r>
-            <a:endParaRPr lang="en-US" sz="3600" dirty="0"/>
-          </a:p>
-        </p:txBody>
-      </p:sp>
-      <p:sp>
-        <p:nvSpPr>
-          <p:cNvPr id="5" name="Text 2"/>
-          <p:cNvSpPr/>
-          <p:nvPr/>
-        </p:nvSpPr>
-        <p:spPr>
-          <a:xfrm>
-            <a:off x="5349240" y="1783080"/>
-            <a:ext cx="6522415" cy="4663440"/>
-          </a:xfrm>
-          <a:prstGeom prst="rect">
-            <a:avLst/>
-          </a:prstGeom>
-          <a:noFill/>
-          <a:ln/>
-        </p:spPr>
-        <p:txBody>
-          <a:bodyPr wrap="square" lIns="0" tIns="0" rIns="0" bIns="0" rtlCol="0" anchor="t"/>
-          <a:lstStyle/>
-          <a:p>
-            <a:pPr algn="l" indent="0" marL="0">
-              <a:spcAft>
-                <a:spcPts val="800"/>
-              </a:spcAft>
-              <a:buNone/>
-            </a:pPr>
-            <a:r>
-              <a:rPr lang="en-US" sz="4000" dirty="0">
-                <a:solidFill>
-                  <a:srgbClr val="111111"/>
-                </a:solidFill>
-                <a:latin typeface="Times New Roman" pitchFamily="34" charset="0"/>
-                <a:ea typeface="Times New Roman" pitchFamily="34" charset="-122"/>
-                <a:cs typeface="Times New Roman" pitchFamily="34" charset="-120"/>
-              </a:rPr>
-              <a:t>Moto-taxi driving, selling roasted maize, selling fuel in bottles, shoe repairing, hairdressing in the street.</a:t>
-            </a:r>
-            <a:endParaRPr lang="en-US" sz="4000" dirty="0"/>
-          </a:p>
-        </p:txBody>
-      </p:sp>
-      <p:sp>
-        <p:nvSpPr>
-          <p:cNvPr id="25" name="Slide Number Placeholder 0"/>
-          <p:cNvSpPr>
-            <a:spLocks noGrp="1"/>
-          </p:cNvSpPr>
-          <p:nvPr>
-            <p:ph type="sldNum" sz="quarter" idx="4294967295"/>
-          </p:nvPr>
-        </p:nvSpPr>
-        <p:spPr>
-          <a:xfrm>
-            <a:off x="27432" y="91440"/>
-            <a:ext cx="585216" cy="475488"/>
-          </a:xfrm>
-          <a:prstGeom prst="rect">
-            <a:avLst/>
-          </a:prstGeom>
-          <a:extLst>
-            <a:ext uri="{C572A759-6A51-4108-AA02-DFA0A04FC94B}">
-              <ma14:wrappingTextBoxFlag xmlns:ma14="http://schemas.microsoft.com/office/mac/drawingml/2011/main" val="0"/>
-            </a:ext>
-          </a:extLst>
-        </p:spPr>
-        <p:txBody>
-          <a:bodyPr/>
-          <a:lstStyle>
-            <a:lvl1pPr>
-              <a:defRPr sz="2000">
-                <a:solidFill>
-                  <a:srgbClr val="FFFFFF"/>
-                </a:solidFill>
-                <a:latin typeface="Calibri"/>
-                <a:ea typeface="Calibri"/>
-                <a:cs typeface="Calibri"/>
-              </a:defRPr>
-            </a:lvl1pPr>
-          </a:lstStyle>
-          <a:p>
-            <a:pPr algn="ctr"/>
-            <a:fld id="{F7021451-1387-4CA6-816F-3879F97B5CBC}" type="slidenum">
-              <a:rPr b="1" lang="en-US"/>
-              <a:t>5</a:t>
-            </a:fld>
-            <a:endParaRPr lang="en-US"/>
-          </a:p>
-        </p:txBody>
-      </p:sp>
-    </p:spTree>
-  </p:cSld>
-  <p:clrMapOvr>
-    <a:masterClrMapping/>
-  </p:clrMapOvr>
-</p:sld>
-</file>
-
-<file path=ppt/slides/slide50.xml><?xml version="1.0" encoding="utf-8"?>
-<p:sld xmlns:a="http://schemas.openxmlformats.org/drawingml/2006/main" xmlns:r="http://schemas.openxmlformats.org/officeDocument/2006/relationships" xmlns:p="http://schemas.openxmlformats.org/presentationml/2006/main">
-  <p:cSld name="Slide 50">
-    <p:spTree>
-      <p:nvGrpSpPr>
-        <p:cNvPr id="1" name=""/>
-        <p:cNvGrpSpPr/>
-        <p:nvPr/>
-      </p:nvGrpSpPr>
-      <p:grpSpPr>
-        <a:xfrm>
-          <a:off x="0" y="0"/>
-          <a:ext cx="0" cy="0"/>
-          <a:chOff x="0" y="0"/>
-          <a:chExt cx="0" cy="0"/>
-        </a:xfrm>
-      </p:grpSpPr>
-      <p:sp>
-        <p:nvSpPr>
-          <p:cNvPr id="2" name="Text 0"/>
-          <p:cNvSpPr/>
-          <p:nvPr/>
-        </p:nvSpPr>
-        <p:spPr>
-          <a:xfrm>
-            <a:off x="457200" y="713232"/>
-            <a:ext cx="11368735" cy="274320"/>
-          </a:xfrm>
-          <a:prstGeom prst="rect">
-            <a:avLst/>
-          </a:prstGeom>
-          <a:noFill/>
-          <a:ln/>
-        </p:spPr>
-        <p:txBody>
-          <a:bodyPr wrap="square" lIns="0" tIns="0" rIns="0" bIns="0" rtlCol="0" anchor="ctr"/>
-          <a:lstStyle/>
-          <a:p>
-            <a:pPr algn="r" indent="0" marL="0">
-              <a:buNone/>
-            </a:pPr>
-            <a:r>
-              <a:rPr lang="en-US" sz="1400" b="1" dirty="0">
-                <a:solidFill>
-                  <a:srgbClr val="1C3F6E"/>
-                </a:solidFill>
-                <a:latin typeface="Calibri" pitchFamily="34" charset="0"/>
-                <a:ea typeface="Calibri" pitchFamily="34" charset="-122"/>
-                <a:cs typeface="Calibri" pitchFamily="34" charset="-120"/>
-              </a:rPr>
-              <a:t>REFERENCES</a:t>
-            </a:r>
-            <a:endParaRPr lang="en-US" sz="1400" dirty="0"/>
-          </a:p>
-        </p:txBody>
-      </p:sp>
-      <p:pic>
-        <p:nvPicPr>
-          <p:cNvPr id="3" name="Image 0" descr="/home/claude/f4/img/minesec_sheet.png">    </p:cNvPr>
-          <p:cNvPicPr>
-            <a:picLocks noChangeAspect="1"/>
-          </p:cNvPicPr>
-          <p:nvPr/>
-        </p:nvPicPr>
-        <p:blipFill>
-          <a:blip r:embed="rId1"/>
-          <a:stretch>
-            <a:fillRect/>
-          </a:stretch>
-        </p:blipFill>
-        <p:spPr>
-          <a:xfrm>
-            <a:off x="0" y="658368"/>
-            <a:ext cx="2468880" cy="5833872"/>
-          </a:xfrm>
-          <a:prstGeom prst="rect">
-            <a:avLst/>
-          </a:prstGeom>
-        </p:spPr>
-      </p:pic>
-      <p:sp>
-        <p:nvSpPr>
-          <p:cNvPr id="4" name="Text 1"/>
-          <p:cNvSpPr/>
-          <p:nvPr/>
-        </p:nvSpPr>
-        <p:spPr>
-          <a:xfrm>
-            <a:off x="2697480" y="1005840"/>
-            <a:ext cx="9174175" cy="731520"/>
-          </a:xfrm>
-          <a:prstGeom prst="rect">
-            <a:avLst/>
-          </a:prstGeom>
-          <a:noFill/>
-          <a:ln/>
-        </p:spPr>
-        <p:txBody>
-          <a:bodyPr wrap="square" lIns="0" tIns="0" rIns="0" bIns="0" rtlCol="0" anchor="ctr">
-            <a:normAutofit/>
-          </a:bodyPr>
-          <a:lstStyle/>
-          <a:p>
-            <a:pPr algn="ctr" indent="0" marL="0">
-              <a:buNone/>
-            </a:pPr>
-            <a:r>
-              <a:rPr lang="en-US" sz="3600" b="1" dirty="0">
-                <a:solidFill>
-                  <a:srgbClr val="990011"/>
-                </a:solidFill>
-                <a:latin typeface="Times New Roman" pitchFamily="34" charset="0"/>
-                <a:ea typeface="Times New Roman" pitchFamily="34" charset="-122"/>
-                <a:cs typeface="Times New Roman" pitchFamily="34" charset="-120"/>
-              </a:rPr>
-              <a:t>References</a:t>
-            </a:r>
-            <a:endParaRPr lang="en-US" sz="3600" dirty="0"/>
-          </a:p>
-        </p:txBody>
-      </p:sp>
-      <p:sp>
-        <p:nvSpPr>
-          <p:cNvPr id="5" name="Text 2"/>
-          <p:cNvSpPr/>
-          <p:nvPr/>
-        </p:nvSpPr>
-        <p:spPr>
-          <a:xfrm>
-            <a:off x="2697480" y="1783080"/>
-            <a:ext cx="9174175" cy="4663440"/>
-          </a:xfrm>
-          <a:prstGeom prst="rect">
-            <a:avLst/>
-          </a:prstGeom>
-          <a:noFill/>
-          <a:ln/>
-        </p:spPr>
-        <p:txBody>
-          <a:bodyPr wrap="square" lIns="0" tIns="0" rIns="0" bIns="0" rtlCol="0" anchor="t"/>
-          <a:lstStyle/>
-          <a:p>
-            <a:pPr algn="l" marL="342900" indent="-342900">
-              <a:spcAft>
-                <a:spcPts val="800"/>
-              </a:spcAft>
-              <a:buSzPct val="100000"/>
-              <a:buChar char="•"/>
-            </a:pPr>
-            <a:r>
-              <a:rPr lang="en-US" sz="1800" dirty="0">
-                <a:solidFill>
-                  <a:srgbClr val="111111"/>
-                </a:solidFill>
-                <a:latin typeface="Calibri" pitchFamily="34" charset="0"/>
-                <a:ea typeface="Calibri" pitchFamily="34" charset="-122"/>
-                <a:cs typeface="Calibri" pitchFamily="34" charset="-120"/>
-              </a:rPr>
-              <a:t>Geography Syllabus, Forms I–V, MINESEC (2023) — Form 2, Module 2: Space Occupation.</a:t>
-            </a:r>
-            <a:endParaRPr lang="en-US" sz="1800" dirty="0"/>
-          </a:p>
-          <a:p>
-            <a:pPr algn="l" marL="342900" indent="-342900">
-              <a:spcAft>
-                <a:spcPts val="800"/>
-              </a:spcAft>
-              <a:buSzPct val="100000"/>
-              <a:buChar char="•"/>
-            </a:pPr>
-            <a:r>
-              <a:rPr lang="en-US" sz="1800" dirty="0">
-                <a:solidFill>
-                  <a:srgbClr val="111111"/>
-                </a:solidFill>
-                <a:latin typeface="Calibri" pitchFamily="34" charset="0"/>
-                <a:ea typeface="Calibri" pitchFamily="34" charset="-122"/>
-                <a:cs typeface="Calibri" pitchFamily="34" charset="-120"/>
-              </a:rPr>
-              <a:t>Photo, Activity 1: “Cameroon - UN Women's Gender Road Project” by UN Women Gallery, CC BY-NC-ND 2.0, via Flickr (https://www.flickr.com/photos/51431730@N04/47586053052)</a:t>
-            </a:r>
-            <a:endParaRPr lang="en-US" sz="1800" dirty="0"/>
-          </a:p>
-          <a:p>
-            <a:pPr algn="l" marL="342900" indent="-342900">
-              <a:spcAft>
-                <a:spcPts val="800"/>
-              </a:spcAft>
-              <a:buSzPct val="100000"/>
-              <a:buChar char="•"/>
-            </a:pPr>
-            <a:r>
-              <a:rPr lang="en-US" sz="1800" dirty="0">
-                <a:solidFill>
-                  <a:srgbClr val="111111"/>
-                </a:solidFill>
-                <a:latin typeface="Calibri" pitchFamily="34" charset="0"/>
-                <a:ea typeface="Calibri" pitchFamily="34" charset="-122"/>
-                <a:cs typeface="Calibri" pitchFamily="34" charset="-120"/>
-              </a:rPr>
-              <a:t>Photo, Activity 2: “A tailor of Wa” by 10b travelling / Carsten ten Brink, CC BY-NC-ND 2.0, via Flickr (https://www.flickr.com/photos/77334245@N00/8154947468)</a:t>
-            </a:r>
-            <a:endParaRPr lang="en-US" sz="1800" dirty="0"/>
-          </a:p>
-          <a:p>
-            <a:pPr algn="l" marL="342900" indent="-342900">
-              <a:spcAft>
-                <a:spcPts val="800"/>
-              </a:spcAft>
-              <a:buSzPct val="100000"/>
-              <a:buChar char="•"/>
-            </a:pPr>
-            <a:r>
-              <a:rPr lang="en-US" sz="1800" dirty="0">
-                <a:solidFill>
-                  <a:srgbClr val="111111"/>
-                </a:solidFill>
-                <a:latin typeface="Calibri" pitchFamily="34" charset="0"/>
-                <a:ea typeface="Calibri" pitchFamily="34" charset="-122"/>
-                <a:cs typeface="Calibri" pitchFamily="34" charset="-120"/>
-              </a:rPr>
-              <a:t>Photo, Activity 3: “Roadside vendor roasts maize cobs for sale in Timau” by CIMMYT, CC BY-NC 2.0, via Flickr (https://www.flickr.com/photos/44760652@N05/25375356457)</a:t>
-            </a:r>
-            <a:endParaRPr lang="en-US" sz="1800" dirty="0"/>
-          </a:p>
-          <a:p>
-            <a:pPr algn="l" marL="342900" indent="-342900">
-              <a:spcAft>
-                <a:spcPts val="800"/>
-              </a:spcAft>
-              <a:buSzPct val="100000"/>
-              <a:buChar char="•"/>
-            </a:pPr>
-            <a:r>
-              <a:rPr lang="en-US" sz="1800" dirty="0">
-                <a:solidFill>
-                  <a:srgbClr val="111111"/>
-                </a:solidFill>
-                <a:latin typeface="Calibri" pitchFamily="34" charset="0"/>
-                <a:ea typeface="Calibri" pitchFamily="34" charset="-122"/>
-                <a:cs typeface="Calibri" pitchFamily="34" charset="-120"/>
-              </a:rPr>
-              <a:t>Photo, Activity 4: “Sandga Market in Douala, Cameroon” by The Advocacy Project, CC BY-NC-SA 2.0, via Flickr (https://www.flickr.com/photos/42487558@N00/3636438732)</a:t>
-            </a:r>
-            <a:endParaRPr lang="en-US" sz="1800" dirty="0"/>
-          </a:p>
-          <a:p>
-            <a:pPr algn="l" marL="342900" indent="-342900">
-              <a:spcAft>
-                <a:spcPts val="800"/>
-              </a:spcAft>
-              <a:buSzPct val="100000"/>
-              <a:buChar char="•"/>
-            </a:pPr>
-            <a:r>
-              <a:rPr lang="en-US" sz="1800" dirty="0">
-                <a:solidFill>
-                  <a:srgbClr val="111111"/>
-                </a:solidFill>
-                <a:latin typeface="Calibri" pitchFamily="34" charset="0"/>
-                <a:ea typeface="Calibri" pitchFamily="34" charset="-122"/>
-                <a:cs typeface="Calibri" pitchFamily="34" charset="-120"/>
-              </a:rPr>
-              <a:t>Diagrams and animations: drawn for this lesson (Geography Department).</a:t>
-            </a:r>
-            <a:endParaRPr lang="en-US" sz="1800" dirty="0"/>
-          </a:p>
-        </p:txBody>
-      </p:sp>
-      <p:sp>
-        <p:nvSpPr>
-          <p:cNvPr id="25" name="Slide Number Placeholder 0"/>
-          <p:cNvSpPr>
-            <a:spLocks noGrp="1"/>
-          </p:cNvSpPr>
-          <p:nvPr>
-            <p:ph type="sldNum" sz="quarter" idx="4294967295"/>
-          </p:nvPr>
-        </p:nvSpPr>
-        <p:spPr>
-          <a:xfrm>
-            <a:off x="27432" y="91440"/>
-            <a:ext cx="585216" cy="475488"/>
-          </a:xfrm>
-          <a:prstGeom prst="rect">
-            <a:avLst/>
-          </a:prstGeom>
-          <a:extLst>
-            <a:ext uri="{C572A759-6A51-4108-AA02-DFA0A04FC94B}">
-              <ma14:wrappingTextBoxFlag xmlns:ma14="http://schemas.microsoft.com/office/mac/drawingml/2011/main" val="0"/>
-            </a:ext>
-          </a:extLst>
-        </p:spPr>
-        <p:txBody>
-          <a:bodyPr/>
-          <a:lstStyle>
-            <a:lvl1pPr>
-              <a:defRPr sz="2000">
-                <a:solidFill>
-                  <a:srgbClr val="FFFFFF"/>
-                </a:solidFill>
-                <a:latin typeface="Calibri"/>
-                <a:ea typeface="Calibri"/>
-                <a:cs typeface="Calibri"/>
-              </a:defRPr>
-            </a:lvl1pPr>
-          </a:lstStyle>
-          <a:p>
-            <a:pPr algn="ctr"/>
-            <a:fld id="{F7021451-1387-4CA6-816F-3879F97B5CBC}" type="slidenum">
-              <a:rPr b="1" lang="en-US"/>
-              <a:t>50</a:t>
+              <a:t>59</a:t>
             </a:fld>
             <a:endParaRPr lang="en-US"/>
           </a:p>
@@ -20203,6 +23550,331 @@
 </p:sld>
 </file>
 
+<file path=ppt/slides/slide60.xml><?xml version="1.0" encoding="utf-8"?>
+<p:sld xmlns:a="http://schemas.openxmlformats.org/drawingml/2006/main" xmlns:r="http://schemas.openxmlformats.org/officeDocument/2006/relationships" xmlns:p="http://schemas.openxmlformats.org/presentationml/2006/main">
+  <p:cSld name="Slide 60">
+    <p:spTree>
+      <p:nvGrpSpPr>
+        <p:cNvPr id="1" name=""/>
+        <p:cNvGrpSpPr/>
+        <p:nvPr/>
+      </p:nvGrpSpPr>
+      <p:grpSpPr>
+        <a:xfrm>
+          <a:off x="0" y="0"/>
+          <a:ext cx="0" cy="0"/>
+          <a:chOff x="0" y="0"/>
+          <a:chExt cx="0" cy="0"/>
+        </a:xfrm>
+      </p:grpSpPr>
+      <p:sp>
+        <p:nvSpPr>
+          <p:cNvPr id="2" name="Text 0"/>
+          <p:cNvSpPr/>
+          <p:nvPr/>
+        </p:nvSpPr>
+        <p:spPr>
+          <a:xfrm>
+            <a:off x="457200" y="713232"/>
+            <a:ext cx="11368735" cy="274320"/>
+          </a:xfrm>
+          <a:prstGeom prst="rect">
+            <a:avLst/>
+          </a:prstGeom>
+          <a:noFill/>
+          <a:ln/>
+        </p:spPr>
+        <p:txBody>
+          <a:bodyPr wrap="square" lIns="0" tIns="0" rIns="0" bIns="0" rtlCol="0" anchor="ctr"/>
+          <a:lstStyle/>
+          <a:p>
+            <a:pPr algn="r" indent="0" marL="0">
+              <a:buNone/>
+            </a:pPr>
+            <a:r>
+              <a:rPr lang="en-US" sz="1400" b="1" dirty="0">
+                <a:solidFill>
+                  <a:srgbClr val="1C3F6E"/>
+                </a:solidFill>
+                <a:latin typeface="Calibri" pitchFamily="34" charset="0"/>
+                <a:ea typeface="Calibri" pitchFamily="34" charset="-122"/>
+                <a:cs typeface="Calibri" pitchFamily="34" charset="-120"/>
+              </a:rPr>
+              <a:t>REFERENCES</a:t>
+            </a:r>
+            <a:endParaRPr lang="en-US" sz="1400" dirty="0"/>
+          </a:p>
+        </p:txBody>
+      </p:sp>
+      <p:pic>
+        <p:nvPicPr>
+          <p:cNvPr id="3" name="Image 0" descr="/home/claude/f4/img/minesec_sheet.png">    </p:cNvPr>
+          <p:cNvPicPr>
+            <a:picLocks noChangeAspect="1"/>
+          </p:cNvPicPr>
+          <p:nvPr/>
+        </p:nvPicPr>
+        <p:blipFill>
+          <a:blip r:embed="rId1"/>
+          <a:stretch>
+            <a:fillRect/>
+          </a:stretch>
+        </p:blipFill>
+        <p:spPr>
+          <a:xfrm>
+            <a:off x="0" y="658368"/>
+            <a:ext cx="2468880" cy="5833872"/>
+          </a:xfrm>
+          <a:prstGeom prst="rect">
+            <a:avLst/>
+          </a:prstGeom>
+        </p:spPr>
+      </p:pic>
+      <p:sp>
+        <p:nvSpPr>
+          <p:cNvPr id="4" name="Text 1"/>
+          <p:cNvSpPr/>
+          <p:nvPr/>
+        </p:nvSpPr>
+        <p:spPr>
+          <a:xfrm>
+            <a:off x="2697480" y="1005840"/>
+            <a:ext cx="9174175" cy="731520"/>
+          </a:xfrm>
+          <a:prstGeom prst="rect">
+            <a:avLst/>
+          </a:prstGeom>
+          <a:noFill/>
+          <a:ln/>
+        </p:spPr>
+        <p:txBody>
+          <a:bodyPr wrap="square" lIns="0" tIns="0" rIns="0" bIns="0" rtlCol="0" anchor="ctr">
+            <a:normAutofit/>
+          </a:bodyPr>
+          <a:lstStyle/>
+          <a:p>
+            <a:pPr algn="ctr" indent="0" marL="0">
+              <a:buNone/>
+            </a:pPr>
+            <a:r>
+              <a:rPr lang="en-US" sz="3600" b="1" dirty="0">
+                <a:solidFill>
+                  <a:srgbClr val="990011"/>
+                </a:solidFill>
+                <a:latin typeface="Times New Roman" pitchFamily="34" charset="0"/>
+                <a:ea typeface="Times New Roman" pitchFamily="34" charset="-122"/>
+                <a:cs typeface="Times New Roman" pitchFamily="34" charset="-120"/>
+              </a:rPr>
+              <a:t>References</a:t>
+            </a:r>
+            <a:endParaRPr lang="en-US" sz="3600" dirty="0"/>
+          </a:p>
+        </p:txBody>
+      </p:sp>
+      <p:sp>
+        <p:nvSpPr>
+          <p:cNvPr id="5" name="Text 2"/>
+          <p:cNvSpPr/>
+          <p:nvPr/>
+        </p:nvSpPr>
+        <p:spPr>
+          <a:xfrm>
+            <a:off x="2697480" y="1783080"/>
+            <a:ext cx="9174175" cy="4663440"/>
+          </a:xfrm>
+          <a:prstGeom prst="rect">
+            <a:avLst/>
+          </a:prstGeom>
+          <a:noFill/>
+          <a:ln/>
+        </p:spPr>
+        <p:txBody>
+          <a:bodyPr wrap="square" lIns="0" tIns="0" rIns="0" bIns="0" rtlCol="0" anchor="t"/>
+          <a:lstStyle/>
+          <a:p>
+            <a:pPr algn="l" marL="342900" indent="-342900">
+              <a:spcAft>
+                <a:spcPts val="800"/>
+              </a:spcAft>
+              <a:buSzPct val="100000"/>
+              <a:buChar char="•"/>
+            </a:pPr>
+            <a:r>
+              <a:rPr lang="en-US" sz="1800" dirty="0">
+                <a:solidFill>
+                  <a:srgbClr val="111111"/>
+                </a:solidFill>
+                <a:latin typeface="Calibri" pitchFamily="34" charset="0"/>
+                <a:ea typeface="Calibri" pitchFamily="34" charset="-122"/>
+                <a:cs typeface="Calibri" pitchFamily="34" charset="-120"/>
+              </a:rPr>
+              <a:t>Geography Syllabus, Forms I–V, MINESEC (2023) — Form 2, Module 2: Space Occupation.</a:t>
+            </a:r>
+            <a:endParaRPr lang="en-US" sz="1800" dirty="0"/>
+          </a:p>
+          <a:p>
+            <a:pPr algn="l" marL="342900" indent="-342900">
+              <a:spcAft>
+                <a:spcPts val="800"/>
+              </a:spcAft>
+              <a:buSzPct val="100000"/>
+              <a:buChar char="•"/>
+            </a:pPr>
+            <a:r>
+              <a:rPr lang="en-US" sz="1800" dirty="0">
+                <a:solidFill>
+                  <a:srgbClr val="111111"/>
+                </a:solidFill>
+                <a:latin typeface="Calibri" pitchFamily="34" charset="0"/>
+                <a:ea typeface="Calibri" pitchFamily="34" charset="-122"/>
+                <a:cs typeface="Calibri" pitchFamily="34" charset="-120"/>
+              </a:rPr>
+              <a:t>Photo, Activity 1: “Cameroon - UN Women's Gender Road Project” by UN Women Gallery, CC BY-NC-ND 2.0, via Flickr (https://www.flickr.com/photos/51431730@N04/47586053052)</a:t>
+            </a:r>
+            <a:endParaRPr lang="en-US" sz="1800" dirty="0"/>
+          </a:p>
+          <a:p>
+            <a:pPr algn="l" marL="342900" indent="-342900">
+              <a:spcAft>
+                <a:spcPts val="800"/>
+              </a:spcAft>
+              <a:buSzPct val="100000"/>
+              <a:buChar char="•"/>
+            </a:pPr>
+            <a:r>
+              <a:rPr lang="en-US" sz="1800" dirty="0">
+                <a:solidFill>
+                  <a:srgbClr val="111111"/>
+                </a:solidFill>
+                <a:latin typeface="Calibri" pitchFamily="34" charset="0"/>
+                <a:ea typeface="Calibri" pitchFamily="34" charset="-122"/>
+                <a:cs typeface="Calibri" pitchFamily="34" charset="-120"/>
+              </a:rPr>
+              <a:t>Photo, Activity 2: “A tailor of Wa” by 10b travelling / Carsten ten Brink, CC BY-NC-ND 2.0, via Flickr (https://www.flickr.com/photos/77334245@N00/8154947468)</a:t>
+            </a:r>
+            <a:endParaRPr lang="en-US" sz="1800" dirty="0"/>
+          </a:p>
+          <a:p>
+            <a:pPr algn="l" marL="342900" indent="-342900">
+              <a:spcAft>
+                <a:spcPts val="800"/>
+              </a:spcAft>
+              <a:buSzPct val="100000"/>
+              <a:buChar char="•"/>
+            </a:pPr>
+            <a:r>
+              <a:rPr lang="en-US" sz="1800" dirty="0">
+                <a:solidFill>
+                  <a:srgbClr val="111111"/>
+                </a:solidFill>
+                <a:latin typeface="Calibri" pitchFamily="34" charset="0"/>
+                <a:ea typeface="Calibri" pitchFamily="34" charset="-122"/>
+                <a:cs typeface="Calibri" pitchFamily="34" charset="-120"/>
+              </a:rPr>
+              <a:t>Photo, Activity 3: “Roadside vendor roasts maize cobs for sale in Timau” by CIMMYT, CC BY-NC 2.0, via Flickr (https://www.flickr.com/photos/44760652@N05/25375356457)</a:t>
+            </a:r>
+            <a:endParaRPr lang="en-US" sz="1800" dirty="0"/>
+          </a:p>
+          <a:p>
+            <a:pPr algn="l" marL="342900" indent="-342900">
+              <a:spcAft>
+                <a:spcPts val="800"/>
+              </a:spcAft>
+              <a:buSzPct val="100000"/>
+              <a:buChar char="•"/>
+            </a:pPr>
+            <a:r>
+              <a:rPr lang="en-US" sz="1800" dirty="0">
+                <a:solidFill>
+                  <a:srgbClr val="111111"/>
+                </a:solidFill>
+                <a:latin typeface="Calibri" pitchFamily="34" charset="0"/>
+                <a:ea typeface="Calibri" pitchFamily="34" charset="-122"/>
+                <a:cs typeface="Calibri" pitchFamily="34" charset="-120"/>
+              </a:rPr>
+              <a:t>Photo, Activity 4: “Sandga Market in Douala, Cameroon” by The Advocacy Project, CC BY-NC-SA 2.0, via Flickr (https://www.flickr.com/photos/42487558@N00/3636438732)</a:t>
+            </a:r>
+            <a:endParaRPr lang="en-US" sz="1800" dirty="0"/>
+          </a:p>
+          <a:p>
+            <a:pPr algn="l" marL="342900" indent="-342900">
+              <a:spcAft>
+                <a:spcPts val="800"/>
+              </a:spcAft>
+              <a:buSzPct val="100000"/>
+              <a:buChar char="•"/>
+            </a:pPr>
+            <a:r>
+              <a:rPr lang="en-US" sz="1800" dirty="0">
+                <a:solidFill>
+                  <a:srgbClr val="111111"/>
+                </a:solidFill>
+                <a:latin typeface="Calibri" pitchFamily="34" charset="0"/>
+                <a:ea typeface="Calibri" pitchFamily="34" charset="-122"/>
+                <a:cs typeface="Calibri" pitchFamily="34" charset="-120"/>
+              </a:rPr>
+              <a:t>Diagrams and animations: drawn for this lesson (Geography Department).</a:t>
+            </a:r>
+            <a:endParaRPr lang="en-US" sz="1800" dirty="0"/>
+          </a:p>
+        </p:txBody>
+      </p:sp>
+      <p:sp>
+        <p:nvSpPr>
+          <p:cNvPr id="25" name="Slide Number Placeholder 0"/>
+          <p:cNvSpPr>
+            <a:spLocks noGrp="1"/>
+          </p:cNvSpPr>
+          <p:nvPr>
+            <p:ph type="sldNum" sz="quarter" idx="4294967295"/>
+          </p:nvPr>
+        </p:nvSpPr>
+        <p:spPr>
+          <a:xfrm>
+            <a:off x="27432" y="91440"/>
+            <a:ext cx="585216" cy="475488"/>
+          </a:xfrm>
+          <a:prstGeom prst="rect">
+            <a:avLst/>
+          </a:prstGeom>
+          <a:extLst>
+            <a:ext uri="{C572A759-6A51-4108-AA02-DFA0A04FC94B}">
+              <ma14:wrappingTextBoxFlag xmlns:ma14="http://schemas.microsoft.com/office/mac/drawingml/2011/main" val="0"/>
+            </a:ext>
+          </a:extLst>
+        </p:spPr>
+        <p:txBody>
+          <a:bodyPr/>
+          <a:lstStyle>
+            <a:lvl1pPr>
+              <a:defRPr sz="2000">
+                <a:solidFill>
+                  <a:srgbClr val="FFFFFF"/>
+                </a:solidFill>
+                <a:latin typeface="Calibri"/>
+                <a:ea typeface="Calibri"/>
+                <a:cs typeface="Calibri"/>
+              </a:defRPr>
+            </a:lvl1pPr>
+          </a:lstStyle>
+          <a:p>
+            <a:pPr algn="ctr"/>
+            <a:fld id="{F7021451-1387-4CA6-816F-3879F97B5CBC}" type="slidenum">
+              <a:rPr b="1" lang="en-US"/>
+              <a:t>60</a:t>
+            </a:fld>
+            <a:endParaRPr lang="en-US"/>
+          </a:p>
+        </p:txBody>
+      </p:sp>
+    </p:spTree>
+  </p:cSld>
+  <p:clrMapOvr>
+    <a:masterClrMapping/>
+  </p:clrMapOvr>
+</p:sld>
+</file>
+
 <file path=ppt/slides/slide7.xml><?xml version="1.0" encoding="utf-8"?>
 <p:sld xmlns:a="http://schemas.openxmlformats.org/drawingml/2006/main" xmlns:r="http://schemas.openxmlformats.org/officeDocument/2006/relationships" xmlns:p="http://schemas.openxmlformats.org/presentationml/2006/main">
   <p:cSld name="Slide 7">
@@ -20276,7 +23948,7 @@
         <p:spPr>
           <a:xfrm>
             <a:off x="0" y="658368"/>
-            <a:ext cx="2468880" cy="5833872"/>
+            <a:ext cx="1463040" cy="5833872"/>
           </a:xfrm>
           <a:prstGeom prst="rect">
             <a:avLst/>
@@ -20291,8 +23963,8 @@
         </p:nvSpPr>
         <p:spPr>
           <a:xfrm>
-            <a:off x="2697480" y="1005840"/>
-            <a:ext cx="9174175" cy="731520"/>
+            <a:off x="1691640" y="1005840"/>
+            <a:ext cx="10180015" cy="731520"/>
           </a:xfrm>
           <a:prstGeom prst="rect">
             <a:avLst/>
@@ -20332,8 +24004,8 @@
         </p:nvSpPr>
         <p:spPr>
           <a:xfrm>
-            <a:off x="2697480" y="1783080"/>
-            <a:ext cx="9174175" cy="4663440"/>
+            <a:off x="1691640" y="1783080"/>
+            <a:ext cx="10180015" cy="4663440"/>
           </a:xfrm>
           <a:prstGeom prst="rect">
             <a:avLst/>
@@ -20382,7 +24054,7 @@
                 <a:ea typeface="Times New Roman" pitchFamily="34" charset="-122"/>
                 <a:cs typeface="Times New Roman" pitchFamily="34" charset="-120"/>
               </a:rPr>
-              <a:t>Identify types of informal activities.</a:t>
+              <a:t>Identify the types of informal activities.</a:t>
             </a:r>
             <a:endParaRPr lang="en-US" sz="4000" dirty="0"/>
           </a:p>
@@ -20823,7 +24495,7 @@
         <p:spPr>
           <a:xfrm>
             <a:off x="0" y="658368"/>
-            <a:ext cx="5120640" cy="5833872"/>
+            <a:ext cx="2468880" cy="5833872"/>
           </a:xfrm>
           <a:prstGeom prst="rect">
             <a:avLst/>
@@ -20838,8 +24510,8 @@
         </p:nvSpPr>
         <p:spPr>
           <a:xfrm>
-            <a:off x="5349240" y="1005840"/>
-            <a:ext cx="6522415" cy="731520"/>
+            <a:off x="2697480" y="1005840"/>
+            <a:ext cx="9174175" cy="731520"/>
           </a:xfrm>
           <a:prstGeom prst="rect">
             <a:avLst/>
@@ -20879,8 +24551,8 @@
         </p:nvSpPr>
         <p:spPr>
           <a:xfrm>
-            <a:off x="5349240" y="1783080"/>
-            <a:ext cx="6522415" cy="4663440"/>
+            <a:off x="2697480" y="1783080"/>
+            <a:ext cx="9174175" cy="4663440"/>
           </a:xfrm>
           <a:prstGeom prst="rect">
             <a:avLst/>
@@ -20907,7 +24579,7 @@
                 <a:ea typeface="Times New Roman" pitchFamily="34" charset="-122"/>
                 <a:cs typeface="Times New Roman" pitchFamily="34" charset="-120"/>
               </a:rPr>
-              <a:t>After failing to find a job in an office, Moussa buys a motorbike and becomes a moto-taxi driver in Garoua. He earns money every day but has no insurance and no pension.</a:t>
+              <a:t>After failing to find an office job, Moussa buys a motorbike and becomes a moto-taxi driver in Garoua. He earns money every day, but after an accident he has no insurance to pay the hospital. He asks: "Is my small job a good solution or a trap?"</a:t>
             </a:r>
             <a:endParaRPr lang="en-US" sz="4000" dirty="0"/>
           </a:p>

--- a/lecons/F2/15_F2_M2_FS05_Informal_Sector_Activities_in_African_Cities.pptx
+++ b/lecons/F2/15_F2_M2_FS05_Informal_Sector_Activities_in_African_Cities.pptx
@@ -3465,7 +3465,7 @@
           <a:p>
             <a:r>
               <a:rPr lang="en-US" dirty="0"/>
-              <a:t>Before we start the new lesson, let us correct the homework I gave you at the end of Lesson 7: Towns in Africa. The question was: List five informal activities you see on your way to school. Take out your exercise books.</a:t>
+              <a:t>Before we start the new lesson, let us correct the homework I gave you at the end of Lesson 7: Towns in Africa. The question was: List three informal activities in towns. Take out your exercise books.</a:t>
             </a:r>
             <a:endParaRPr lang="en-US" dirty="0"/>
           </a:p>
@@ -4433,7 +4433,7 @@
           <a:p>
             <a:r>
               <a:rPr lang="en-US" dirty="0"/>
-              <a:t>Here is a good answer. Moto-taxi driving, selling roasted maize, selling fuel in bottles, shoe repairing, hairdressing in the street. Compare it with your own answer and correct your work in red.</a:t>
+              <a:t>Here is a good answer. Moto-taxi driving, street selling and tailoring. Compare it with your own answer and correct your work in red.</a:t>
             </a:r>
             <a:endParaRPr lang="en-US" dirty="0"/>
           </a:p>
@@ -4873,7 +4873,7 @@
           <a:p>
             <a:r>
               <a:rPr lang="en-US" dirty="0"/>
-              <a:t>For your homework: Interview one informal worker: his or her job, income and main problem. We shall correct it at the beginning of our next lesson.</a:t>
+              <a:t>For your homework: Name the headquarters of the North and Far North Regions. We shall correct it at the beginning of our next lesson.</a:t>
             </a:r>
             <a:endParaRPr lang="en-US" dirty="0"/>
           </a:p>
@@ -15759,7 +15759,7 @@
                 <a:ea typeface="Times New Roman" pitchFamily="34" charset="-122"/>
                 <a:cs typeface="Times New Roman" pitchFamily="34" charset="-120"/>
               </a:rPr>
-              <a:t>List five informal activities you see on your way to school.</a:t>
+              <a:t>List three informal activities in towns.</a:t>
             </a:r>
             <a:endParaRPr lang="en-US" sz="4000" dirty="0"/>
           </a:p>
@@ -18681,7 +18681,7 @@
                 <a:ea typeface="Times New Roman" pitchFamily="34" charset="-122"/>
                 <a:cs typeface="Times New Roman" pitchFamily="34" charset="-120"/>
               </a:rPr>
-              <a:t>Moto-taxi driving, selling roasted maize, selling fuel in bottles, shoe repairing, hairdressing in the street.</a:t>
+              <a:t>Moto-taxi driving, street selling and tailoring.</a:t>
             </a:r>
             <a:endParaRPr lang="en-US" sz="4000" dirty="0"/>
           </a:p>
@@ -19842,7 +19842,7 @@
                 <a:ea typeface="Times New Roman" pitchFamily="34" charset="-122"/>
                 <a:cs typeface="Times New Roman" pitchFamily="34" charset="-120"/>
               </a:rPr>
-              <a:t>Interview one informal worker: his or her job, income and main problem.</a:t>
+              <a:t>Name the headquarters of the North and Far North Regions.</a:t>
             </a:r>
             <a:endParaRPr lang="en-US" sz="4000" dirty="0"/>
           </a:p>
@@ -22506,7 +22506,7 @@
                           <a:ea typeface="Calibri" pitchFamily="34" charset="-122"/>
                           <a:cs typeface="Calibri" pitchFamily="34" charset="-120"/>
                         </a:rPr>
-                        <a:t>Interview one informal worker: his or her job, income and main problem.</a:t>
+                        <a:t>Name the headquarters of the North and Far North Regions.</a:t>
                       </a:r>
                       <a:endParaRPr lang="en-US" sz="1600" dirty="0">
                         <a:latin typeface="Calibri" charset="0"/>
